--- a/decks/lean-software-development/lean-software-development.pptx
+++ b/decks/lean-software-development/lean-software-development.pptx
@@ -1210,6 +1210,13 @@
 <file path=ppt/slides/slide1.xml><?xml version="1.0" encoding="utf-8"?>
 <p:sld xmlns:a="http://schemas.openxmlformats.org/drawingml/2006/main" xmlns:r="http://schemas.openxmlformats.org/officeDocument/2006/relationships" xmlns:p="http://schemas.openxmlformats.org/presentationml/2006/main">
   <p:cSld name="Slide 1">
+    <p:bg>
+      <p:bgPr>
+        <a:solidFill>
+          <a:srgbClr val="FFFFFF"/>
+        </a:solidFill>
+      </p:bgPr>
+    </p:bg>
     <p:spTree>
       <p:nvGrpSpPr>
         <p:cNvPr id="1" name=""/>
@@ -1224,30 +1231,326 @@
           <a:chExt cx="0" cy="0"/>
         </a:xfrm>
       </p:grpSpPr>
-      <p:pic>
-        <p:nvPicPr>
-          <p:cNvPr id="2" name="Image 0" descr="/tmp/slide-1787840572008-rfj7safgbw.png">    </p:cNvPr>
-          <p:cNvPicPr>
-            <a:picLocks noChangeAspect="1"/>
-          </p:cNvPicPr>
-          <p:nvPr/>
-        </p:nvPicPr>
-        <p:blipFill>
-          <a:blip r:embed="rId1"/>
-          <a:stretch>
-            <a:fillRect/>
-          </a:stretch>
-        </p:blipFill>
-        <p:spPr>
-          <a:xfrm>
-            <a:off x="0" y="0"/>
-            <a:ext cx="12188952" cy="6858000"/>
-          </a:xfrm>
-          <a:prstGeom prst="rect">
-            <a:avLst/>
-          </a:prstGeom>
-        </p:spPr>
-      </p:pic>
+      <p:sp>
+        <p:nvSpPr>
+          <p:cNvPr id="2" name="Text 0"/>
+          <p:cNvSpPr/>
+          <p:nvPr/>
+        </p:nvSpPr>
+        <p:spPr>
+          <a:xfrm>
+            <a:off x="541599" y="778669"/>
+            <a:ext cx="11105754" cy="8334"/>
+          </a:xfrm>
+          <a:prstGeom prst="rect">
+            <a:avLst/>
+          </a:prstGeom>
+          <a:solidFill>
+            <a:srgbClr val="E8E8E8"/>
+          </a:solidFill>
+          <a:ln/>
+        </p:spPr>
+        <p:txBody>
+          <a:bodyPr wrap="square" rtlCol="0" anchor="ctr"/>
+          <a:lstStyle/>
+          <a:p>
+            <a:pPr indent="0" marL="0">
+              <a:buNone/>
+            </a:pPr>
+            <a:endParaRPr lang="en-US" dirty="0"/>
+          </a:p>
+        </p:txBody>
+      </p:sp>
+      <p:sp>
+        <p:nvSpPr>
+          <p:cNvPr id="3" name="Text 1"/>
+          <p:cNvSpPr/>
+          <p:nvPr/>
+        </p:nvSpPr>
+        <p:spPr>
+          <a:xfrm>
+            <a:off x="541599" y="1394817"/>
+            <a:ext cx="11327869" cy="812602"/>
+          </a:xfrm>
+          <a:prstGeom prst="rect">
+            <a:avLst/>
+          </a:prstGeom>
+          <a:noFill/>
+          <a:ln/>
+        </p:spPr>
+        <p:txBody>
+          <a:bodyPr wrap="square" lIns="0" tIns="0" rIns="0" bIns="0" rtlCol="0" anchor="t"/>
+          <a:lstStyle/>
+          <a:p>
+            <a:pPr algn="l" indent="0" marL="0">
+              <a:lnSpc>
+                <a:spcPts val="6399"/>
+              </a:lnSpc>
+              <a:buNone/>
+            </a:pPr>
+            <a:r>
+              <a:rPr lang="en-US" sz="5333" b="1" dirty="0">
+                <a:solidFill>
+                  <a:srgbClr val="0A0A0A"/>
+                </a:solidFill>
+                <a:latin typeface="Pretendard" pitchFamily="34" charset="0"/>
+                <a:ea typeface="Pretendard" pitchFamily="34" charset="-122"/>
+                <a:cs typeface="Pretendard" pitchFamily="34" charset="-120"/>
+              </a:rPr>
+              <a:t>Lean Software Development</a:t>
+            </a:r>
+            <a:endParaRPr lang="en-US" sz="5333" dirty="0"/>
+          </a:p>
+        </p:txBody>
+      </p:sp>
+      <p:sp>
+        <p:nvSpPr>
+          <p:cNvPr id="4" name="Text 2"/>
+          <p:cNvSpPr/>
+          <p:nvPr/>
+        </p:nvSpPr>
+        <p:spPr>
+          <a:xfrm>
+            <a:off x="541599" y="2309019"/>
+            <a:ext cx="11327869" cy="434181"/>
+          </a:xfrm>
+          <a:prstGeom prst="rect">
+            <a:avLst/>
+          </a:prstGeom>
+          <a:noFill/>
+          <a:ln/>
+        </p:spPr>
+        <p:txBody>
+          <a:bodyPr wrap="square" lIns="0" tIns="0" rIns="0" bIns="0" rtlCol="0" anchor="t"/>
+          <a:lstStyle/>
+          <a:p>
+            <a:pPr algn="l" indent="0" marL="0">
+              <a:lnSpc>
+                <a:spcPts val="3420"/>
+              </a:lnSpc>
+              <a:spcBef>
+                <a:spcPts val="800"/>
+              </a:spcBef>
+              <a:buNone/>
+            </a:pPr>
+            <a:r>
+              <a:rPr lang="en-US" sz="2533" b="1" dirty="0">
+                <a:solidFill>
+                  <a:srgbClr val="7B7B7B"/>
+                </a:solidFill>
+                <a:latin typeface="Pretendard" pitchFamily="34" charset="0"/>
+                <a:ea typeface="Pretendard" pitchFamily="34" charset="-122"/>
+                <a:cs typeface="Pretendard" pitchFamily="34" charset="-120"/>
+              </a:rPr>
+              <a:t>Framework Thinking</a:t>
+            </a:r>
+            <a:endParaRPr lang="en-US" sz="2533" dirty="0"/>
+          </a:p>
+        </p:txBody>
+      </p:sp>
+      <p:sp>
+        <p:nvSpPr>
+          <p:cNvPr id="5" name="Text 3"/>
+          <p:cNvSpPr/>
+          <p:nvPr/>
+        </p:nvSpPr>
+        <p:spPr>
+          <a:xfrm>
+            <a:off x="541599" y="3081734"/>
+            <a:ext cx="947897" cy="67667"/>
+          </a:xfrm>
+          <a:prstGeom prst="roundRect">
+            <a:avLst>
+              <a:gd name="adj" fmla="val 18747268"/>
+            </a:avLst>
+          </a:prstGeom>
+          <a:solidFill>
+            <a:srgbClr val="03C75A"/>
+          </a:solidFill>
+          <a:ln/>
+        </p:spPr>
+        <p:txBody>
+          <a:bodyPr wrap="square" rtlCol="0" anchor="ctr"/>
+          <a:lstStyle/>
+          <a:p>
+            <a:pPr indent="0" marL="0">
+              <a:buNone/>
+            </a:pPr>
+            <a:endParaRPr lang="en-US" dirty="0"/>
+          </a:p>
+        </p:txBody>
+      </p:sp>
+      <p:sp>
+        <p:nvSpPr>
+          <p:cNvPr id="6" name="Text 4"/>
+          <p:cNvSpPr/>
+          <p:nvPr/>
+        </p:nvSpPr>
+        <p:spPr>
+          <a:xfrm>
+            <a:off x="541599" y="3487936"/>
+            <a:ext cx="8840918" cy="367506"/>
+          </a:xfrm>
+          <a:prstGeom prst="rect">
+            <a:avLst/>
+          </a:prstGeom>
+          <a:noFill/>
+          <a:ln/>
+        </p:spPr>
+        <p:txBody>
+          <a:bodyPr wrap="square" lIns="0" tIns="0" rIns="0" bIns="0" rtlCol="0" anchor="t"/>
+          <a:lstStyle/>
+          <a:p>
+            <a:pPr algn="l" indent="0" marL="0">
+              <a:lnSpc>
+                <a:spcPts val="2893"/>
+              </a:lnSpc>
+              <a:buNone/>
+            </a:pPr>
+            <a:r>
+              <a:rPr lang="en-US" sz="1866" dirty="0">
+                <a:solidFill>
+                  <a:srgbClr val="0A0A0A"/>
+                </a:solidFill>
+                <a:latin typeface="Pretendard" pitchFamily="34" charset="0"/>
+                <a:ea typeface="Pretendard" pitchFamily="34" charset="-122"/>
+                <a:cs typeface="Pretendard" pitchFamily="34" charset="-120"/>
+              </a:rPr>
+              <a:t>토요타 생산 방식(TPS)의 낭비 제거 철학을 소프트웨어 개발에 적용한 가치 스트림 방법론</a:t>
+            </a:r>
+            <a:endParaRPr lang="en-US" sz="1866" dirty="0"/>
+          </a:p>
+        </p:txBody>
+      </p:sp>
+      <p:sp>
+        <p:nvSpPr>
+          <p:cNvPr id="7" name="Text 5"/>
+          <p:cNvSpPr/>
+          <p:nvPr/>
+        </p:nvSpPr>
+        <p:spPr>
+          <a:xfrm>
+            <a:off x="541599" y="3973909"/>
+            <a:ext cx="8840918" cy="367506"/>
+          </a:xfrm>
+          <a:prstGeom prst="rect">
+            <a:avLst/>
+          </a:prstGeom>
+          <a:noFill/>
+          <a:ln/>
+        </p:spPr>
+        <p:txBody>
+          <a:bodyPr wrap="square" lIns="0" tIns="0" rIns="0" bIns="0" rtlCol="0" anchor="t"/>
+          <a:lstStyle/>
+          <a:p>
+            <a:pPr algn="l" indent="0" marL="0">
+              <a:lnSpc>
+                <a:spcPts val="2893"/>
+              </a:lnSpc>
+              <a:buNone/>
+            </a:pPr>
+            <a:r>
+              <a:rPr lang="en-US" sz="1866" dirty="0">
+                <a:solidFill>
+                  <a:srgbClr val="0A0A0A"/>
+                </a:solidFill>
+                <a:latin typeface="Pretendard" pitchFamily="34" charset="0"/>
+                <a:ea typeface="Pretendard" pitchFamily="34" charset="-122"/>
+                <a:cs typeface="Pretendard" pitchFamily="34" charset="-120"/>
+              </a:rPr>
+              <a:t>7가지 핵심 원칙을 바탕으로 고객 가치를 신속하게 전달</a:t>
+            </a:r>
+            <a:endParaRPr lang="en-US" sz="1866" dirty="0"/>
+          </a:p>
+        </p:txBody>
+      </p:sp>
+      <p:sp>
+        <p:nvSpPr>
+          <p:cNvPr id="8" name="Text 6"/>
+          <p:cNvSpPr/>
+          <p:nvPr/>
+        </p:nvSpPr>
+        <p:spPr>
+          <a:xfrm>
+            <a:off x="541599" y="4646216"/>
+            <a:ext cx="8840918" cy="330002"/>
+          </a:xfrm>
+          <a:prstGeom prst="rect">
+            <a:avLst/>
+          </a:prstGeom>
+          <a:noFill/>
+          <a:ln/>
+        </p:spPr>
+        <p:txBody>
+          <a:bodyPr wrap="square" lIns="0" tIns="0" rIns="0" bIns="0" rtlCol="0" anchor="t"/>
+          <a:lstStyle/>
+          <a:p>
+            <a:pPr algn="l" indent="0" marL="0">
+              <a:lnSpc>
+                <a:spcPts val="2600"/>
+              </a:lnSpc>
+              <a:spcBef>
+                <a:spcPts val="2400"/>
+              </a:spcBef>
+              <a:buNone/>
+            </a:pPr>
+            <a:r>
+              <a:rPr lang="en-US" sz="1733" dirty="0">
+                <a:solidFill>
+                  <a:srgbClr val="7B7B7B"/>
+                </a:solidFill>
+                <a:latin typeface="Pretendard" pitchFamily="34" charset="0"/>
+                <a:ea typeface="Pretendard" pitchFamily="34" charset="-122"/>
+                <a:cs typeface="Pretendard" pitchFamily="34" charset="-120"/>
+              </a:rPr>
+              <a:t>무다(Muda)·무라(Mura)·무리(Muri)의 ‘3M’ 개념 적용 및 애자일·칸반·데브옵스의 이론적 기반</a:t>
+            </a:r>
+            <a:endParaRPr lang="en-US" sz="1733" dirty="0"/>
+          </a:p>
+        </p:txBody>
+      </p:sp>
+      <p:sp>
+        <p:nvSpPr>
+          <p:cNvPr id="9" name="Text 7"/>
+          <p:cNvSpPr/>
+          <p:nvPr/>
+        </p:nvSpPr>
+        <p:spPr>
+          <a:xfrm>
+            <a:off x="541599" y="5314752"/>
+            <a:ext cx="11327869" cy="228600"/>
+          </a:xfrm>
+          <a:prstGeom prst="rect">
+            <a:avLst/>
+          </a:prstGeom>
+          <a:noFill/>
+          <a:ln/>
+        </p:spPr>
+        <p:txBody>
+          <a:bodyPr wrap="square" lIns="0" tIns="0" rIns="0" bIns="0" rtlCol="0" anchor="t"/>
+          <a:lstStyle/>
+          <a:p>
+            <a:pPr algn="l" indent="0" marL="0">
+              <a:spcBef>
+                <a:spcPts val="2666"/>
+              </a:spcBef>
+              <a:buNone/>
+            </a:pPr>
+            <a:r>
+              <a:rPr lang="en-US" sz="1466" b="1" dirty="0">
+                <a:solidFill>
+                  <a:srgbClr val="7B7B7B"/>
+                </a:solidFill>
+                <a:latin typeface="Pretendard" pitchFamily="34" charset="0"/>
+                <a:ea typeface="Pretendard" pitchFamily="34" charset="-122"/>
+                <a:cs typeface="Pretendard" pitchFamily="34" charset="-120"/>
+              </a:rPr>
+              <a:t>발표자 · 소속</a:t>
+            </a:r>
+            <a:endParaRPr lang="en-US" sz="1466" dirty="0"/>
+          </a:p>
+        </p:txBody>
+      </p:sp>
     </p:spTree>
   </p:cSld>
   <p:clrMapOvr>
@@ -1259,6 +1562,13 @@
 <file path=ppt/slides/slide2.xml><?xml version="1.0" encoding="utf-8"?>
 <p:sld xmlns:a="http://schemas.openxmlformats.org/drawingml/2006/main" xmlns:r="http://schemas.openxmlformats.org/officeDocument/2006/relationships" xmlns:p="http://schemas.openxmlformats.org/presentationml/2006/main">
   <p:cSld name="Slide 2">
+    <p:bg>
+      <p:bgPr>
+        <a:solidFill>
+          <a:srgbClr val="FFFFFF"/>
+        </a:solidFill>
+      </p:bgPr>
+    </p:bg>
     <p:spTree>
       <p:nvGrpSpPr>
         <p:cNvPr id="1" name=""/>
@@ -1273,30 +1583,857 @@
           <a:chExt cx="0" cy="0"/>
         </a:xfrm>
       </p:grpSpPr>
-      <p:pic>
-        <p:nvPicPr>
-          <p:cNvPr id="2" name="Image 0" descr="/tmp/slide-1787840572542-a72qrpmic07.png">    </p:cNvPr>
-          <p:cNvPicPr>
-            <a:picLocks noChangeAspect="1"/>
-          </p:cNvPicPr>
-          <p:nvPr/>
-        </p:nvPicPr>
-        <p:blipFill>
-          <a:blip r:embed="rId1"/>
-          <a:stretch>
-            <a:fillRect/>
-          </a:stretch>
-        </p:blipFill>
-        <p:spPr>
-          <a:xfrm>
-            <a:off x="0" y="0"/>
-            <a:ext cx="12188952" cy="6858000"/>
-          </a:xfrm>
-          <a:prstGeom prst="rect">
-            <a:avLst/>
-          </a:prstGeom>
-        </p:spPr>
-      </p:pic>
+      <p:sp>
+        <p:nvSpPr>
+          <p:cNvPr id="2" name="Text 0"/>
+          <p:cNvSpPr/>
+          <p:nvPr/>
+        </p:nvSpPr>
+        <p:spPr>
+          <a:xfrm>
+            <a:off x="541599" y="778669"/>
+            <a:ext cx="11105754" cy="8334"/>
+          </a:xfrm>
+          <a:prstGeom prst="rect">
+            <a:avLst/>
+          </a:prstGeom>
+          <a:solidFill>
+            <a:srgbClr val="E8E8E8"/>
+          </a:solidFill>
+          <a:ln/>
+        </p:spPr>
+        <p:txBody>
+          <a:bodyPr wrap="square" rtlCol="0" anchor="ctr"/>
+          <a:lstStyle/>
+          <a:p>
+            <a:pPr indent="0" marL="0">
+              <a:buNone/>
+            </a:pPr>
+            <a:endParaRPr lang="en-US" dirty="0"/>
+          </a:p>
+        </p:txBody>
+      </p:sp>
+      <p:sp>
+        <p:nvSpPr>
+          <p:cNvPr id="3" name="Text 1"/>
+          <p:cNvSpPr/>
+          <p:nvPr/>
+        </p:nvSpPr>
+        <p:spPr>
+          <a:xfrm>
+            <a:off x="541599" y="1023937"/>
+            <a:ext cx="11327869" cy="536377"/>
+          </a:xfrm>
+          <a:prstGeom prst="rect">
+            <a:avLst/>
+          </a:prstGeom>
+          <a:noFill/>
+          <a:ln/>
+        </p:spPr>
+        <p:txBody>
+          <a:bodyPr wrap="square" lIns="0" tIns="0" rIns="0" bIns="0" rtlCol="0" anchor="t"/>
+          <a:lstStyle/>
+          <a:p>
+            <a:pPr algn="l" indent="0" marL="0">
+              <a:lnSpc>
+                <a:spcPts val="4223"/>
+              </a:lnSpc>
+              <a:spcBef>
+                <a:spcPts val="1866"/>
+              </a:spcBef>
+              <a:buNone/>
+            </a:pPr>
+            <a:r>
+              <a:rPr lang="en-US" sz="3200" b="1" dirty="0">
+                <a:solidFill>
+                  <a:srgbClr val="0A0A0A"/>
+                </a:solidFill>
+                <a:latin typeface="Pretendard" pitchFamily="34" charset="0"/>
+                <a:ea typeface="Pretendard" pitchFamily="34" charset="-122"/>
+                <a:cs typeface="Pretendard" pitchFamily="34" charset="-120"/>
+              </a:rPr>
+              <a:t>Lean Software Development – 7가지 원칙 (전반부)</a:t>
+            </a:r>
+            <a:endParaRPr lang="en-US" sz="3200" dirty="0"/>
+          </a:p>
+        </p:txBody>
+      </p:sp>
+      <p:sp>
+        <p:nvSpPr>
+          <p:cNvPr id="4" name="Shape 2"/>
+          <p:cNvSpPr/>
+          <p:nvPr/>
+        </p:nvSpPr>
+        <p:spPr>
+          <a:xfrm>
+            <a:off x="566993" y="2433836"/>
+            <a:ext cx="0" cy="613569"/>
+          </a:xfrm>
+          <a:prstGeom prst="line">
+            <a:avLst/>
+          </a:prstGeom>
+          <a:noFill/>
+          <a:ln w="50794">
+            <a:solidFill>
+              <a:srgbClr val="FFFFFF"/>
+            </a:solidFill>
+            <a:prstDash val="solid"/>
+          </a:ln>
+        </p:spPr>
+      </p:sp>
+      <p:sp>
+        <p:nvSpPr>
+          <p:cNvPr id="5" name="Text 3"/>
+          <p:cNvSpPr/>
+          <p:nvPr/>
+        </p:nvSpPr>
+        <p:spPr>
+          <a:xfrm>
+            <a:off x="778474" y="2433836"/>
+            <a:ext cx="448825" cy="342900"/>
+          </a:xfrm>
+          <a:prstGeom prst="rect">
+            <a:avLst/>
+          </a:prstGeom>
+          <a:noFill/>
+          <a:ln/>
+        </p:spPr>
+        <p:txBody>
+          <a:bodyPr wrap="square" lIns="0" tIns="0" rIns="0" bIns="0" rtlCol="0" anchor="t"/>
+          <a:lstStyle/>
+          <a:p>
+            <a:pPr algn="l" indent="0" marL="0">
+              <a:lnSpc>
+                <a:spcPts val="2700"/>
+              </a:lnSpc>
+              <a:buNone/>
+            </a:pPr>
+            <a:r>
+              <a:rPr lang="en-US" sz="2000" b="1" dirty="0">
+                <a:solidFill>
+                  <a:srgbClr val="B4B4B4"/>
+                </a:solidFill>
+                <a:latin typeface="Pretendard" pitchFamily="34" charset="0"/>
+                <a:ea typeface="Pretendard" pitchFamily="34" charset="-122"/>
+                <a:cs typeface="Pretendard" pitchFamily="34" charset="-120"/>
+              </a:rPr>
+              <a:t>1</a:t>
+            </a:r>
+            <a:endParaRPr lang="en-US" sz="2000" dirty="0"/>
+          </a:p>
+        </p:txBody>
+      </p:sp>
+      <p:sp>
+        <p:nvSpPr>
+          <p:cNvPr id="6" name="Text 4"/>
+          <p:cNvSpPr/>
+          <p:nvPr/>
+        </p:nvSpPr>
+        <p:spPr>
+          <a:xfrm>
+            <a:off x="1455374" y="2433836"/>
+            <a:ext cx="2969974" cy="342900"/>
+          </a:xfrm>
+          <a:prstGeom prst="rect">
+            <a:avLst/>
+          </a:prstGeom>
+          <a:noFill/>
+          <a:ln/>
+        </p:spPr>
+        <p:txBody>
+          <a:bodyPr wrap="square" lIns="0" tIns="0" rIns="0" bIns="0" rtlCol="0" anchor="t"/>
+          <a:lstStyle/>
+          <a:p>
+            <a:pPr algn="l" indent="0" marL="0">
+              <a:lnSpc>
+                <a:spcPts val="2700"/>
+              </a:lnSpc>
+              <a:buNone/>
+            </a:pPr>
+            <a:r>
+              <a:rPr lang="en-US" sz="2000" b="1" dirty="0">
+                <a:solidFill>
+                  <a:srgbClr val="0A0A0A"/>
+                </a:solidFill>
+                <a:latin typeface="Pretendard" pitchFamily="34" charset="0"/>
+                <a:ea typeface="Pretendard" pitchFamily="34" charset="-122"/>
+                <a:cs typeface="Pretendard" pitchFamily="34" charset="-120"/>
+              </a:rPr>
+              <a:t>낭비 제거</a:t>
+            </a:r>
+            <a:endParaRPr lang="en-US" sz="2000" dirty="0"/>
+          </a:p>
+        </p:txBody>
+      </p:sp>
+      <p:sp>
+        <p:nvSpPr>
+          <p:cNvPr id="7" name="Text 5"/>
+          <p:cNvSpPr/>
+          <p:nvPr/>
+        </p:nvSpPr>
+        <p:spPr>
+          <a:xfrm>
+            <a:off x="1455374" y="2810470"/>
+            <a:ext cx="2969974" cy="236934"/>
+          </a:xfrm>
+          <a:prstGeom prst="rect">
+            <a:avLst/>
+          </a:prstGeom>
+          <a:noFill/>
+          <a:ln/>
+        </p:spPr>
+        <p:txBody>
+          <a:bodyPr wrap="square" lIns="0" tIns="0" rIns="0" bIns="0" rtlCol="0" anchor="t"/>
+          <a:lstStyle/>
+          <a:p>
+            <a:pPr algn="l" indent="0" marL="0">
+              <a:lnSpc>
+                <a:spcPts val="1866"/>
+              </a:lnSpc>
+              <a:spcBef>
+                <a:spcPts val="267"/>
+              </a:spcBef>
+              <a:buNone/>
+            </a:pPr>
+            <a:r>
+              <a:rPr lang="en-US" sz="1333" dirty="0">
+                <a:solidFill>
+                  <a:srgbClr val="B4B4B4"/>
+                </a:solidFill>
+                <a:latin typeface="Pretendard" pitchFamily="34" charset="0"/>
+                <a:ea typeface="Pretendard" pitchFamily="34" charset="-122"/>
+                <a:cs typeface="Pretendard" pitchFamily="34" charset="-120"/>
+              </a:rPr>
+              <a:t>Eliminate Waste</a:t>
+            </a:r>
+            <a:endParaRPr lang="en-US" sz="1333" dirty="0"/>
+          </a:p>
+        </p:txBody>
+      </p:sp>
+      <p:sp>
+        <p:nvSpPr>
+          <p:cNvPr id="8" name="Text 6"/>
+          <p:cNvSpPr/>
+          <p:nvPr/>
+        </p:nvSpPr>
+        <p:spPr>
+          <a:xfrm>
+            <a:off x="4603988" y="2433836"/>
+            <a:ext cx="7184233" cy="355600"/>
+          </a:xfrm>
+          <a:prstGeom prst="rect">
+            <a:avLst/>
+          </a:prstGeom>
+          <a:noFill/>
+          <a:ln/>
+        </p:spPr>
+        <p:txBody>
+          <a:bodyPr wrap="square" lIns="0" tIns="0" rIns="0" bIns="0" rtlCol="0" anchor="t"/>
+          <a:lstStyle/>
+          <a:p>
+            <a:pPr algn="l" indent="0" marL="0">
+              <a:lnSpc>
+                <a:spcPts val="2800"/>
+              </a:lnSpc>
+              <a:buNone/>
+            </a:pPr>
+            <a:r>
+              <a:rPr lang="en-US" sz="1866" dirty="0">
+                <a:solidFill>
+                  <a:srgbClr val="0A0A0A"/>
+                </a:solidFill>
+                <a:latin typeface="Pretendard" pitchFamily="34" charset="0"/>
+                <a:ea typeface="Pretendard" pitchFamily="34" charset="-122"/>
+                <a:cs typeface="Pretendard" pitchFamily="34" charset="-120"/>
+              </a:rPr>
+              <a:t>고객 가치에 기여하지 않는 불필요한 활동 및 문서 제거</a:t>
+            </a:r>
+            <a:endParaRPr lang="en-US" sz="1866" dirty="0"/>
+          </a:p>
+        </p:txBody>
+      </p:sp>
+      <p:sp>
+        <p:nvSpPr>
+          <p:cNvPr id="9" name="Shape 7"/>
+          <p:cNvSpPr/>
+          <p:nvPr/>
+        </p:nvSpPr>
+        <p:spPr>
+          <a:xfrm>
+            <a:off x="566993" y="3267472"/>
+            <a:ext cx="0" cy="613569"/>
+          </a:xfrm>
+          <a:prstGeom prst="line">
+            <a:avLst/>
+          </a:prstGeom>
+          <a:noFill/>
+          <a:ln w="50794">
+            <a:solidFill>
+              <a:srgbClr val="FFFFFF"/>
+            </a:solidFill>
+            <a:prstDash val="solid"/>
+          </a:ln>
+        </p:spPr>
+      </p:sp>
+      <p:sp>
+        <p:nvSpPr>
+          <p:cNvPr id="10" name="Text 8"/>
+          <p:cNvSpPr/>
+          <p:nvPr/>
+        </p:nvSpPr>
+        <p:spPr>
+          <a:xfrm>
+            <a:off x="778474" y="3267472"/>
+            <a:ext cx="448825" cy="342900"/>
+          </a:xfrm>
+          <a:prstGeom prst="rect">
+            <a:avLst/>
+          </a:prstGeom>
+          <a:noFill/>
+          <a:ln/>
+        </p:spPr>
+        <p:txBody>
+          <a:bodyPr wrap="square" lIns="0" tIns="0" rIns="0" bIns="0" rtlCol="0" anchor="t"/>
+          <a:lstStyle/>
+          <a:p>
+            <a:pPr algn="l" indent="0" marL="0">
+              <a:lnSpc>
+                <a:spcPts val="2700"/>
+              </a:lnSpc>
+              <a:buNone/>
+            </a:pPr>
+            <a:r>
+              <a:rPr lang="en-US" sz="2000" b="1" dirty="0">
+                <a:solidFill>
+                  <a:srgbClr val="B4B4B4"/>
+                </a:solidFill>
+                <a:latin typeface="Pretendard" pitchFamily="34" charset="0"/>
+                <a:ea typeface="Pretendard" pitchFamily="34" charset="-122"/>
+                <a:cs typeface="Pretendard" pitchFamily="34" charset="-120"/>
+              </a:rPr>
+              <a:t>2</a:t>
+            </a:r>
+            <a:endParaRPr lang="en-US" sz="2000" dirty="0"/>
+          </a:p>
+        </p:txBody>
+      </p:sp>
+      <p:sp>
+        <p:nvSpPr>
+          <p:cNvPr id="11" name="Text 9"/>
+          <p:cNvSpPr/>
+          <p:nvPr/>
+        </p:nvSpPr>
+        <p:spPr>
+          <a:xfrm>
+            <a:off x="1455374" y="3267472"/>
+            <a:ext cx="2969974" cy="342900"/>
+          </a:xfrm>
+          <a:prstGeom prst="rect">
+            <a:avLst/>
+          </a:prstGeom>
+          <a:noFill/>
+          <a:ln/>
+        </p:spPr>
+        <p:txBody>
+          <a:bodyPr wrap="square" lIns="0" tIns="0" rIns="0" bIns="0" rtlCol="0" anchor="t"/>
+          <a:lstStyle/>
+          <a:p>
+            <a:pPr algn="l" indent="0" marL="0">
+              <a:lnSpc>
+                <a:spcPts val="2700"/>
+              </a:lnSpc>
+              <a:buNone/>
+            </a:pPr>
+            <a:r>
+              <a:rPr lang="en-US" sz="2000" b="1" dirty="0">
+                <a:solidFill>
+                  <a:srgbClr val="0A0A0A"/>
+                </a:solidFill>
+                <a:latin typeface="Pretendard" pitchFamily="34" charset="0"/>
+                <a:ea typeface="Pretendard" pitchFamily="34" charset="-122"/>
+                <a:cs typeface="Pretendard" pitchFamily="34" charset="-120"/>
+              </a:rPr>
+              <a:t>학습 증폭</a:t>
+            </a:r>
+            <a:endParaRPr lang="en-US" sz="2000" dirty="0"/>
+          </a:p>
+        </p:txBody>
+      </p:sp>
+      <p:sp>
+        <p:nvSpPr>
+          <p:cNvPr id="12" name="Text 10"/>
+          <p:cNvSpPr/>
+          <p:nvPr/>
+        </p:nvSpPr>
+        <p:spPr>
+          <a:xfrm>
+            <a:off x="1455374" y="3644106"/>
+            <a:ext cx="2969974" cy="236934"/>
+          </a:xfrm>
+          <a:prstGeom prst="rect">
+            <a:avLst/>
+          </a:prstGeom>
+          <a:noFill/>
+          <a:ln/>
+        </p:spPr>
+        <p:txBody>
+          <a:bodyPr wrap="square" lIns="0" tIns="0" rIns="0" bIns="0" rtlCol="0" anchor="t"/>
+          <a:lstStyle/>
+          <a:p>
+            <a:pPr algn="l" indent="0" marL="0">
+              <a:lnSpc>
+                <a:spcPts val="1866"/>
+              </a:lnSpc>
+              <a:spcBef>
+                <a:spcPts val="267"/>
+              </a:spcBef>
+              <a:buNone/>
+            </a:pPr>
+            <a:r>
+              <a:rPr lang="en-US" sz="1333" dirty="0">
+                <a:solidFill>
+                  <a:srgbClr val="B4B4B4"/>
+                </a:solidFill>
+                <a:latin typeface="Pretendard" pitchFamily="34" charset="0"/>
+                <a:ea typeface="Pretendard" pitchFamily="34" charset="-122"/>
+                <a:cs typeface="Pretendard" pitchFamily="34" charset="-120"/>
+              </a:rPr>
+              <a:t>Amplify Learning</a:t>
+            </a:r>
+            <a:endParaRPr lang="en-US" sz="1333" dirty="0"/>
+          </a:p>
+        </p:txBody>
+      </p:sp>
+      <p:sp>
+        <p:nvSpPr>
+          <p:cNvPr id="13" name="Text 11"/>
+          <p:cNvSpPr/>
+          <p:nvPr/>
+        </p:nvSpPr>
+        <p:spPr>
+          <a:xfrm>
+            <a:off x="4603988" y="3267472"/>
+            <a:ext cx="7184233" cy="355600"/>
+          </a:xfrm>
+          <a:prstGeom prst="rect">
+            <a:avLst/>
+          </a:prstGeom>
+          <a:noFill/>
+          <a:ln/>
+        </p:spPr>
+        <p:txBody>
+          <a:bodyPr wrap="square" lIns="0" tIns="0" rIns="0" bIns="0" rtlCol="0" anchor="t"/>
+          <a:lstStyle/>
+          <a:p>
+            <a:pPr algn="l" indent="0" marL="0">
+              <a:lnSpc>
+                <a:spcPts val="2800"/>
+              </a:lnSpc>
+              <a:buNone/>
+            </a:pPr>
+            <a:r>
+              <a:rPr lang="en-US" sz="1866" dirty="0">
+                <a:solidFill>
+                  <a:srgbClr val="0A0A0A"/>
+                </a:solidFill>
+                <a:latin typeface="Pretendard" pitchFamily="34" charset="0"/>
+                <a:ea typeface="Pretendard" pitchFamily="34" charset="-122"/>
+                <a:cs typeface="Pretendard" pitchFamily="34" charset="-120"/>
+              </a:rPr>
+              <a:t>짧은 반복과 실험을 통한 지식 축적 (프로토타입, A/B 테스트)</a:t>
+            </a:r>
+            <a:endParaRPr lang="en-US" sz="1866" dirty="0"/>
+          </a:p>
+        </p:txBody>
+      </p:sp>
+      <p:sp>
+        <p:nvSpPr>
+          <p:cNvPr id="14" name="Shape 12"/>
+          <p:cNvSpPr/>
+          <p:nvPr/>
+        </p:nvSpPr>
+        <p:spPr>
+          <a:xfrm>
+            <a:off x="566993" y="4101108"/>
+            <a:ext cx="0" cy="613569"/>
+          </a:xfrm>
+          <a:prstGeom prst="line">
+            <a:avLst/>
+          </a:prstGeom>
+          <a:noFill/>
+          <a:ln w="50794">
+            <a:solidFill>
+              <a:srgbClr val="FFFFFF"/>
+            </a:solidFill>
+            <a:prstDash val="solid"/>
+          </a:ln>
+        </p:spPr>
+      </p:sp>
+      <p:sp>
+        <p:nvSpPr>
+          <p:cNvPr id="15" name="Text 13"/>
+          <p:cNvSpPr/>
+          <p:nvPr/>
+        </p:nvSpPr>
+        <p:spPr>
+          <a:xfrm>
+            <a:off x="778474" y="4101108"/>
+            <a:ext cx="448825" cy="342900"/>
+          </a:xfrm>
+          <a:prstGeom prst="rect">
+            <a:avLst/>
+          </a:prstGeom>
+          <a:noFill/>
+          <a:ln/>
+        </p:spPr>
+        <p:txBody>
+          <a:bodyPr wrap="square" lIns="0" tIns="0" rIns="0" bIns="0" rtlCol="0" anchor="t"/>
+          <a:lstStyle/>
+          <a:p>
+            <a:pPr algn="l" indent="0" marL="0">
+              <a:lnSpc>
+                <a:spcPts val="2700"/>
+              </a:lnSpc>
+              <a:buNone/>
+            </a:pPr>
+            <a:r>
+              <a:rPr lang="en-US" sz="2000" b="1" dirty="0">
+                <a:solidFill>
+                  <a:srgbClr val="B4B4B4"/>
+                </a:solidFill>
+                <a:latin typeface="Pretendard" pitchFamily="34" charset="0"/>
+                <a:ea typeface="Pretendard" pitchFamily="34" charset="-122"/>
+                <a:cs typeface="Pretendard" pitchFamily="34" charset="-120"/>
+              </a:rPr>
+              <a:t>3</a:t>
+            </a:r>
+            <a:endParaRPr lang="en-US" sz="2000" dirty="0"/>
+          </a:p>
+        </p:txBody>
+      </p:sp>
+      <p:sp>
+        <p:nvSpPr>
+          <p:cNvPr id="16" name="Text 14"/>
+          <p:cNvSpPr/>
+          <p:nvPr/>
+        </p:nvSpPr>
+        <p:spPr>
+          <a:xfrm>
+            <a:off x="1455374" y="4101108"/>
+            <a:ext cx="2969974" cy="342900"/>
+          </a:xfrm>
+          <a:prstGeom prst="rect">
+            <a:avLst/>
+          </a:prstGeom>
+          <a:noFill/>
+          <a:ln/>
+        </p:spPr>
+        <p:txBody>
+          <a:bodyPr wrap="square" lIns="0" tIns="0" rIns="0" bIns="0" rtlCol="0" anchor="t"/>
+          <a:lstStyle/>
+          <a:p>
+            <a:pPr algn="l" indent="0" marL="0">
+              <a:lnSpc>
+                <a:spcPts val="2700"/>
+              </a:lnSpc>
+              <a:buNone/>
+            </a:pPr>
+            <a:r>
+              <a:rPr lang="en-US" sz="2000" b="1" dirty="0">
+                <a:solidFill>
+                  <a:srgbClr val="0A0A0A"/>
+                </a:solidFill>
+                <a:latin typeface="Pretendard" pitchFamily="34" charset="0"/>
+                <a:ea typeface="Pretendard" pitchFamily="34" charset="-122"/>
+                <a:cs typeface="Pretendard" pitchFamily="34" charset="-120"/>
+              </a:rPr>
+              <a:t>최대한 늦은 결정</a:t>
+            </a:r>
+            <a:endParaRPr lang="en-US" sz="2000" dirty="0"/>
+          </a:p>
+        </p:txBody>
+      </p:sp>
+      <p:sp>
+        <p:nvSpPr>
+          <p:cNvPr id="17" name="Text 15"/>
+          <p:cNvSpPr/>
+          <p:nvPr/>
+        </p:nvSpPr>
+        <p:spPr>
+          <a:xfrm>
+            <a:off x="1455374" y="4477742"/>
+            <a:ext cx="2969974" cy="236934"/>
+          </a:xfrm>
+          <a:prstGeom prst="rect">
+            <a:avLst/>
+          </a:prstGeom>
+          <a:noFill/>
+          <a:ln/>
+        </p:spPr>
+        <p:txBody>
+          <a:bodyPr wrap="square" lIns="0" tIns="0" rIns="0" bIns="0" rtlCol="0" anchor="t"/>
+          <a:lstStyle/>
+          <a:p>
+            <a:pPr algn="l" indent="0" marL="0">
+              <a:lnSpc>
+                <a:spcPts val="1866"/>
+              </a:lnSpc>
+              <a:spcBef>
+                <a:spcPts val="267"/>
+              </a:spcBef>
+              <a:buNone/>
+            </a:pPr>
+            <a:r>
+              <a:rPr lang="en-US" sz="1333" dirty="0">
+                <a:solidFill>
+                  <a:srgbClr val="B4B4B4"/>
+                </a:solidFill>
+                <a:latin typeface="Pretendard" pitchFamily="34" charset="0"/>
+                <a:ea typeface="Pretendard" pitchFamily="34" charset="-122"/>
+                <a:cs typeface="Pretendard" pitchFamily="34" charset="-120"/>
+              </a:rPr>
+              <a:t>Decide as Late as Possible</a:t>
+            </a:r>
+            <a:endParaRPr lang="en-US" sz="1333" dirty="0"/>
+          </a:p>
+        </p:txBody>
+      </p:sp>
+      <p:sp>
+        <p:nvSpPr>
+          <p:cNvPr id="18" name="Text 16"/>
+          <p:cNvSpPr/>
+          <p:nvPr/>
+        </p:nvSpPr>
+        <p:spPr>
+          <a:xfrm>
+            <a:off x="4603988" y="4101108"/>
+            <a:ext cx="7184233" cy="355600"/>
+          </a:xfrm>
+          <a:prstGeom prst="rect">
+            <a:avLst/>
+          </a:prstGeom>
+          <a:noFill/>
+          <a:ln/>
+        </p:spPr>
+        <p:txBody>
+          <a:bodyPr wrap="square" lIns="0" tIns="0" rIns="0" bIns="0" rtlCol="0" anchor="t"/>
+          <a:lstStyle/>
+          <a:p>
+            <a:pPr algn="l" indent="0" marL="0">
+              <a:lnSpc>
+                <a:spcPts val="2800"/>
+              </a:lnSpc>
+              <a:buNone/>
+            </a:pPr>
+            <a:r>
+              <a:rPr lang="en-US" sz="1866" dirty="0">
+                <a:solidFill>
+                  <a:srgbClr val="0A0A0A"/>
+                </a:solidFill>
+                <a:latin typeface="Pretendard" pitchFamily="34" charset="0"/>
+                <a:ea typeface="Pretendard" pitchFamily="34" charset="-122"/>
+                <a:cs typeface="Pretendard" pitchFamily="34" charset="-120"/>
+              </a:rPr>
+              <a:t>불확실성 속에서 비가역적 결정을 최대한 지연</a:t>
+            </a:r>
+            <a:endParaRPr lang="en-US" sz="1866" dirty="0"/>
+          </a:p>
+        </p:txBody>
+      </p:sp>
+      <p:sp>
+        <p:nvSpPr>
+          <p:cNvPr id="19" name="Shape 17"/>
+          <p:cNvSpPr/>
+          <p:nvPr/>
+        </p:nvSpPr>
+        <p:spPr>
+          <a:xfrm>
+            <a:off x="566993" y="4934744"/>
+            <a:ext cx="0" cy="613569"/>
+          </a:xfrm>
+          <a:prstGeom prst="line">
+            <a:avLst/>
+          </a:prstGeom>
+          <a:noFill/>
+          <a:ln w="50794">
+            <a:solidFill>
+              <a:srgbClr val="FFFFFF"/>
+            </a:solidFill>
+            <a:prstDash val="solid"/>
+          </a:ln>
+        </p:spPr>
+      </p:sp>
+      <p:sp>
+        <p:nvSpPr>
+          <p:cNvPr id="20" name="Text 18"/>
+          <p:cNvSpPr/>
+          <p:nvPr/>
+        </p:nvSpPr>
+        <p:spPr>
+          <a:xfrm>
+            <a:off x="778474" y="4934744"/>
+            <a:ext cx="448825" cy="342900"/>
+          </a:xfrm>
+          <a:prstGeom prst="rect">
+            <a:avLst/>
+          </a:prstGeom>
+          <a:noFill/>
+          <a:ln/>
+        </p:spPr>
+        <p:txBody>
+          <a:bodyPr wrap="square" lIns="0" tIns="0" rIns="0" bIns="0" rtlCol="0" anchor="t"/>
+          <a:lstStyle/>
+          <a:p>
+            <a:pPr algn="l" indent="0" marL="0">
+              <a:lnSpc>
+                <a:spcPts val="2700"/>
+              </a:lnSpc>
+              <a:buNone/>
+            </a:pPr>
+            <a:r>
+              <a:rPr lang="en-US" sz="2000" b="1" dirty="0">
+                <a:solidFill>
+                  <a:srgbClr val="B4B4B4"/>
+                </a:solidFill>
+                <a:latin typeface="Pretendard" pitchFamily="34" charset="0"/>
+                <a:ea typeface="Pretendard" pitchFamily="34" charset="-122"/>
+                <a:cs typeface="Pretendard" pitchFamily="34" charset="-120"/>
+              </a:rPr>
+              <a:t>4</a:t>
+            </a:r>
+            <a:endParaRPr lang="en-US" sz="2000" dirty="0"/>
+          </a:p>
+        </p:txBody>
+      </p:sp>
+      <p:sp>
+        <p:nvSpPr>
+          <p:cNvPr id="21" name="Text 19"/>
+          <p:cNvSpPr/>
+          <p:nvPr/>
+        </p:nvSpPr>
+        <p:spPr>
+          <a:xfrm>
+            <a:off x="1455374" y="4934744"/>
+            <a:ext cx="2969974" cy="342900"/>
+          </a:xfrm>
+          <a:prstGeom prst="rect">
+            <a:avLst/>
+          </a:prstGeom>
+          <a:noFill/>
+          <a:ln/>
+        </p:spPr>
+        <p:txBody>
+          <a:bodyPr wrap="square" lIns="0" tIns="0" rIns="0" bIns="0" rtlCol="0" anchor="t"/>
+          <a:lstStyle/>
+          <a:p>
+            <a:pPr algn="l" indent="0" marL="0">
+              <a:lnSpc>
+                <a:spcPts val="2700"/>
+              </a:lnSpc>
+              <a:buNone/>
+            </a:pPr>
+            <a:r>
+              <a:rPr lang="en-US" sz="2000" b="1" dirty="0">
+                <a:solidFill>
+                  <a:srgbClr val="0A0A0A"/>
+                </a:solidFill>
+                <a:latin typeface="Pretendard" pitchFamily="34" charset="0"/>
+                <a:ea typeface="Pretendard" pitchFamily="34" charset="-122"/>
+                <a:cs typeface="Pretendard" pitchFamily="34" charset="-120"/>
+              </a:rPr>
+              <a:t>최대한 빠른 전달</a:t>
+            </a:r>
+            <a:endParaRPr lang="en-US" sz="2000" dirty="0"/>
+          </a:p>
+        </p:txBody>
+      </p:sp>
+      <p:sp>
+        <p:nvSpPr>
+          <p:cNvPr id="22" name="Text 20"/>
+          <p:cNvSpPr/>
+          <p:nvPr/>
+        </p:nvSpPr>
+        <p:spPr>
+          <a:xfrm>
+            <a:off x="1455374" y="5311378"/>
+            <a:ext cx="2969974" cy="236934"/>
+          </a:xfrm>
+          <a:prstGeom prst="rect">
+            <a:avLst/>
+          </a:prstGeom>
+          <a:noFill/>
+          <a:ln/>
+        </p:spPr>
+        <p:txBody>
+          <a:bodyPr wrap="square" lIns="0" tIns="0" rIns="0" bIns="0" rtlCol="0" anchor="t"/>
+          <a:lstStyle/>
+          <a:p>
+            <a:pPr algn="l" indent="0" marL="0">
+              <a:lnSpc>
+                <a:spcPts val="1866"/>
+              </a:lnSpc>
+              <a:spcBef>
+                <a:spcPts val="267"/>
+              </a:spcBef>
+              <a:buNone/>
+            </a:pPr>
+            <a:r>
+              <a:rPr lang="en-US" sz="1333" dirty="0">
+                <a:solidFill>
+                  <a:srgbClr val="B4B4B4"/>
+                </a:solidFill>
+                <a:latin typeface="Pretendard" pitchFamily="34" charset="0"/>
+                <a:ea typeface="Pretendard" pitchFamily="34" charset="-122"/>
+                <a:cs typeface="Pretendard" pitchFamily="34" charset="-120"/>
+              </a:rPr>
+              <a:t>Deliver as Fast as Possible</a:t>
+            </a:r>
+            <a:endParaRPr lang="en-US" sz="1333" dirty="0"/>
+          </a:p>
+        </p:txBody>
+      </p:sp>
+      <p:sp>
+        <p:nvSpPr>
+          <p:cNvPr id="23" name="Text 21"/>
+          <p:cNvSpPr/>
+          <p:nvPr/>
+        </p:nvSpPr>
+        <p:spPr>
+          <a:xfrm>
+            <a:off x="4603988" y="4934744"/>
+            <a:ext cx="7184233" cy="355600"/>
+          </a:xfrm>
+          <a:prstGeom prst="rect">
+            <a:avLst/>
+          </a:prstGeom>
+          <a:noFill/>
+          <a:ln/>
+        </p:spPr>
+        <p:txBody>
+          <a:bodyPr wrap="square" lIns="0" tIns="0" rIns="0" bIns="0" rtlCol="0" anchor="t"/>
+          <a:lstStyle/>
+          <a:p>
+            <a:pPr algn="l" indent="0" marL="0">
+              <a:lnSpc>
+                <a:spcPts val="2800"/>
+              </a:lnSpc>
+              <a:buNone/>
+            </a:pPr>
+            <a:r>
+              <a:rPr lang="en-US" sz="1866" dirty="0">
+                <a:solidFill>
+                  <a:srgbClr val="0A0A0A"/>
+                </a:solidFill>
+                <a:latin typeface="Pretendard" pitchFamily="34" charset="0"/>
+                <a:ea typeface="Pretendard" pitchFamily="34" charset="-122"/>
+                <a:cs typeface="Pretendard" pitchFamily="34" charset="-120"/>
+              </a:rPr>
+              <a:t>작은 단위로 빈번하게 배포하여 피드백 주기 단축 (CI/CD)</a:t>
+            </a:r>
+            <a:endParaRPr lang="en-US" sz="1866" dirty="0"/>
+          </a:p>
+        </p:txBody>
+      </p:sp>
     </p:spTree>
   </p:cSld>
   <p:clrMapOvr>
@@ -1308,6 +2445,13 @@
 <file path=ppt/slides/slide3.xml><?xml version="1.0" encoding="utf-8"?>
 <p:sld xmlns:a="http://schemas.openxmlformats.org/drawingml/2006/main" xmlns:r="http://schemas.openxmlformats.org/officeDocument/2006/relationships" xmlns:p="http://schemas.openxmlformats.org/presentationml/2006/main">
   <p:cSld name="Slide 3">
+    <p:bg>
+      <p:bgPr>
+        <a:solidFill>
+          <a:srgbClr val="FFFFFF"/>
+        </a:solidFill>
+      </p:bgPr>
+    </p:bg>
     <p:spTree>
       <p:nvGrpSpPr>
         <p:cNvPr id="1" name=""/>
@@ -1322,30 +2466,663 @@
           <a:chExt cx="0" cy="0"/>
         </a:xfrm>
       </p:grpSpPr>
-      <p:pic>
-        <p:nvPicPr>
-          <p:cNvPr id="2" name="Image 0" descr="/tmp/slide-1787840572999-h9sbve8z75.png">    </p:cNvPr>
-          <p:cNvPicPr>
-            <a:picLocks noChangeAspect="1"/>
-          </p:cNvPicPr>
-          <p:nvPr/>
-        </p:nvPicPr>
-        <p:blipFill>
-          <a:blip r:embed="rId1"/>
-          <a:stretch>
-            <a:fillRect/>
-          </a:stretch>
-        </p:blipFill>
-        <p:spPr>
-          <a:xfrm>
-            <a:off x="0" y="0"/>
-            <a:ext cx="12188952" cy="6858000"/>
-          </a:xfrm>
-          <a:prstGeom prst="rect">
-            <a:avLst/>
-          </a:prstGeom>
-        </p:spPr>
-      </p:pic>
+      <p:sp>
+        <p:nvSpPr>
+          <p:cNvPr id="2" name="Text 0"/>
+          <p:cNvSpPr/>
+          <p:nvPr/>
+        </p:nvSpPr>
+        <p:spPr>
+          <a:xfrm>
+            <a:off x="541599" y="778669"/>
+            <a:ext cx="11105754" cy="8334"/>
+          </a:xfrm>
+          <a:prstGeom prst="rect">
+            <a:avLst/>
+          </a:prstGeom>
+          <a:solidFill>
+            <a:srgbClr val="E8E8E8"/>
+          </a:solidFill>
+          <a:ln/>
+        </p:spPr>
+        <p:txBody>
+          <a:bodyPr wrap="square" rtlCol="0" anchor="ctr"/>
+          <a:lstStyle/>
+          <a:p>
+            <a:pPr indent="0" marL="0">
+              <a:buNone/>
+            </a:pPr>
+            <a:endParaRPr lang="en-US" dirty="0"/>
+          </a:p>
+        </p:txBody>
+      </p:sp>
+      <p:sp>
+        <p:nvSpPr>
+          <p:cNvPr id="3" name="Text 1"/>
+          <p:cNvSpPr/>
+          <p:nvPr/>
+        </p:nvSpPr>
+        <p:spPr>
+          <a:xfrm>
+            <a:off x="541599" y="1023937"/>
+            <a:ext cx="11327869" cy="536377"/>
+          </a:xfrm>
+          <a:prstGeom prst="rect">
+            <a:avLst/>
+          </a:prstGeom>
+          <a:noFill/>
+          <a:ln/>
+        </p:spPr>
+        <p:txBody>
+          <a:bodyPr wrap="square" lIns="0" tIns="0" rIns="0" bIns="0" rtlCol="0" anchor="t"/>
+          <a:lstStyle/>
+          <a:p>
+            <a:pPr algn="l" indent="0" marL="0">
+              <a:lnSpc>
+                <a:spcPts val="4223"/>
+              </a:lnSpc>
+              <a:spcBef>
+                <a:spcPts val="1866"/>
+              </a:spcBef>
+              <a:buNone/>
+            </a:pPr>
+            <a:r>
+              <a:rPr lang="en-US" sz="3200" b="1" dirty="0">
+                <a:solidFill>
+                  <a:srgbClr val="0A0A0A"/>
+                </a:solidFill>
+                <a:latin typeface="Pretendard" pitchFamily="34" charset="0"/>
+                <a:ea typeface="Pretendard" pitchFamily="34" charset="-122"/>
+                <a:cs typeface="Pretendard" pitchFamily="34" charset="-120"/>
+              </a:rPr>
+              <a:t>Lean Software Development – 7가지 원칙 (후반부)</a:t>
+            </a:r>
+            <a:endParaRPr lang="en-US" sz="3200" dirty="0"/>
+          </a:p>
+        </p:txBody>
+      </p:sp>
+      <p:sp>
+        <p:nvSpPr>
+          <p:cNvPr id="4" name="Shape 2"/>
+          <p:cNvSpPr/>
+          <p:nvPr/>
+        </p:nvSpPr>
+        <p:spPr>
+          <a:xfrm>
+            <a:off x="566993" y="2698353"/>
+            <a:ext cx="0" cy="613569"/>
+          </a:xfrm>
+          <a:prstGeom prst="line">
+            <a:avLst/>
+          </a:prstGeom>
+          <a:noFill/>
+          <a:ln w="50794">
+            <a:solidFill>
+              <a:srgbClr val="FFFFFF"/>
+            </a:solidFill>
+            <a:prstDash val="solid"/>
+          </a:ln>
+        </p:spPr>
+      </p:sp>
+      <p:sp>
+        <p:nvSpPr>
+          <p:cNvPr id="5" name="Text 3"/>
+          <p:cNvSpPr/>
+          <p:nvPr/>
+        </p:nvSpPr>
+        <p:spPr>
+          <a:xfrm>
+            <a:off x="778474" y="2698353"/>
+            <a:ext cx="448825" cy="342900"/>
+          </a:xfrm>
+          <a:prstGeom prst="rect">
+            <a:avLst/>
+          </a:prstGeom>
+          <a:noFill/>
+          <a:ln/>
+        </p:spPr>
+        <p:txBody>
+          <a:bodyPr wrap="square" lIns="0" tIns="0" rIns="0" bIns="0" rtlCol="0" anchor="t"/>
+          <a:lstStyle/>
+          <a:p>
+            <a:pPr algn="l" indent="0" marL="0">
+              <a:lnSpc>
+                <a:spcPts val="2700"/>
+              </a:lnSpc>
+              <a:buNone/>
+            </a:pPr>
+            <a:r>
+              <a:rPr lang="en-US" sz="2000" b="1" dirty="0">
+                <a:solidFill>
+                  <a:srgbClr val="B4B4B4"/>
+                </a:solidFill>
+                <a:latin typeface="Pretendard" pitchFamily="34" charset="0"/>
+                <a:ea typeface="Pretendard" pitchFamily="34" charset="-122"/>
+                <a:cs typeface="Pretendard" pitchFamily="34" charset="-120"/>
+              </a:rPr>
+              <a:t>5</a:t>
+            </a:r>
+            <a:endParaRPr lang="en-US" sz="2000" dirty="0"/>
+          </a:p>
+        </p:txBody>
+      </p:sp>
+      <p:sp>
+        <p:nvSpPr>
+          <p:cNvPr id="6" name="Text 4"/>
+          <p:cNvSpPr/>
+          <p:nvPr/>
+        </p:nvSpPr>
+        <p:spPr>
+          <a:xfrm>
+            <a:off x="1455374" y="2698353"/>
+            <a:ext cx="2969974" cy="342900"/>
+          </a:xfrm>
+          <a:prstGeom prst="rect">
+            <a:avLst/>
+          </a:prstGeom>
+          <a:noFill/>
+          <a:ln/>
+        </p:spPr>
+        <p:txBody>
+          <a:bodyPr wrap="square" lIns="0" tIns="0" rIns="0" bIns="0" rtlCol="0" anchor="t"/>
+          <a:lstStyle/>
+          <a:p>
+            <a:pPr algn="l" indent="0" marL="0">
+              <a:lnSpc>
+                <a:spcPts val="2700"/>
+              </a:lnSpc>
+              <a:buNone/>
+            </a:pPr>
+            <a:r>
+              <a:rPr lang="en-US" sz="2000" b="1" dirty="0">
+                <a:solidFill>
+                  <a:srgbClr val="0A0A0A"/>
+                </a:solidFill>
+                <a:latin typeface="Pretendard" pitchFamily="34" charset="0"/>
+                <a:ea typeface="Pretendard" pitchFamily="34" charset="-122"/>
+                <a:cs typeface="Pretendard" pitchFamily="34" charset="-120"/>
+              </a:rPr>
+              <a:t>팀 권한 부여</a:t>
+            </a:r>
+            <a:endParaRPr lang="en-US" sz="2000" dirty="0"/>
+          </a:p>
+        </p:txBody>
+      </p:sp>
+      <p:sp>
+        <p:nvSpPr>
+          <p:cNvPr id="7" name="Text 5"/>
+          <p:cNvSpPr/>
+          <p:nvPr/>
+        </p:nvSpPr>
+        <p:spPr>
+          <a:xfrm>
+            <a:off x="1455374" y="3074987"/>
+            <a:ext cx="2969974" cy="236934"/>
+          </a:xfrm>
+          <a:prstGeom prst="rect">
+            <a:avLst/>
+          </a:prstGeom>
+          <a:noFill/>
+          <a:ln/>
+        </p:spPr>
+        <p:txBody>
+          <a:bodyPr wrap="square" lIns="0" tIns="0" rIns="0" bIns="0" rtlCol="0" anchor="t"/>
+          <a:lstStyle/>
+          <a:p>
+            <a:pPr algn="l" indent="0" marL="0">
+              <a:lnSpc>
+                <a:spcPts val="1866"/>
+              </a:lnSpc>
+              <a:spcBef>
+                <a:spcPts val="267"/>
+              </a:spcBef>
+              <a:buNone/>
+            </a:pPr>
+            <a:r>
+              <a:rPr lang="en-US" sz="1333" dirty="0">
+                <a:solidFill>
+                  <a:srgbClr val="B4B4B4"/>
+                </a:solidFill>
+                <a:latin typeface="Pretendard" pitchFamily="34" charset="0"/>
+                <a:ea typeface="Pretendard" pitchFamily="34" charset="-122"/>
+                <a:cs typeface="Pretendard" pitchFamily="34" charset="-120"/>
+              </a:rPr>
+              <a:t>Empower the Team</a:t>
+            </a:r>
+            <a:endParaRPr lang="en-US" sz="1333" dirty="0"/>
+          </a:p>
+        </p:txBody>
+      </p:sp>
+      <p:sp>
+        <p:nvSpPr>
+          <p:cNvPr id="8" name="Text 6"/>
+          <p:cNvSpPr/>
+          <p:nvPr/>
+        </p:nvSpPr>
+        <p:spPr>
+          <a:xfrm>
+            <a:off x="4603988" y="2698353"/>
+            <a:ext cx="7184233" cy="355600"/>
+          </a:xfrm>
+          <a:prstGeom prst="rect">
+            <a:avLst/>
+          </a:prstGeom>
+          <a:noFill/>
+          <a:ln/>
+        </p:spPr>
+        <p:txBody>
+          <a:bodyPr wrap="square" lIns="0" tIns="0" rIns="0" bIns="0" rtlCol="0" anchor="t"/>
+          <a:lstStyle/>
+          <a:p>
+            <a:pPr algn="l" indent="0" marL="0">
+              <a:lnSpc>
+                <a:spcPts val="2800"/>
+              </a:lnSpc>
+              <a:buNone/>
+            </a:pPr>
+            <a:r>
+              <a:rPr lang="en-US" sz="1866" dirty="0">
+                <a:solidFill>
+                  <a:srgbClr val="0A0A0A"/>
+                </a:solidFill>
+                <a:latin typeface="Pretendard" pitchFamily="34" charset="0"/>
+                <a:ea typeface="Pretendard" pitchFamily="34" charset="-122"/>
+                <a:cs typeface="Pretendard" pitchFamily="34" charset="-120"/>
+              </a:rPr>
+              <a:t>현장 전문가에게 의사결정 권한 위임 및 자율적 팀 구성</a:t>
+            </a:r>
+            <a:endParaRPr lang="en-US" sz="1866" dirty="0"/>
+          </a:p>
+        </p:txBody>
+      </p:sp>
+      <p:sp>
+        <p:nvSpPr>
+          <p:cNvPr id="9" name="Shape 7"/>
+          <p:cNvSpPr/>
+          <p:nvPr/>
+        </p:nvSpPr>
+        <p:spPr>
+          <a:xfrm>
+            <a:off x="566993" y="3684389"/>
+            <a:ext cx="0" cy="613569"/>
+          </a:xfrm>
+          <a:prstGeom prst="line">
+            <a:avLst/>
+          </a:prstGeom>
+          <a:noFill/>
+          <a:ln w="50794">
+            <a:solidFill>
+              <a:srgbClr val="FFFFFF"/>
+            </a:solidFill>
+            <a:prstDash val="solid"/>
+          </a:ln>
+        </p:spPr>
+      </p:sp>
+      <p:sp>
+        <p:nvSpPr>
+          <p:cNvPr id="10" name="Text 8"/>
+          <p:cNvSpPr/>
+          <p:nvPr/>
+        </p:nvSpPr>
+        <p:spPr>
+          <a:xfrm>
+            <a:off x="778474" y="3684389"/>
+            <a:ext cx="448825" cy="342900"/>
+          </a:xfrm>
+          <a:prstGeom prst="rect">
+            <a:avLst/>
+          </a:prstGeom>
+          <a:noFill/>
+          <a:ln/>
+        </p:spPr>
+        <p:txBody>
+          <a:bodyPr wrap="square" lIns="0" tIns="0" rIns="0" bIns="0" rtlCol="0" anchor="t"/>
+          <a:lstStyle/>
+          <a:p>
+            <a:pPr algn="l" indent="0" marL="0">
+              <a:lnSpc>
+                <a:spcPts val="2700"/>
+              </a:lnSpc>
+              <a:buNone/>
+            </a:pPr>
+            <a:r>
+              <a:rPr lang="en-US" sz="2000" b="1" dirty="0">
+                <a:solidFill>
+                  <a:srgbClr val="B4B4B4"/>
+                </a:solidFill>
+                <a:latin typeface="Pretendard" pitchFamily="34" charset="0"/>
+                <a:ea typeface="Pretendard" pitchFamily="34" charset="-122"/>
+                <a:cs typeface="Pretendard" pitchFamily="34" charset="-120"/>
+              </a:rPr>
+              <a:t>6</a:t>
+            </a:r>
+            <a:endParaRPr lang="en-US" sz="2000" dirty="0"/>
+          </a:p>
+        </p:txBody>
+      </p:sp>
+      <p:sp>
+        <p:nvSpPr>
+          <p:cNvPr id="11" name="Text 9"/>
+          <p:cNvSpPr/>
+          <p:nvPr/>
+        </p:nvSpPr>
+        <p:spPr>
+          <a:xfrm>
+            <a:off x="1455374" y="3684389"/>
+            <a:ext cx="2969974" cy="342900"/>
+          </a:xfrm>
+          <a:prstGeom prst="rect">
+            <a:avLst/>
+          </a:prstGeom>
+          <a:noFill/>
+          <a:ln/>
+        </p:spPr>
+        <p:txBody>
+          <a:bodyPr wrap="square" lIns="0" tIns="0" rIns="0" bIns="0" rtlCol="0" anchor="t"/>
+          <a:lstStyle/>
+          <a:p>
+            <a:pPr algn="l" indent="0" marL="0">
+              <a:lnSpc>
+                <a:spcPts val="2700"/>
+              </a:lnSpc>
+              <a:buNone/>
+            </a:pPr>
+            <a:r>
+              <a:rPr lang="en-US" sz="2000" b="1" dirty="0">
+                <a:solidFill>
+                  <a:srgbClr val="0A0A0A"/>
+                </a:solidFill>
+                <a:latin typeface="Pretendard" pitchFamily="34" charset="0"/>
+                <a:ea typeface="Pretendard" pitchFamily="34" charset="-122"/>
+                <a:cs typeface="Pretendard" pitchFamily="34" charset="-120"/>
+              </a:rPr>
+              <a:t>내재적 품질 구축</a:t>
+            </a:r>
+            <a:endParaRPr lang="en-US" sz="2000" dirty="0"/>
+          </a:p>
+        </p:txBody>
+      </p:sp>
+      <p:sp>
+        <p:nvSpPr>
+          <p:cNvPr id="12" name="Text 10"/>
+          <p:cNvSpPr/>
+          <p:nvPr/>
+        </p:nvSpPr>
+        <p:spPr>
+          <a:xfrm>
+            <a:off x="1455374" y="4061023"/>
+            <a:ext cx="2969974" cy="236934"/>
+          </a:xfrm>
+          <a:prstGeom prst="rect">
+            <a:avLst/>
+          </a:prstGeom>
+          <a:noFill/>
+          <a:ln/>
+        </p:spPr>
+        <p:txBody>
+          <a:bodyPr wrap="square" lIns="0" tIns="0" rIns="0" bIns="0" rtlCol="0" anchor="t"/>
+          <a:lstStyle/>
+          <a:p>
+            <a:pPr algn="l" indent="0" marL="0">
+              <a:lnSpc>
+                <a:spcPts val="1866"/>
+              </a:lnSpc>
+              <a:spcBef>
+                <a:spcPts val="267"/>
+              </a:spcBef>
+              <a:buNone/>
+            </a:pPr>
+            <a:r>
+              <a:rPr lang="en-US" sz="1333" dirty="0">
+                <a:solidFill>
+                  <a:srgbClr val="B4B4B4"/>
+                </a:solidFill>
+                <a:latin typeface="Pretendard" pitchFamily="34" charset="0"/>
+                <a:ea typeface="Pretendard" pitchFamily="34" charset="-122"/>
+                <a:cs typeface="Pretendard" pitchFamily="34" charset="-120"/>
+              </a:rPr>
+              <a:t>Build Integrity In</a:t>
+            </a:r>
+            <a:endParaRPr lang="en-US" sz="1333" dirty="0"/>
+          </a:p>
+        </p:txBody>
+      </p:sp>
+      <p:sp>
+        <p:nvSpPr>
+          <p:cNvPr id="13" name="Text 11"/>
+          <p:cNvSpPr/>
+          <p:nvPr/>
+        </p:nvSpPr>
+        <p:spPr>
+          <a:xfrm>
+            <a:off x="4603988" y="3684389"/>
+            <a:ext cx="7184233" cy="355600"/>
+          </a:xfrm>
+          <a:prstGeom prst="rect">
+            <a:avLst/>
+          </a:prstGeom>
+          <a:noFill/>
+          <a:ln/>
+        </p:spPr>
+        <p:txBody>
+          <a:bodyPr wrap="square" lIns="0" tIns="0" rIns="0" bIns="0" rtlCol="0" anchor="t"/>
+          <a:lstStyle/>
+          <a:p>
+            <a:pPr algn="l" indent="0" marL="0">
+              <a:lnSpc>
+                <a:spcPts val="2800"/>
+              </a:lnSpc>
+              <a:buNone/>
+            </a:pPr>
+            <a:r>
+              <a:rPr lang="en-US" sz="1866" dirty="0">
+                <a:solidFill>
+                  <a:srgbClr val="0A0A0A"/>
+                </a:solidFill>
+                <a:latin typeface="Pretendard" pitchFamily="34" charset="0"/>
+                <a:ea typeface="Pretendard" pitchFamily="34" charset="-122"/>
+                <a:cs typeface="Pretendard" pitchFamily="34" charset="-120"/>
+              </a:rPr>
+              <a:t>디자인 단계부터 품질 내재화 (TDD, 코드 리뷰)</a:t>
+            </a:r>
+            <a:endParaRPr lang="en-US" sz="1866" dirty="0"/>
+          </a:p>
+        </p:txBody>
+      </p:sp>
+      <p:sp>
+        <p:nvSpPr>
+          <p:cNvPr id="14" name="Shape 12"/>
+          <p:cNvSpPr/>
+          <p:nvPr/>
+        </p:nvSpPr>
+        <p:spPr>
+          <a:xfrm>
+            <a:off x="566993" y="4670425"/>
+            <a:ext cx="0" cy="613569"/>
+          </a:xfrm>
+          <a:prstGeom prst="line">
+            <a:avLst/>
+          </a:prstGeom>
+          <a:noFill/>
+          <a:ln w="50794">
+            <a:solidFill>
+              <a:srgbClr val="FFFFFF"/>
+            </a:solidFill>
+            <a:prstDash val="solid"/>
+          </a:ln>
+        </p:spPr>
+      </p:sp>
+      <p:sp>
+        <p:nvSpPr>
+          <p:cNvPr id="15" name="Text 13"/>
+          <p:cNvSpPr/>
+          <p:nvPr/>
+        </p:nvSpPr>
+        <p:spPr>
+          <a:xfrm>
+            <a:off x="778474" y="4670425"/>
+            <a:ext cx="448825" cy="342900"/>
+          </a:xfrm>
+          <a:prstGeom prst="rect">
+            <a:avLst/>
+          </a:prstGeom>
+          <a:noFill/>
+          <a:ln/>
+        </p:spPr>
+        <p:txBody>
+          <a:bodyPr wrap="square" lIns="0" tIns="0" rIns="0" bIns="0" rtlCol="0" anchor="t"/>
+          <a:lstStyle/>
+          <a:p>
+            <a:pPr algn="l" indent="0" marL="0">
+              <a:lnSpc>
+                <a:spcPts val="2700"/>
+              </a:lnSpc>
+              <a:buNone/>
+            </a:pPr>
+            <a:r>
+              <a:rPr lang="en-US" sz="2000" b="1" dirty="0">
+                <a:solidFill>
+                  <a:srgbClr val="B4B4B4"/>
+                </a:solidFill>
+                <a:latin typeface="Pretendard" pitchFamily="34" charset="0"/>
+                <a:ea typeface="Pretendard" pitchFamily="34" charset="-122"/>
+                <a:cs typeface="Pretendard" pitchFamily="34" charset="-120"/>
+              </a:rPr>
+              <a:t>7</a:t>
+            </a:r>
+            <a:endParaRPr lang="en-US" sz="2000" dirty="0"/>
+          </a:p>
+        </p:txBody>
+      </p:sp>
+      <p:sp>
+        <p:nvSpPr>
+          <p:cNvPr id="16" name="Text 14"/>
+          <p:cNvSpPr/>
+          <p:nvPr/>
+        </p:nvSpPr>
+        <p:spPr>
+          <a:xfrm>
+            <a:off x="1455374" y="4670425"/>
+            <a:ext cx="2969974" cy="342900"/>
+          </a:xfrm>
+          <a:prstGeom prst="rect">
+            <a:avLst/>
+          </a:prstGeom>
+          <a:noFill/>
+          <a:ln/>
+        </p:spPr>
+        <p:txBody>
+          <a:bodyPr wrap="square" lIns="0" tIns="0" rIns="0" bIns="0" rtlCol="0" anchor="t"/>
+          <a:lstStyle/>
+          <a:p>
+            <a:pPr algn="l" indent="0" marL="0">
+              <a:lnSpc>
+                <a:spcPts val="2700"/>
+              </a:lnSpc>
+              <a:buNone/>
+            </a:pPr>
+            <a:r>
+              <a:rPr lang="en-US" sz="2000" b="1" dirty="0">
+                <a:solidFill>
+                  <a:srgbClr val="0A0A0A"/>
+                </a:solidFill>
+                <a:latin typeface="Pretendard" pitchFamily="34" charset="0"/>
+                <a:ea typeface="Pretendard" pitchFamily="34" charset="-122"/>
+                <a:cs typeface="Pretendard" pitchFamily="34" charset="-120"/>
+              </a:rPr>
+              <a:t>전체 최적화</a:t>
+            </a:r>
+            <a:endParaRPr lang="en-US" sz="2000" dirty="0"/>
+          </a:p>
+        </p:txBody>
+      </p:sp>
+      <p:sp>
+        <p:nvSpPr>
+          <p:cNvPr id="17" name="Text 15"/>
+          <p:cNvSpPr/>
+          <p:nvPr/>
+        </p:nvSpPr>
+        <p:spPr>
+          <a:xfrm>
+            <a:off x="1455374" y="5047059"/>
+            <a:ext cx="2969974" cy="236934"/>
+          </a:xfrm>
+          <a:prstGeom prst="rect">
+            <a:avLst/>
+          </a:prstGeom>
+          <a:noFill/>
+          <a:ln/>
+        </p:spPr>
+        <p:txBody>
+          <a:bodyPr wrap="square" lIns="0" tIns="0" rIns="0" bIns="0" rtlCol="0" anchor="t"/>
+          <a:lstStyle/>
+          <a:p>
+            <a:pPr algn="l" indent="0" marL="0">
+              <a:lnSpc>
+                <a:spcPts val="1866"/>
+              </a:lnSpc>
+              <a:spcBef>
+                <a:spcPts val="267"/>
+              </a:spcBef>
+              <a:buNone/>
+            </a:pPr>
+            <a:r>
+              <a:rPr lang="en-US" sz="1333" dirty="0">
+                <a:solidFill>
+                  <a:srgbClr val="B4B4B4"/>
+                </a:solidFill>
+                <a:latin typeface="Pretendard" pitchFamily="34" charset="0"/>
+                <a:ea typeface="Pretendard" pitchFamily="34" charset="-122"/>
+                <a:cs typeface="Pretendard" pitchFamily="34" charset="-120"/>
+              </a:rPr>
+              <a:t>Optimize the Whole</a:t>
+            </a:r>
+            <a:endParaRPr lang="en-US" sz="1333" dirty="0"/>
+          </a:p>
+        </p:txBody>
+      </p:sp>
+      <p:sp>
+        <p:nvSpPr>
+          <p:cNvPr id="18" name="Text 16"/>
+          <p:cNvSpPr/>
+          <p:nvPr/>
+        </p:nvSpPr>
+        <p:spPr>
+          <a:xfrm>
+            <a:off x="4603988" y="4670425"/>
+            <a:ext cx="7184233" cy="355600"/>
+          </a:xfrm>
+          <a:prstGeom prst="rect">
+            <a:avLst/>
+          </a:prstGeom>
+          <a:noFill/>
+          <a:ln/>
+        </p:spPr>
+        <p:txBody>
+          <a:bodyPr wrap="square" lIns="0" tIns="0" rIns="0" bIns="0" rtlCol="0" anchor="t"/>
+          <a:lstStyle/>
+          <a:p>
+            <a:pPr algn="l" indent="0" marL="0">
+              <a:lnSpc>
+                <a:spcPts val="2800"/>
+              </a:lnSpc>
+              <a:buNone/>
+            </a:pPr>
+            <a:r>
+              <a:rPr lang="en-US" sz="1866" dirty="0">
+                <a:solidFill>
+                  <a:srgbClr val="0A0A0A"/>
+                </a:solidFill>
+                <a:latin typeface="Pretendard" pitchFamily="34" charset="0"/>
+                <a:ea typeface="Pretendard" pitchFamily="34" charset="-122"/>
+                <a:cs typeface="Pretendard" pitchFamily="34" charset="-120"/>
+              </a:rPr>
+              <a:t>개별 단계가 아닌 전체 가치 흐름의 처리량 극대화</a:t>
+            </a:r>
+            <a:endParaRPr lang="en-US" sz="1866" dirty="0"/>
+          </a:p>
+        </p:txBody>
+      </p:sp>
     </p:spTree>
   </p:cSld>
   <p:clrMapOvr>
@@ -1357,6 +3134,13 @@
 <file path=ppt/slides/slide4.xml><?xml version="1.0" encoding="utf-8"?>
 <p:sld xmlns:a="http://schemas.openxmlformats.org/drawingml/2006/main" xmlns:r="http://schemas.openxmlformats.org/officeDocument/2006/relationships" xmlns:p="http://schemas.openxmlformats.org/presentationml/2006/main">
   <p:cSld name="Slide 4">
+    <p:bg>
+      <p:bgPr>
+        <a:solidFill>
+          <a:srgbClr val="FFFFFF"/>
+        </a:solidFill>
+      </p:bgPr>
+    </p:bg>
     <p:spTree>
       <p:nvGrpSpPr>
         <p:cNvPr id="1" name=""/>
@@ -1371,30 +3155,1054 @@
           <a:chExt cx="0" cy="0"/>
         </a:xfrm>
       </p:grpSpPr>
-      <p:pic>
-        <p:nvPicPr>
-          <p:cNvPr id="2" name="Image 0" descr="/tmp/slide-1787840573444-q0gnk8sq8xi.png">    </p:cNvPr>
-          <p:cNvPicPr>
-            <a:picLocks noChangeAspect="1"/>
-          </p:cNvPicPr>
-          <p:nvPr/>
-        </p:nvPicPr>
-        <p:blipFill>
-          <a:blip r:embed="rId1"/>
-          <a:stretch>
-            <a:fillRect/>
-          </a:stretch>
-        </p:blipFill>
-        <p:spPr>
-          <a:xfrm>
-            <a:off x="0" y="0"/>
-            <a:ext cx="12188952" cy="6858000"/>
-          </a:xfrm>
-          <a:prstGeom prst="rect">
-            <a:avLst/>
-          </a:prstGeom>
-        </p:spPr>
-      </p:pic>
+      <p:sp>
+        <p:nvSpPr>
+          <p:cNvPr id="2" name="Text 0"/>
+          <p:cNvSpPr/>
+          <p:nvPr/>
+        </p:nvSpPr>
+        <p:spPr>
+          <a:xfrm>
+            <a:off x="541599" y="778669"/>
+            <a:ext cx="11105754" cy="8334"/>
+          </a:xfrm>
+          <a:prstGeom prst="rect">
+            <a:avLst/>
+          </a:prstGeom>
+          <a:solidFill>
+            <a:srgbClr val="E8E8E8"/>
+          </a:solidFill>
+          <a:ln/>
+        </p:spPr>
+        <p:txBody>
+          <a:bodyPr wrap="square" rtlCol="0" anchor="ctr"/>
+          <a:lstStyle/>
+          <a:p>
+            <a:pPr indent="0" marL="0">
+              <a:buNone/>
+            </a:pPr>
+            <a:endParaRPr lang="en-US" dirty="0"/>
+          </a:p>
+        </p:txBody>
+      </p:sp>
+      <p:sp>
+        <p:nvSpPr>
+          <p:cNvPr id="3" name="Text 1"/>
+          <p:cNvSpPr/>
+          <p:nvPr/>
+        </p:nvSpPr>
+        <p:spPr>
+          <a:xfrm>
+            <a:off x="541599" y="1023937"/>
+            <a:ext cx="11327869" cy="536377"/>
+          </a:xfrm>
+          <a:prstGeom prst="rect">
+            <a:avLst/>
+          </a:prstGeom>
+          <a:noFill/>
+          <a:ln/>
+        </p:spPr>
+        <p:txBody>
+          <a:bodyPr wrap="square" lIns="0" tIns="0" rIns="0" bIns="0" rtlCol="0" anchor="t"/>
+          <a:lstStyle/>
+          <a:p>
+            <a:pPr algn="l" indent="0" marL="0">
+              <a:lnSpc>
+                <a:spcPts val="4223"/>
+              </a:lnSpc>
+              <a:spcBef>
+                <a:spcPts val="1866"/>
+              </a:spcBef>
+              <a:buNone/>
+            </a:pPr>
+            <a:r>
+              <a:rPr lang="en-US" sz="3200" b="1" dirty="0">
+                <a:solidFill>
+                  <a:srgbClr val="0A0A0A"/>
+                </a:solidFill>
+                <a:latin typeface="Pretendard" pitchFamily="34" charset="0"/>
+                <a:ea typeface="Pretendard" pitchFamily="34" charset="-122"/>
+                <a:cs typeface="Pretendard" pitchFamily="34" charset="-120"/>
+              </a:rPr>
+              <a:t>Value Stream Analysis 및 낭비 요소</a:t>
+            </a:r>
+            <a:endParaRPr lang="en-US" sz="3200" dirty="0"/>
+          </a:p>
+        </p:txBody>
+      </p:sp>
+      <p:sp>
+        <p:nvSpPr>
+          <p:cNvPr id="4" name="Text 2"/>
+          <p:cNvSpPr/>
+          <p:nvPr/>
+        </p:nvSpPr>
+        <p:spPr>
+          <a:xfrm>
+            <a:off x="541599" y="1831181"/>
+            <a:ext cx="11105754" cy="490934"/>
+          </a:xfrm>
+          <a:prstGeom prst="roundRect">
+            <a:avLst>
+              <a:gd name="adj" fmla="val 20693"/>
+            </a:avLst>
+          </a:prstGeom>
+          <a:solidFill>
+            <a:srgbClr val="FAFAFA"/>
+          </a:solidFill>
+          <a:ln/>
+        </p:spPr>
+        <p:txBody>
+          <a:bodyPr wrap="square" rtlCol="0" anchor="ctr"/>
+          <a:lstStyle/>
+          <a:p>
+            <a:pPr indent="0" marL="0">
+              <a:buNone/>
+            </a:pPr>
+            <a:endParaRPr lang="en-US" dirty="0"/>
+          </a:p>
+        </p:txBody>
+      </p:sp>
+      <p:sp>
+        <p:nvSpPr>
+          <p:cNvPr id="5" name="Shape 3"/>
+          <p:cNvSpPr/>
+          <p:nvPr/>
+        </p:nvSpPr>
+        <p:spPr>
+          <a:xfrm>
+            <a:off x="566993" y="1831181"/>
+            <a:ext cx="0" cy="490934"/>
+          </a:xfrm>
+          <a:prstGeom prst="line">
+            <a:avLst/>
+          </a:prstGeom>
+          <a:noFill/>
+          <a:ln w="50794">
+            <a:solidFill>
+              <a:srgbClr val="FFFFFF"/>
+            </a:solidFill>
+            <a:prstDash val="solid"/>
+          </a:ln>
+        </p:spPr>
+      </p:sp>
+      <p:sp>
+        <p:nvSpPr>
+          <p:cNvPr id="6" name="Text 4"/>
+          <p:cNvSpPr/>
+          <p:nvPr/>
+        </p:nvSpPr>
+        <p:spPr>
+          <a:xfrm>
+            <a:off x="778474" y="1911548"/>
+            <a:ext cx="3384398" cy="320080"/>
+          </a:xfrm>
+          <a:prstGeom prst="rect">
+            <a:avLst/>
+          </a:prstGeom>
+          <a:noFill/>
+          <a:ln/>
+        </p:spPr>
+        <p:txBody>
+          <a:bodyPr wrap="square" lIns="0" tIns="0" rIns="0" bIns="0" rtlCol="0" anchor="t"/>
+          <a:lstStyle/>
+          <a:p>
+            <a:pPr algn="l" indent="0" marL="0">
+              <a:lnSpc>
+                <a:spcPts val="2520"/>
+              </a:lnSpc>
+              <a:buNone/>
+            </a:pPr>
+            <a:r>
+              <a:rPr lang="en-US" sz="1866" b="1" dirty="0">
+                <a:solidFill>
+                  <a:srgbClr val="0A0A0A"/>
+                </a:solidFill>
+                <a:latin typeface="Pretendard" pitchFamily="34" charset="0"/>
+                <a:ea typeface="Pretendard" pitchFamily="34" charset="-122"/>
+                <a:cs typeface="Pretendard" pitchFamily="34" charset="-120"/>
+              </a:rPr>
+              <a:t>진행 중인 미완료 작업</a:t>
+            </a:r>
+            <a:endParaRPr lang="en-US" sz="1866" dirty="0"/>
+          </a:p>
+        </p:txBody>
+      </p:sp>
+      <p:sp>
+        <p:nvSpPr>
+          <p:cNvPr id="7" name="Text 5"/>
+          <p:cNvSpPr/>
+          <p:nvPr/>
+        </p:nvSpPr>
+        <p:spPr>
+          <a:xfrm>
+            <a:off x="4333387" y="1898848"/>
+            <a:ext cx="7253034" cy="355600"/>
+          </a:xfrm>
+          <a:prstGeom prst="rect">
+            <a:avLst/>
+          </a:prstGeom>
+          <a:noFill/>
+          <a:ln/>
+        </p:spPr>
+        <p:txBody>
+          <a:bodyPr wrap="square" lIns="0" tIns="0" rIns="0" bIns="0" rtlCol="0" anchor="t"/>
+          <a:lstStyle/>
+          <a:p>
+            <a:pPr algn="l" indent="0" marL="0">
+              <a:lnSpc>
+                <a:spcPts val="2800"/>
+              </a:lnSpc>
+              <a:buNone/>
+            </a:pPr>
+            <a:r>
+              <a:rPr lang="en-US" sz="1866" dirty="0">
+                <a:solidFill>
+                  <a:srgbClr val="7B7B7B"/>
+                </a:solidFill>
+                <a:latin typeface="Pretendard" pitchFamily="34" charset="0"/>
+                <a:ea typeface="Pretendard" pitchFamily="34" charset="-122"/>
+                <a:cs typeface="Pretendard" pitchFamily="34" charset="-120"/>
+              </a:rPr>
+              <a:t>미완성 기능, 브랜치 적재 (WIP 제한 필요)</a:t>
+            </a:r>
+            <a:endParaRPr lang="en-US" sz="1866" dirty="0"/>
+          </a:p>
+        </p:txBody>
+      </p:sp>
+      <p:sp>
+        <p:nvSpPr>
+          <p:cNvPr id="8" name="Text 6"/>
+          <p:cNvSpPr/>
+          <p:nvPr/>
+        </p:nvSpPr>
+        <p:spPr>
+          <a:xfrm>
+            <a:off x="541599" y="2406650"/>
+            <a:ext cx="11105754" cy="490934"/>
+          </a:xfrm>
+          <a:prstGeom prst="roundRect">
+            <a:avLst>
+              <a:gd name="adj" fmla="val 20693"/>
+            </a:avLst>
+          </a:prstGeom>
+          <a:solidFill>
+            <a:srgbClr val="FAFAFA"/>
+          </a:solidFill>
+          <a:ln/>
+        </p:spPr>
+        <p:txBody>
+          <a:bodyPr wrap="square" rtlCol="0" anchor="ctr"/>
+          <a:lstStyle/>
+          <a:p>
+            <a:pPr indent="0" marL="0">
+              <a:buNone/>
+            </a:pPr>
+            <a:endParaRPr lang="en-US" dirty="0"/>
+          </a:p>
+        </p:txBody>
+      </p:sp>
+      <p:sp>
+        <p:nvSpPr>
+          <p:cNvPr id="9" name="Shape 7"/>
+          <p:cNvSpPr/>
+          <p:nvPr/>
+        </p:nvSpPr>
+        <p:spPr>
+          <a:xfrm>
+            <a:off x="566993" y="2406650"/>
+            <a:ext cx="0" cy="490934"/>
+          </a:xfrm>
+          <a:prstGeom prst="line">
+            <a:avLst/>
+          </a:prstGeom>
+          <a:noFill/>
+          <a:ln w="50794">
+            <a:solidFill>
+              <a:srgbClr val="FFFFFF"/>
+            </a:solidFill>
+            <a:prstDash val="solid"/>
+          </a:ln>
+        </p:spPr>
+      </p:sp>
+      <p:sp>
+        <p:nvSpPr>
+          <p:cNvPr id="10" name="Text 8"/>
+          <p:cNvSpPr/>
+          <p:nvPr/>
+        </p:nvSpPr>
+        <p:spPr>
+          <a:xfrm>
+            <a:off x="778474" y="2487017"/>
+            <a:ext cx="3384398" cy="320080"/>
+          </a:xfrm>
+          <a:prstGeom prst="rect">
+            <a:avLst/>
+          </a:prstGeom>
+          <a:noFill/>
+          <a:ln/>
+        </p:spPr>
+        <p:txBody>
+          <a:bodyPr wrap="square" lIns="0" tIns="0" rIns="0" bIns="0" rtlCol="0" anchor="t"/>
+          <a:lstStyle/>
+          <a:p>
+            <a:pPr algn="l" indent="0" marL="0">
+              <a:lnSpc>
+                <a:spcPts val="2520"/>
+              </a:lnSpc>
+              <a:buNone/>
+            </a:pPr>
+            <a:r>
+              <a:rPr lang="en-US" sz="1866" b="1" dirty="0">
+                <a:solidFill>
+                  <a:srgbClr val="0A0A0A"/>
+                </a:solidFill>
+                <a:latin typeface="Pretendard" pitchFamily="34" charset="0"/>
+                <a:ea typeface="Pretendard" pitchFamily="34" charset="-122"/>
+                <a:cs typeface="Pretendard" pitchFamily="34" charset="-120"/>
+              </a:rPr>
+              <a:t>추가 프로세스</a:t>
+            </a:r>
+            <a:endParaRPr lang="en-US" sz="1866" dirty="0"/>
+          </a:p>
+        </p:txBody>
+      </p:sp>
+      <p:sp>
+        <p:nvSpPr>
+          <p:cNvPr id="11" name="Text 9"/>
+          <p:cNvSpPr/>
+          <p:nvPr/>
+        </p:nvSpPr>
+        <p:spPr>
+          <a:xfrm>
+            <a:off x="4333387" y="2474317"/>
+            <a:ext cx="7253034" cy="355600"/>
+          </a:xfrm>
+          <a:prstGeom prst="rect">
+            <a:avLst/>
+          </a:prstGeom>
+          <a:noFill/>
+          <a:ln/>
+        </p:spPr>
+        <p:txBody>
+          <a:bodyPr wrap="square" lIns="0" tIns="0" rIns="0" bIns="0" rtlCol="0" anchor="t"/>
+          <a:lstStyle/>
+          <a:p>
+            <a:pPr algn="l" indent="0" marL="0">
+              <a:lnSpc>
+                <a:spcPts val="2800"/>
+              </a:lnSpc>
+              <a:buNone/>
+            </a:pPr>
+            <a:r>
+              <a:rPr lang="en-US" sz="1866" dirty="0">
+                <a:solidFill>
+                  <a:srgbClr val="7B7B7B"/>
+                </a:solidFill>
+                <a:latin typeface="Pretendard" pitchFamily="34" charset="0"/>
+                <a:ea typeface="Pretendard" pitchFamily="34" charset="-122"/>
+                <a:cs typeface="Pretendard" pitchFamily="34" charset="-120"/>
+              </a:rPr>
+              <a:t>불필요한 승인, 문서, 회의</a:t>
+            </a:r>
+            <a:endParaRPr lang="en-US" sz="1866" dirty="0"/>
+          </a:p>
+        </p:txBody>
+      </p:sp>
+      <p:sp>
+        <p:nvSpPr>
+          <p:cNvPr id="12" name="Text 10"/>
+          <p:cNvSpPr/>
+          <p:nvPr/>
+        </p:nvSpPr>
+        <p:spPr>
+          <a:xfrm>
+            <a:off x="541599" y="2982119"/>
+            <a:ext cx="11105754" cy="490934"/>
+          </a:xfrm>
+          <a:prstGeom prst="roundRect">
+            <a:avLst>
+              <a:gd name="adj" fmla="val 20693"/>
+            </a:avLst>
+          </a:prstGeom>
+          <a:solidFill>
+            <a:srgbClr val="FAFAFA"/>
+          </a:solidFill>
+          <a:ln/>
+        </p:spPr>
+        <p:txBody>
+          <a:bodyPr wrap="square" rtlCol="0" anchor="ctr"/>
+          <a:lstStyle/>
+          <a:p>
+            <a:pPr indent="0" marL="0">
+              <a:buNone/>
+            </a:pPr>
+            <a:endParaRPr lang="en-US" dirty="0"/>
+          </a:p>
+        </p:txBody>
+      </p:sp>
+      <p:sp>
+        <p:nvSpPr>
+          <p:cNvPr id="13" name="Shape 11"/>
+          <p:cNvSpPr/>
+          <p:nvPr/>
+        </p:nvSpPr>
+        <p:spPr>
+          <a:xfrm>
+            <a:off x="566993" y="2982119"/>
+            <a:ext cx="0" cy="490934"/>
+          </a:xfrm>
+          <a:prstGeom prst="line">
+            <a:avLst/>
+          </a:prstGeom>
+          <a:noFill/>
+          <a:ln w="50794">
+            <a:solidFill>
+              <a:srgbClr val="FFFFFF"/>
+            </a:solidFill>
+            <a:prstDash val="solid"/>
+          </a:ln>
+        </p:spPr>
+      </p:sp>
+      <p:sp>
+        <p:nvSpPr>
+          <p:cNvPr id="14" name="Text 12"/>
+          <p:cNvSpPr/>
+          <p:nvPr/>
+        </p:nvSpPr>
+        <p:spPr>
+          <a:xfrm>
+            <a:off x="778474" y="3062486"/>
+            <a:ext cx="3384398" cy="320080"/>
+          </a:xfrm>
+          <a:prstGeom prst="rect">
+            <a:avLst/>
+          </a:prstGeom>
+          <a:noFill/>
+          <a:ln/>
+        </p:spPr>
+        <p:txBody>
+          <a:bodyPr wrap="square" lIns="0" tIns="0" rIns="0" bIns="0" rtlCol="0" anchor="t"/>
+          <a:lstStyle/>
+          <a:p>
+            <a:pPr algn="l" indent="0" marL="0">
+              <a:lnSpc>
+                <a:spcPts val="2520"/>
+              </a:lnSpc>
+              <a:buNone/>
+            </a:pPr>
+            <a:r>
+              <a:rPr lang="en-US" sz="1866" b="1" dirty="0">
+                <a:solidFill>
+                  <a:srgbClr val="0A0A0A"/>
+                </a:solidFill>
+                <a:latin typeface="Pretendard" pitchFamily="34" charset="0"/>
+                <a:ea typeface="Pretendard" pitchFamily="34" charset="-122"/>
+                <a:cs typeface="Pretendard" pitchFamily="34" charset="-120"/>
+              </a:rPr>
+              <a:t>추가 기능</a:t>
+            </a:r>
+            <a:endParaRPr lang="en-US" sz="1866" dirty="0"/>
+          </a:p>
+        </p:txBody>
+      </p:sp>
+      <p:sp>
+        <p:nvSpPr>
+          <p:cNvPr id="15" name="Text 13"/>
+          <p:cNvSpPr/>
+          <p:nvPr/>
+        </p:nvSpPr>
+        <p:spPr>
+          <a:xfrm>
+            <a:off x="4333387" y="3049786"/>
+            <a:ext cx="7253034" cy="355600"/>
+          </a:xfrm>
+          <a:prstGeom prst="rect">
+            <a:avLst/>
+          </a:prstGeom>
+          <a:noFill/>
+          <a:ln/>
+        </p:spPr>
+        <p:txBody>
+          <a:bodyPr wrap="square" lIns="0" tIns="0" rIns="0" bIns="0" rtlCol="0" anchor="t"/>
+          <a:lstStyle/>
+          <a:p>
+            <a:pPr algn="l" indent="0" marL="0">
+              <a:lnSpc>
+                <a:spcPts val="2800"/>
+              </a:lnSpc>
+              <a:buNone/>
+            </a:pPr>
+            <a:r>
+              <a:rPr lang="en-US" sz="1866" dirty="0">
+                <a:solidFill>
+                  <a:srgbClr val="7B7B7B"/>
+                </a:solidFill>
+                <a:latin typeface="Pretendard" pitchFamily="34" charset="0"/>
+                <a:ea typeface="Pretendard" pitchFamily="34" charset="-122"/>
+                <a:cs typeface="Pretendard" pitchFamily="34" charset="-120"/>
+              </a:rPr>
+              <a:t>사용되지 않는 기능 개발 (YAGNI 위반)</a:t>
+            </a:r>
+            <a:endParaRPr lang="en-US" sz="1866" dirty="0"/>
+          </a:p>
+        </p:txBody>
+      </p:sp>
+      <p:sp>
+        <p:nvSpPr>
+          <p:cNvPr id="16" name="Text 14"/>
+          <p:cNvSpPr/>
+          <p:nvPr/>
+        </p:nvSpPr>
+        <p:spPr>
+          <a:xfrm>
+            <a:off x="541599" y="3557588"/>
+            <a:ext cx="11105754" cy="490934"/>
+          </a:xfrm>
+          <a:prstGeom prst="roundRect">
+            <a:avLst>
+              <a:gd name="adj" fmla="val 20693"/>
+            </a:avLst>
+          </a:prstGeom>
+          <a:solidFill>
+            <a:srgbClr val="FAFAFA"/>
+          </a:solidFill>
+          <a:ln/>
+        </p:spPr>
+        <p:txBody>
+          <a:bodyPr wrap="square" rtlCol="0" anchor="ctr"/>
+          <a:lstStyle/>
+          <a:p>
+            <a:pPr indent="0" marL="0">
+              <a:buNone/>
+            </a:pPr>
+            <a:endParaRPr lang="en-US" dirty="0"/>
+          </a:p>
+        </p:txBody>
+      </p:sp>
+      <p:sp>
+        <p:nvSpPr>
+          <p:cNvPr id="17" name="Shape 15"/>
+          <p:cNvSpPr/>
+          <p:nvPr/>
+        </p:nvSpPr>
+        <p:spPr>
+          <a:xfrm>
+            <a:off x="566993" y="3557588"/>
+            <a:ext cx="0" cy="490934"/>
+          </a:xfrm>
+          <a:prstGeom prst="line">
+            <a:avLst/>
+          </a:prstGeom>
+          <a:noFill/>
+          <a:ln w="50794">
+            <a:solidFill>
+              <a:srgbClr val="FFFFFF"/>
+            </a:solidFill>
+            <a:prstDash val="solid"/>
+          </a:ln>
+        </p:spPr>
+      </p:sp>
+      <p:sp>
+        <p:nvSpPr>
+          <p:cNvPr id="18" name="Text 16"/>
+          <p:cNvSpPr/>
+          <p:nvPr/>
+        </p:nvSpPr>
+        <p:spPr>
+          <a:xfrm>
+            <a:off x="778474" y="3637955"/>
+            <a:ext cx="3384398" cy="320080"/>
+          </a:xfrm>
+          <a:prstGeom prst="rect">
+            <a:avLst/>
+          </a:prstGeom>
+          <a:noFill/>
+          <a:ln/>
+        </p:spPr>
+        <p:txBody>
+          <a:bodyPr wrap="square" lIns="0" tIns="0" rIns="0" bIns="0" rtlCol="0" anchor="t"/>
+          <a:lstStyle/>
+          <a:p>
+            <a:pPr algn="l" indent="0" marL="0">
+              <a:lnSpc>
+                <a:spcPts val="2520"/>
+              </a:lnSpc>
+              <a:buNone/>
+            </a:pPr>
+            <a:r>
+              <a:rPr lang="en-US" sz="1866" b="1" dirty="0">
+                <a:solidFill>
+                  <a:srgbClr val="0A0A0A"/>
+                </a:solidFill>
+                <a:latin typeface="Pretendard" pitchFamily="34" charset="0"/>
+                <a:ea typeface="Pretendard" pitchFamily="34" charset="-122"/>
+                <a:cs typeface="Pretendard" pitchFamily="34" charset="-120"/>
+              </a:rPr>
+              <a:t>작업 전환</a:t>
+            </a:r>
+            <a:endParaRPr lang="en-US" sz="1866" dirty="0"/>
+          </a:p>
+        </p:txBody>
+      </p:sp>
+      <p:sp>
+        <p:nvSpPr>
+          <p:cNvPr id="19" name="Text 17"/>
+          <p:cNvSpPr/>
+          <p:nvPr/>
+        </p:nvSpPr>
+        <p:spPr>
+          <a:xfrm>
+            <a:off x="4333387" y="3625255"/>
+            <a:ext cx="7253034" cy="355600"/>
+          </a:xfrm>
+          <a:prstGeom prst="rect">
+            <a:avLst/>
+          </a:prstGeom>
+          <a:noFill/>
+          <a:ln/>
+        </p:spPr>
+        <p:txBody>
+          <a:bodyPr wrap="square" lIns="0" tIns="0" rIns="0" bIns="0" rtlCol="0" anchor="t"/>
+          <a:lstStyle/>
+          <a:p>
+            <a:pPr algn="l" indent="0" marL="0">
+              <a:lnSpc>
+                <a:spcPts val="2800"/>
+              </a:lnSpc>
+              <a:buNone/>
+            </a:pPr>
+            <a:r>
+              <a:rPr lang="en-US" sz="1866" dirty="0">
+                <a:solidFill>
+                  <a:srgbClr val="7B7B7B"/>
+                </a:solidFill>
+                <a:latin typeface="Pretendard" pitchFamily="34" charset="0"/>
+                <a:ea typeface="Pretendard" pitchFamily="34" charset="-122"/>
+                <a:cs typeface="Pretendard" pitchFamily="34" charset="-120"/>
+              </a:rPr>
+              <a:t>멀티태스킹으로 인한 컨텍스트 스위칭 비용</a:t>
+            </a:r>
+            <a:endParaRPr lang="en-US" sz="1866" dirty="0"/>
+          </a:p>
+        </p:txBody>
+      </p:sp>
+      <p:sp>
+        <p:nvSpPr>
+          <p:cNvPr id="20" name="Text 18"/>
+          <p:cNvSpPr/>
+          <p:nvPr/>
+        </p:nvSpPr>
+        <p:spPr>
+          <a:xfrm>
+            <a:off x="541599" y="4133056"/>
+            <a:ext cx="11105754" cy="490934"/>
+          </a:xfrm>
+          <a:prstGeom prst="roundRect">
+            <a:avLst>
+              <a:gd name="adj" fmla="val 20693"/>
+            </a:avLst>
+          </a:prstGeom>
+          <a:solidFill>
+            <a:srgbClr val="FAFAFA"/>
+          </a:solidFill>
+          <a:ln/>
+        </p:spPr>
+        <p:txBody>
+          <a:bodyPr wrap="square" rtlCol="0" anchor="ctr"/>
+          <a:lstStyle/>
+          <a:p>
+            <a:pPr indent="0" marL="0">
+              <a:buNone/>
+            </a:pPr>
+            <a:endParaRPr lang="en-US" dirty="0"/>
+          </a:p>
+        </p:txBody>
+      </p:sp>
+      <p:sp>
+        <p:nvSpPr>
+          <p:cNvPr id="21" name="Shape 19"/>
+          <p:cNvSpPr/>
+          <p:nvPr/>
+        </p:nvSpPr>
+        <p:spPr>
+          <a:xfrm>
+            <a:off x="566993" y="4133056"/>
+            <a:ext cx="0" cy="490934"/>
+          </a:xfrm>
+          <a:prstGeom prst="line">
+            <a:avLst/>
+          </a:prstGeom>
+          <a:noFill/>
+          <a:ln w="50794">
+            <a:solidFill>
+              <a:srgbClr val="FFFFFF"/>
+            </a:solidFill>
+            <a:prstDash val="solid"/>
+          </a:ln>
+        </p:spPr>
+      </p:sp>
+      <p:sp>
+        <p:nvSpPr>
+          <p:cNvPr id="22" name="Text 20"/>
+          <p:cNvSpPr/>
+          <p:nvPr/>
+        </p:nvSpPr>
+        <p:spPr>
+          <a:xfrm>
+            <a:off x="778474" y="4213423"/>
+            <a:ext cx="3384398" cy="320080"/>
+          </a:xfrm>
+          <a:prstGeom prst="rect">
+            <a:avLst/>
+          </a:prstGeom>
+          <a:noFill/>
+          <a:ln/>
+        </p:spPr>
+        <p:txBody>
+          <a:bodyPr wrap="square" lIns="0" tIns="0" rIns="0" bIns="0" rtlCol="0" anchor="t"/>
+          <a:lstStyle/>
+          <a:p>
+            <a:pPr algn="l" indent="0" marL="0">
+              <a:lnSpc>
+                <a:spcPts val="2520"/>
+              </a:lnSpc>
+              <a:buNone/>
+            </a:pPr>
+            <a:r>
+              <a:rPr lang="en-US" sz="1866" b="1" dirty="0">
+                <a:solidFill>
+                  <a:srgbClr val="0A0A0A"/>
+                </a:solidFill>
+                <a:latin typeface="Pretendard" pitchFamily="34" charset="0"/>
+                <a:ea typeface="Pretendard" pitchFamily="34" charset="-122"/>
+                <a:cs typeface="Pretendard" pitchFamily="34" charset="-120"/>
+              </a:rPr>
+              <a:t>대기</a:t>
+            </a:r>
+            <a:endParaRPr lang="en-US" sz="1866" dirty="0"/>
+          </a:p>
+        </p:txBody>
+      </p:sp>
+      <p:sp>
+        <p:nvSpPr>
+          <p:cNvPr id="23" name="Text 21"/>
+          <p:cNvSpPr/>
+          <p:nvPr/>
+        </p:nvSpPr>
+        <p:spPr>
+          <a:xfrm>
+            <a:off x="4333387" y="4200723"/>
+            <a:ext cx="7253034" cy="355600"/>
+          </a:xfrm>
+          <a:prstGeom prst="rect">
+            <a:avLst/>
+          </a:prstGeom>
+          <a:noFill/>
+          <a:ln/>
+        </p:spPr>
+        <p:txBody>
+          <a:bodyPr wrap="square" lIns="0" tIns="0" rIns="0" bIns="0" rtlCol="0" anchor="t"/>
+          <a:lstStyle/>
+          <a:p>
+            <a:pPr algn="l" indent="0" marL="0">
+              <a:lnSpc>
+                <a:spcPts val="2800"/>
+              </a:lnSpc>
+              <a:buNone/>
+            </a:pPr>
+            <a:r>
+              <a:rPr lang="en-US" sz="1866" dirty="0">
+                <a:solidFill>
+                  <a:srgbClr val="7B7B7B"/>
+                </a:solidFill>
+                <a:latin typeface="Pretendard" pitchFamily="34" charset="0"/>
+                <a:ea typeface="Pretendard" pitchFamily="34" charset="-122"/>
+                <a:cs typeface="Pretendard" pitchFamily="34" charset="-120"/>
+              </a:rPr>
+              <a:t>코드 리뷰 및 배포 승인 대기</a:t>
+            </a:r>
+            <a:endParaRPr lang="en-US" sz="1866" dirty="0"/>
+          </a:p>
+        </p:txBody>
+      </p:sp>
+      <p:sp>
+        <p:nvSpPr>
+          <p:cNvPr id="24" name="Text 22"/>
+          <p:cNvSpPr/>
+          <p:nvPr/>
+        </p:nvSpPr>
+        <p:spPr>
+          <a:xfrm>
+            <a:off x="541599" y="4708525"/>
+            <a:ext cx="11105754" cy="490934"/>
+          </a:xfrm>
+          <a:prstGeom prst="roundRect">
+            <a:avLst>
+              <a:gd name="adj" fmla="val 20693"/>
+            </a:avLst>
+          </a:prstGeom>
+          <a:solidFill>
+            <a:srgbClr val="FAFAFA"/>
+          </a:solidFill>
+          <a:ln/>
+        </p:spPr>
+        <p:txBody>
+          <a:bodyPr wrap="square" rtlCol="0" anchor="ctr"/>
+          <a:lstStyle/>
+          <a:p>
+            <a:pPr indent="0" marL="0">
+              <a:buNone/>
+            </a:pPr>
+            <a:endParaRPr lang="en-US" dirty="0"/>
+          </a:p>
+        </p:txBody>
+      </p:sp>
+      <p:sp>
+        <p:nvSpPr>
+          <p:cNvPr id="25" name="Shape 23"/>
+          <p:cNvSpPr/>
+          <p:nvPr/>
+        </p:nvSpPr>
+        <p:spPr>
+          <a:xfrm>
+            <a:off x="566993" y="4708525"/>
+            <a:ext cx="0" cy="490934"/>
+          </a:xfrm>
+          <a:prstGeom prst="line">
+            <a:avLst/>
+          </a:prstGeom>
+          <a:noFill/>
+          <a:ln w="50794">
+            <a:solidFill>
+              <a:srgbClr val="FFFFFF"/>
+            </a:solidFill>
+            <a:prstDash val="solid"/>
+          </a:ln>
+        </p:spPr>
+      </p:sp>
+      <p:sp>
+        <p:nvSpPr>
+          <p:cNvPr id="26" name="Text 24"/>
+          <p:cNvSpPr/>
+          <p:nvPr/>
+        </p:nvSpPr>
+        <p:spPr>
+          <a:xfrm>
+            <a:off x="778474" y="4788892"/>
+            <a:ext cx="3384398" cy="320080"/>
+          </a:xfrm>
+          <a:prstGeom prst="rect">
+            <a:avLst/>
+          </a:prstGeom>
+          <a:noFill/>
+          <a:ln/>
+        </p:spPr>
+        <p:txBody>
+          <a:bodyPr wrap="square" lIns="0" tIns="0" rIns="0" bIns="0" rtlCol="0" anchor="t"/>
+          <a:lstStyle/>
+          <a:p>
+            <a:pPr algn="l" indent="0" marL="0">
+              <a:lnSpc>
+                <a:spcPts val="2520"/>
+              </a:lnSpc>
+              <a:buNone/>
+            </a:pPr>
+            <a:r>
+              <a:rPr lang="en-US" sz="1866" b="1" dirty="0">
+                <a:solidFill>
+                  <a:srgbClr val="0A0A0A"/>
+                </a:solidFill>
+                <a:latin typeface="Pretendard" pitchFamily="34" charset="0"/>
+                <a:ea typeface="Pretendard" pitchFamily="34" charset="-122"/>
+                <a:cs typeface="Pretendard" pitchFamily="34" charset="-120"/>
+              </a:rPr>
+              <a:t>동작</a:t>
+            </a:r>
+            <a:endParaRPr lang="en-US" sz="1866" dirty="0"/>
+          </a:p>
+        </p:txBody>
+      </p:sp>
+      <p:sp>
+        <p:nvSpPr>
+          <p:cNvPr id="27" name="Text 25"/>
+          <p:cNvSpPr/>
+          <p:nvPr/>
+        </p:nvSpPr>
+        <p:spPr>
+          <a:xfrm>
+            <a:off x="4333387" y="4776192"/>
+            <a:ext cx="7253034" cy="355600"/>
+          </a:xfrm>
+          <a:prstGeom prst="rect">
+            <a:avLst/>
+          </a:prstGeom>
+          <a:noFill/>
+          <a:ln/>
+        </p:spPr>
+        <p:txBody>
+          <a:bodyPr wrap="square" lIns="0" tIns="0" rIns="0" bIns="0" rtlCol="0" anchor="t"/>
+          <a:lstStyle/>
+          <a:p>
+            <a:pPr algn="l" indent="0" marL="0">
+              <a:lnSpc>
+                <a:spcPts val="2800"/>
+              </a:lnSpc>
+              <a:buNone/>
+            </a:pPr>
+            <a:r>
+              <a:rPr lang="en-US" sz="1866" dirty="0">
+                <a:solidFill>
+                  <a:srgbClr val="7B7B7B"/>
+                </a:solidFill>
+                <a:latin typeface="Pretendard" pitchFamily="34" charset="0"/>
+                <a:ea typeface="Pretendard" pitchFamily="34" charset="-122"/>
+                <a:cs typeface="Pretendard" pitchFamily="34" charset="-120"/>
+              </a:rPr>
+              <a:t>도구와 시스템 간 불필요한 전환</a:t>
+            </a:r>
+            <a:endParaRPr lang="en-US" sz="1866" dirty="0"/>
+          </a:p>
+        </p:txBody>
+      </p:sp>
+      <p:sp>
+        <p:nvSpPr>
+          <p:cNvPr id="28" name="Text 26"/>
+          <p:cNvSpPr/>
+          <p:nvPr/>
+        </p:nvSpPr>
+        <p:spPr>
+          <a:xfrm>
+            <a:off x="541599" y="5283994"/>
+            <a:ext cx="11105754" cy="490934"/>
+          </a:xfrm>
+          <a:prstGeom prst="roundRect">
+            <a:avLst>
+              <a:gd name="adj" fmla="val 20693"/>
+            </a:avLst>
+          </a:prstGeom>
+          <a:solidFill>
+            <a:srgbClr val="FAFAFA"/>
+          </a:solidFill>
+          <a:ln/>
+        </p:spPr>
+        <p:txBody>
+          <a:bodyPr wrap="square" rtlCol="0" anchor="ctr"/>
+          <a:lstStyle/>
+          <a:p>
+            <a:pPr indent="0" marL="0">
+              <a:buNone/>
+            </a:pPr>
+            <a:endParaRPr lang="en-US" dirty="0"/>
+          </a:p>
+        </p:txBody>
+      </p:sp>
+      <p:sp>
+        <p:nvSpPr>
+          <p:cNvPr id="29" name="Shape 27"/>
+          <p:cNvSpPr/>
+          <p:nvPr/>
+        </p:nvSpPr>
+        <p:spPr>
+          <a:xfrm>
+            <a:off x="566993" y="5283994"/>
+            <a:ext cx="0" cy="490934"/>
+          </a:xfrm>
+          <a:prstGeom prst="line">
+            <a:avLst/>
+          </a:prstGeom>
+          <a:noFill/>
+          <a:ln w="50794">
+            <a:solidFill>
+              <a:srgbClr val="FFFFFF"/>
+            </a:solidFill>
+            <a:prstDash val="solid"/>
+          </a:ln>
+        </p:spPr>
+      </p:sp>
+      <p:sp>
+        <p:nvSpPr>
+          <p:cNvPr id="30" name="Text 28"/>
+          <p:cNvSpPr/>
+          <p:nvPr/>
+        </p:nvSpPr>
+        <p:spPr>
+          <a:xfrm>
+            <a:off x="778474" y="5364361"/>
+            <a:ext cx="3384398" cy="320080"/>
+          </a:xfrm>
+          <a:prstGeom prst="rect">
+            <a:avLst/>
+          </a:prstGeom>
+          <a:noFill/>
+          <a:ln/>
+        </p:spPr>
+        <p:txBody>
+          <a:bodyPr wrap="square" lIns="0" tIns="0" rIns="0" bIns="0" rtlCol="0" anchor="t"/>
+          <a:lstStyle/>
+          <a:p>
+            <a:pPr algn="l" indent="0" marL="0">
+              <a:lnSpc>
+                <a:spcPts val="2520"/>
+              </a:lnSpc>
+              <a:buNone/>
+            </a:pPr>
+            <a:r>
+              <a:rPr lang="en-US" sz="1866" b="1" dirty="0">
+                <a:solidFill>
+                  <a:srgbClr val="0A0A0A"/>
+                </a:solidFill>
+                <a:latin typeface="Pretendard" pitchFamily="34" charset="0"/>
+                <a:ea typeface="Pretendard" pitchFamily="34" charset="-122"/>
+                <a:cs typeface="Pretendard" pitchFamily="34" charset="-120"/>
+              </a:rPr>
+              <a:t>결함</a:t>
+            </a:r>
+            <a:endParaRPr lang="en-US" sz="1866" dirty="0"/>
+          </a:p>
+        </p:txBody>
+      </p:sp>
+      <p:sp>
+        <p:nvSpPr>
+          <p:cNvPr id="31" name="Text 29"/>
+          <p:cNvSpPr/>
+          <p:nvPr/>
+        </p:nvSpPr>
+        <p:spPr>
+          <a:xfrm>
+            <a:off x="4333387" y="5351661"/>
+            <a:ext cx="7253034" cy="355600"/>
+          </a:xfrm>
+          <a:prstGeom prst="rect">
+            <a:avLst/>
+          </a:prstGeom>
+          <a:noFill/>
+          <a:ln/>
+        </p:spPr>
+        <p:txBody>
+          <a:bodyPr wrap="square" lIns="0" tIns="0" rIns="0" bIns="0" rtlCol="0" anchor="t"/>
+          <a:lstStyle/>
+          <a:p>
+            <a:pPr algn="l" indent="0" marL="0">
+              <a:lnSpc>
+                <a:spcPts val="2800"/>
+              </a:lnSpc>
+              <a:buNone/>
+            </a:pPr>
+            <a:r>
+              <a:rPr lang="en-US" sz="1866" dirty="0">
+                <a:solidFill>
+                  <a:srgbClr val="7B7B7B"/>
+                </a:solidFill>
+                <a:latin typeface="Pretendard" pitchFamily="34" charset="0"/>
+                <a:ea typeface="Pretendard" pitchFamily="34" charset="-122"/>
+                <a:cs typeface="Pretendard" pitchFamily="34" charset="-120"/>
+              </a:rPr>
+              <a:t>버그 수정 및 재작업 비용</a:t>
+            </a:r>
+            <a:endParaRPr lang="en-US" sz="1866" dirty="0"/>
+          </a:p>
+        </p:txBody>
+      </p:sp>
     </p:spTree>
   </p:cSld>
   <p:clrMapOvr>
@@ -1406,6 +4214,13 @@
 <file path=ppt/slides/slide5.xml><?xml version="1.0" encoding="utf-8"?>
 <p:sld xmlns:a="http://schemas.openxmlformats.org/drawingml/2006/main" xmlns:r="http://schemas.openxmlformats.org/officeDocument/2006/relationships" xmlns:p="http://schemas.openxmlformats.org/presentationml/2006/main">
   <p:cSld name="Slide 5">
+    <p:bg>
+      <p:bgPr>
+        <a:solidFill>
+          <a:srgbClr val="FFFFFF"/>
+        </a:solidFill>
+      </p:bgPr>
+    </p:bg>
     <p:spTree>
       <p:nvGrpSpPr>
         <p:cNvPr id="1" name=""/>
@@ -1420,30 +4235,551 @@
           <a:chExt cx="0" cy="0"/>
         </a:xfrm>
       </p:grpSpPr>
-      <p:pic>
-        <p:nvPicPr>
-          <p:cNvPr id="2" name="Image 0" descr="/tmp/slide-1787840573939-8vrelnwt126.png">    </p:cNvPr>
-          <p:cNvPicPr>
-            <a:picLocks noChangeAspect="1"/>
-          </p:cNvPicPr>
-          <p:nvPr/>
-        </p:nvPicPr>
-        <p:blipFill>
-          <a:blip r:embed="rId1"/>
-          <a:stretch>
-            <a:fillRect/>
-          </a:stretch>
-        </p:blipFill>
-        <p:spPr>
-          <a:xfrm>
-            <a:off x="0" y="0"/>
-            <a:ext cx="12188952" cy="6858000"/>
-          </a:xfrm>
-          <a:prstGeom prst="rect">
-            <a:avLst/>
-          </a:prstGeom>
-        </p:spPr>
-      </p:pic>
+      <p:sp>
+        <p:nvSpPr>
+          <p:cNvPr id="2" name="Text 0"/>
+          <p:cNvSpPr/>
+          <p:nvPr/>
+        </p:nvSpPr>
+        <p:spPr>
+          <a:xfrm>
+            <a:off x="541599" y="778669"/>
+            <a:ext cx="11105754" cy="8334"/>
+          </a:xfrm>
+          <a:prstGeom prst="rect">
+            <a:avLst/>
+          </a:prstGeom>
+          <a:solidFill>
+            <a:srgbClr val="E8E8E8"/>
+          </a:solidFill>
+          <a:ln/>
+        </p:spPr>
+        <p:txBody>
+          <a:bodyPr wrap="square" rtlCol="0" anchor="ctr"/>
+          <a:lstStyle/>
+          <a:p>
+            <a:pPr indent="0" marL="0">
+              <a:buNone/>
+            </a:pPr>
+            <a:endParaRPr lang="en-US" dirty="0"/>
+          </a:p>
+        </p:txBody>
+      </p:sp>
+      <p:sp>
+        <p:nvSpPr>
+          <p:cNvPr id="3" name="Text 1"/>
+          <p:cNvSpPr/>
+          <p:nvPr/>
+        </p:nvSpPr>
+        <p:spPr>
+          <a:xfrm>
+            <a:off x="541599" y="1023937"/>
+            <a:ext cx="11327869" cy="536377"/>
+          </a:xfrm>
+          <a:prstGeom prst="rect">
+            <a:avLst/>
+          </a:prstGeom>
+          <a:noFill/>
+          <a:ln/>
+        </p:spPr>
+        <p:txBody>
+          <a:bodyPr wrap="square" lIns="0" tIns="0" rIns="0" bIns="0" rtlCol="0" anchor="t"/>
+          <a:lstStyle/>
+          <a:p>
+            <a:pPr algn="l" indent="0" marL="0">
+              <a:lnSpc>
+                <a:spcPts val="4223"/>
+              </a:lnSpc>
+              <a:spcBef>
+                <a:spcPts val="1866"/>
+              </a:spcBef>
+              <a:buNone/>
+            </a:pPr>
+            <a:r>
+              <a:rPr lang="en-US" sz="3200" b="1" dirty="0">
+                <a:solidFill>
+                  <a:srgbClr val="0A0A0A"/>
+                </a:solidFill>
+                <a:latin typeface="Pretendard" pitchFamily="34" charset="0"/>
+                <a:ea typeface="Pretendard" pitchFamily="34" charset="-122"/>
+                <a:cs typeface="Pretendard" pitchFamily="34" charset="-120"/>
+              </a:rPr>
+              <a:t>기대 효과 및 실무 적용</a:t>
+            </a:r>
+            <a:endParaRPr lang="en-US" sz="3200" dirty="0"/>
+          </a:p>
+        </p:txBody>
+      </p:sp>
+      <p:sp>
+        <p:nvSpPr>
+          <p:cNvPr id="4" name="Shape 2"/>
+          <p:cNvSpPr/>
+          <p:nvPr/>
+        </p:nvSpPr>
+        <p:spPr>
+          <a:xfrm>
+            <a:off x="566993" y="2589014"/>
+            <a:ext cx="0" cy="355600"/>
+          </a:xfrm>
+          <a:prstGeom prst="line">
+            <a:avLst/>
+          </a:prstGeom>
+          <a:noFill/>
+          <a:ln w="50794">
+            <a:solidFill>
+              <a:srgbClr val="FFFFFF"/>
+            </a:solidFill>
+            <a:prstDash val="solid"/>
+          </a:ln>
+        </p:spPr>
+      </p:sp>
+      <p:sp>
+        <p:nvSpPr>
+          <p:cNvPr id="5" name="Text 3"/>
+          <p:cNvSpPr/>
+          <p:nvPr/>
+        </p:nvSpPr>
+        <p:spPr>
+          <a:xfrm>
+            <a:off x="778474" y="2589014"/>
+            <a:ext cx="2900971" cy="342900"/>
+          </a:xfrm>
+          <a:prstGeom prst="rect">
+            <a:avLst/>
+          </a:prstGeom>
+          <a:noFill/>
+          <a:ln/>
+        </p:spPr>
+        <p:txBody>
+          <a:bodyPr wrap="square" lIns="0" tIns="0" rIns="0" bIns="0" rtlCol="0" anchor="t"/>
+          <a:lstStyle/>
+          <a:p>
+            <a:pPr algn="l" indent="0" marL="0">
+              <a:lnSpc>
+                <a:spcPts val="2700"/>
+              </a:lnSpc>
+              <a:buNone/>
+            </a:pPr>
+            <a:r>
+              <a:rPr lang="en-US" sz="2000" b="1" dirty="0">
+                <a:solidFill>
+                  <a:srgbClr val="0A0A0A"/>
+                </a:solidFill>
+                <a:latin typeface="Pretendard" pitchFamily="34" charset="0"/>
+                <a:ea typeface="Pretendard" pitchFamily="34" charset="-122"/>
+                <a:cs typeface="Pretendard" pitchFamily="34" charset="-120"/>
+              </a:rPr>
+              <a:t>리드 타임 단축</a:t>
+            </a:r>
+            <a:endParaRPr lang="en-US" sz="2000" dirty="0"/>
+          </a:p>
+        </p:txBody>
+      </p:sp>
+      <p:sp>
+        <p:nvSpPr>
+          <p:cNvPr id="6" name="Text 4"/>
+          <p:cNvSpPr/>
+          <p:nvPr/>
+        </p:nvSpPr>
+        <p:spPr>
+          <a:xfrm>
+            <a:off x="3859438" y="2589014"/>
+            <a:ext cx="7943673" cy="355600"/>
+          </a:xfrm>
+          <a:prstGeom prst="rect">
+            <a:avLst/>
+          </a:prstGeom>
+          <a:noFill/>
+          <a:ln/>
+        </p:spPr>
+        <p:txBody>
+          <a:bodyPr wrap="square" lIns="0" tIns="0" rIns="0" bIns="0" rtlCol="0" anchor="t"/>
+          <a:lstStyle/>
+          <a:p>
+            <a:pPr algn="l" indent="0" marL="0">
+              <a:lnSpc>
+                <a:spcPts val="2800"/>
+              </a:lnSpc>
+              <a:buNone/>
+            </a:pPr>
+            <a:r>
+              <a:rPr lang="en-US" sz="1866" dirty="0">
+                <a:solidFill>
+                  <a:srgbClr val="0A0A0A"/>
+                </a:solidFill>
+                <a:latin typeface="Pretendard" pitchFamily="34" charset="0"/>
+                <a:ea typeface="Pretendard" pitchFamily="34" charset="-122"/>
+                <a:cs typeface="Pretendard" pitchFamily="34" charset="-120"/>
+              </a:rPr>
+              <a:t>밸류 스트림 맵을 통한 병목 구간 시각화 및 제거</a:t>
+            </a:r>
+            <a:endParaRPr lang="en-US" sz="1866" dirty="0"/>
+          </a:p>
+        </p:txBody>
+      </p:sp>
+      <p:sp>
+        <p:nvSpPr>
+          <p:cNvPr id="7" name="Shape 5"/>
+          <p:cNvSpPr/>
+          <p:nvPr/>
+        </p:nvSpPr>
+        <p:spPr>
+          <a:xfrm>
+            <a:off x="566993" y="3147814"/>
+            <a:ext cx="0" cy="355600"/>
+          </a:xfrm>
+          <a:prstGeom prst="line">
+            <a:avLst/>
+          </a:prstGeom>
+          <a:noFill/>
+          <a:ln w="50794">
+            <a:solidFill>
+              <a:srgbClr val="FFFFFF"/>
+            </a:solidFill>
+            <a:prstDash val="solid"/>
+          </a:ln>
+        </p:spPr>
+      </p:sp>
+      <p:sp>
+        <p:nvSpPr>
+          <p:cNvPr id="8" name="Text 6"/>
+          <p:cNvSpPr/>
+          <p:nvPr/>
+        </p:nvSpPr>
+        <p:spPr>
+          <a:xfrm>
+            <a:off x="778474" y="3147814"/>
+            <a:ext cx="2900971" cy="342900"/>
+          </a:xfrm>
+          <a:prstGeom prst="rect">
+            <a:avLst/>
+          </a:prstGeom>
+          <a:noFill/>
+          <a:ln/>
+        </p:spPr>
+        <p:txBody>
+          <a:bodyPr wrap="square" lIns="0" tIns="0" rIns="0" bIns="0" rtlCol="0" anchor="t"/>
+          <a:lstStyle/>
+          <a:p>
+            <a:pPr algn="l" indent="0" marL="0">
+              <a:lnSpc>
+                <a:spcPts val="2700"/>
+              </a:lnSpc>
+              <a:buNone/>
+            </a:pPr>
+            <a:r>
+              <a:rPr lang="en-US" sz="2000" b="1" dirty="0">
+                <a:solidFill>
+                  <a:srgbClr val="0A0A0A"/>
+                </a:solidFill>
+                <a:latin typeface="Pretendard" pitchFamily="34" charset="0"/>
+                <a:ea typeface="Pretendard" pitchFamily="34" charset="-122"/>
+                <a:cs typeface="Pretendard" pitchFamily="34" charset="-120"/>
+              </a:rPr>
+              <a:t>품질 향상</a:t>
+            </a:r>
+            <a:endParaRPr lang="en-US" sz="2000" dirty="0"/>
+          </a:p>
+        </p:txBody>
+      </p:sp>
+      <p:sp>
+        <p:nvSpPr>
+          <p:cNvPr id="9" name="Text 7"/>
+          <p:cNvSpPr/>
+          <p:nvPr/>
+        </p:nvSpPr>
+        <p:spPr>
+          <a:xfrm>
+            <a:off x="3859438" y="3147814"/>
+            <a:ext cx="7943673" cy="355600"/>
+          </a:xfrm>
+          <a:prstGeom prst="rect">
+            <a:avLst/>
+          </a:prstGeom>
+          <a:noFill/>
+          <a:ln/>
+        </p:spPr>
+        <p:txBody>
+          <a:bodyPr wrap="square" lIns="0" tIns="0" rIns="0" bIns="0" rtlCol="0" anchor="t"/>
+          <a:lstStyle/>
+          <a:p>
+            <a:pPr algn="l" indent="0" marL="0">
+              <a:lnSpc>
+                <a:spcPts val="2800"/>
+              </a:lnSpc>
+              <a:buNone/>
+            </a:pPr>
+            <a:r>
+              <a:rPr lang="en-US" sz="1866" dirty="0">
+                <a:solidFill>
+                  <a:srgbClr val="0A0A0A"/>
+                </a:solidFill>
+                <a:latin typeface="Pretendard" pitchFamily="34" charset="0"/>
+                <a:ea typeface="Pretendard" pitchFamily="34" charset="-122"/>
+                <a:cs typeface="Pretendard" pitchFamily="34" charset="-120"/>
+              </a:rPr>
+              <a:t>TDD 및 자동화 테스트 도입을 통한 재작업 비용 절감</a:t>
+            </a:r>
+            <a:endParaRPr lang="en-US" sz="1866" dirty="0"/>
+          </a:p>
+        </p:txBody>
+      </p:sp>
+      <p:sp>
+        <p:nvSpPr>
+          <p:cNvPr id="10" name="Shape 8"/>
+          <p:cNvSpPr/>
+          <p:nvPr/>
+        </p:nvSpPr>
+        <p:spPr>
+          <a:xfrm>
+            <a:off x="566993" y="3706614"/>
+            <a:ext cx="0" cy="355600"/>
+          </a:xfrm>
+          <a:prstGeom prst="line">
+            <a:avLst/>
+          </a:prstGeom>
+          <a:noFill/>
+          <a:ln w="50794">
+            <a:solidFill>
+              <a:srgbClr val="FFFFFF"/>
+            </a:solidFill>
+            <a:prstDash val="solid"/>
+          </a:ln>
+        </p:spPr>
+      </p:sp>
+      <p:sp>
+        <p:nvSpPr>
+          <p:cNvPr id="11" name="Text 9"/>
+          <p:cNvSpPr/>
+          <p:nvPr/>
+        </p:nvSpPr>
+        <p:spPr>
+          <a:xfrm>
+            <a:off x="778474" y="3706614"/>
+            <a:ext cx="2900971" cy="342900"/>
+          </a:xfrm>
+          <a:prstGeom prst="rect">
+            <a:avLst/>
+          </a:prstGeom>
+          <a:noFill/>
+          <a:ln/>
+        </p:spPr>
+        <p:txBody>
+          <a:bodyPr wrap="square" lIns="0" tIns="0" rIns="0" bIns="0" rtlCol="0" anchor="t"/>
+          <a:lstStyle/>
+          <a:p>
+            <a:pPr algn="l" indent="0" marL="0">
+              <a:lnSpc>
+                <a:spcPts val="2700"/>
+              </a:lnSpc>
+              <a:buNone/>
+            </a:pPr>
+            <a:r>
+              <a:rPr lang="en-US" sz="2000" b="1" dirty="0">
+                <a:solidFill>
+                  <a:srgbClr val="0A0A0A"/>
+                </a:solidFill>
+                <a:latin typeface="Pretendard" pitchFamily="34" charset="0"/>
+                <a:ea typeface="Pretendard" pitchFamily="34" charset="-122"/>
+                <a:cs typeface="Pretendard" pitchFamily="34" charset="-120"/>
+              </a:rPr>
+              <a:t>팀 생산성 향상</a:t>
+            </a:r>
+            <a:endParaRPr lang="en-US" sz="2000" dirty="0"/>
+          </a:p>
+        </p:txBody>
+      </p:sp>
+      <p:sp>
+        <p:nvSpPr>
+          <p:cNvPr id="12" name="Text 10"/>
+          <p:cNvSpPr/>
+          <p:nvPr/>
+        </p:nvSpPr>
+        <p:spPr>
+          <a:xfrm>
+            <a:off x="3859438" y="3706614"/>
+            <a:ext cx="7943673" cy="355600"/>
+          </a:xfrm>
+          <a:prstGeom prst="rect">
+            <a:avLst/>
+          </a:prstGeom>
+          <a:noFill/>
+          <a:ln/>
+        </p:spPr>
+        <p:txBody>
+          <a:bodyPr wrap="square" lIns="0" tIns="0" rIns="0" bIns="0" rtlCol="0" anchor="t"/>
+          <a:lstStyle/>
+          <a:p>
+            <a:pPr algn="l" indent="0" marL="0">
+              <a:lnSpc>
+                <a:spcPts val="2800"/>
+              </a:lnSpc>
+              <a:buNone/>
+            </a:pPr>
+            <a:r>
+              <a:rPr lang="en-US" sz="1866" dirty="0">
+                <a:solidFill>
+                  <a:srgbClr val="0A0A0A"/>
+                </a:solidFill>
+                <a:latin typeface="Pretendard" pitchFamily="34" charset="0"/>
+                <a:ea typeface="Pretendard" pitchFamily="34" charset="-122"/>
+                <a:cs typeface="Pretendard" pitchFamily="34" charset="-120"/>
+              </a:rPr>
+              <a:t>WIP 제한과 칸반 보드를 활용한 흐름 최적화</a:t>
+            </a:r>
+            <a:endParaRPr lang="en-US" sz="1866" dirty="0"/>
+          </a:p>
+        </p:txBody>
+      </p:sp>
+      <p:sp>
+        <p:nvSpPr>
+          <p:cNvPr id="13" name="Shape 11"/>
+          <p:cNvSpPr/>
+          <p:nvPr/>
+        </p:nvSpPr>
+        <p:spPr>
+          <a:xfrm>
+            <a:off x="566993" y="4265414"/>
+            <a:ext cx="0" cy="355600"/>
+          </a:xfrm>
+          <a:prstGeom prst="line">
+            <a:avLst/>
+          </a:prstGeom>
+          <a:noFill/>
+          <a:ln w="50794">
+            <a:solidFill>
+              <a:srgbClr val="FFFFFF"/>
+            </a:solidFill>
+            <a:prstDash val="solid"/>
+          </a:ln>
+        </p:spPr>
+      </p:sp>
+      <p:sp>
+        <p:nvSpPr>
+          <p:cNvPr id="14" name="Text 12"/>
+          <p:cNvSpPr/>
+          <p:nvPr/>
+        </p:nvSpPr>
+        <p:spPr>
+          <a:xfrm>
+            <a:off x="778474" y="4265414"/>
+            <a:ext cx="2900971" cy="342900"/>
+          </a:xfrm>
+          <a:prstGeom prst="rect">
+            <a:avLst/>
+          </a:prstGeom>
+          <a:noFill/>
+          <a:ln/>
+        </p:spPr>
+        <p:txBody>
+          <a:bodyPr wrap="square" lIns="0" tIns="0" rIns="0" bIns="0" rtlCol="0" anchor="t"/>
+          <a:lstStyle/>
+          <a:p>
+            <a:pPr algn="l" indent="0" marL="0">
+              <a:lnSpc>
+                <a:spcPts val="2700"/>
+              </a:lnSpc>
+              <a:buNone/>
+            </a:pPr>
+            <a:r>
+              <a:rPr lang="en-US" sz="2000" b="1" dirty="0">
+                <a:solidFill>
+                  <a:srgbClr val="0A0A0A"/>
+                </a:solidFill>
+                <a:latin typeface="Pretendard" pitchFamily="34" charset="0"/>
+                <a:ea typeface="Pretendard" pitchFamily="34" charset="-122"/>
+                <a:cs typeface="Pretendard" pitchFamily="34" charset="-120"/>
+              </a:rPr>
+              <a:t>데브옵스 연계</a:t>
+            </a:r>
+            <a:endParaRPr lang="en-US" sz="2000" dirty="0"/>
+          </a:p>
+        </p:txBody>
+      </p:sp>
+      <p:sp>
+        <p:nvSpPr>
+          <p:cNvPr id="15" name="Text 13"/>
+          <p:cNvSpPr/>
+          <p:nvPr/>
+        </p:nvSpPr>
+        <p:spPr>
+          <a:xfrm>
+            <a:off x="3859438" y="4265414"/>
+            <a:ext cx="7943673" cy="355600"/>
+          </a:xfrm>
+          <a:prstGeom prst="rect">
+            <a:avLst/>
+          </a:prstGeom>
+          <a:noFill/>
+          <a:ln/>
+        </p:spPr>
+        <p:txBody>
+          <a:bodyPr wrap="square" lIns="0" tIns="0" rIns="0" bIns="0" rtlCol="0" anchor="t"/>
+          <a:lstStyle/>
+          <a:p>
+            <a:pPr algn="l" indent="0" marL="0">
+              <a:lnSpc>
+                <a:spcPts val="2800"/>
+              </a:lnSpc>
+              <a:buNone/>
+            </a:pPr>
+            <a:r>
+              <a:rPr lang="en-US" sz="1866" dirty="0">
+                <a:solidFill>
+                  <a:srgbClr val="0A0A0A"/>
+                </a:solidFill>
+                <a:latin typeface="Pretendard" pitchFamily="34" charset="0"/>
+                <a:ea typeface="Pretendard" pitchFamily="34" charset="-122"/>
+                <a:cs typeface="Pretendard" pitchFamily="34" charset="-120"/>
+              </a:rPr>
+              <a:t>CI/CD 및 자동화 개발 문화 구축</a:t>
+            </a:r>
+            <a:endParaRPr lang="en-US" sz="1866" dirty="0"/>
+          </a:p>
+        </p:txBody>
+      </p:sp>
+      <p:sp>
+        <p:nvSpPr>
+          <p:cNvPr id="16" name="Text 14"/>
+          <p:cNvSpPr/>
+          <p:nvPr/>
+        </p:nvSpPr>
+        <p:spPr>
+          <a:xfrm>
+            <a:off x="846323" y="5061148"/>
+            <a:ext cx="7731605" cy="331986"/>
+          </a:xfrm>
+          <a:prstGeom prst="rect">
+            <a:avLst/>
+          </a:prstGeom>
+          <a:noFill/>
+          <a:ln/>
+        </p:spPr>
+        <p:txBody>
+          <a:bodyPr wrap="square" lIns="0" tIns="0" rIns="0" bIns="0" rtlCol="0" anchor="t"/>
+          <a:lstStyle/>
+          <a:p>
+            <a:pPr algn="l" indent="0" marL="0">
+              <a:lnSpc>
+                <a:spcPts val="2613"/>
+              </a:lnSpc>
+              <a:buNone/>
+            </a:pPr>
+            <a:r>
+              <a:rPr lang="en-US" sz="1866" b="1" dirty="0">
+                <a:solidFill>
+                  <a:srgbClr val="0A0A0A"/>
+                </a:solidFill>
+                <a:latin typeface="Pretendard" pitchFamily="34" charset="0"/>
+                <a:ea typeface="Pretendard" pitchFamily="34" charset="-122"/>
+                <a:cs typeface="Pretendard" pitchFamily="34" charset="-120"/>
+              </a:rPr>
+              <a:t>낭비를 줄이는 것이 목적이 아니라, 전체 가치 흐름의 처리량을 올리는 것이 목적이다.</a:t>
+            </a:r>
+            <a:endParaRPr lang="en-US" sz="1866" dirty="0"/>
+          </a:p>
+        </p:txBody>
+      </p:sp>
     </p:spTree>
   </p:cSld>
   <p:clrMapOvr>

--- a/decks/lean-software-development/lean-software-development.pptx
+++ b/decks/lean-software-development/lean-software-development.pptx
@@ -1239,6 +1239,84 @@
         </p:nvSpPr>
         <p:spPr>
           <a:xfrm>
+            <a:off x="541599" y="440134"/>
+            <a:ext cx="5279661" cy="203200"/>
+          </a:xfrm>
+          <a:prstGeom prst="rect">
+            <a:avLst/>
+          </a:prstGeom>
+          <a:noFill/>
+          <a:ln/>
+        </p:spPr>
+        <p:txBody>
+          <a:bodyPr wrap="square" lIns="0" tIns="0" rIns="0" bIns="0" rtlCol="0" anchor="t"/>
+          <a:lstStyle/>
+          <a:p>
+            <a:pPr algn="l" indent="0" marL="0">
+              <a:buNone/>
+            </a:pPr>
+            <a:r>
+              <a:rPr lang="en-US" sz="1333" b="1" dirty="0">
+                <a:solidFill>
+                  <a:srgbClr val="7B7B7B"/>
+                </a:solidFill>
+                <a:latin typeface="Pretendard" pitchFamily="34" charset="0"/>
+                <a:ea typeface="Pretendard" pitchFamily="34" charset="-122"/>
+                <a:cs typeface="Pretendard" pitchFamily="34" charset="-120"/>
+              </a:rPr>
+              <a:t>LEAN SOFTWARE DEVELOPMENT · FRAMEWORK THINKING</a:t>
+            </a:r>
+            <a:endParaRPr lang="en-US" sz="1333" dirty="0"/>
+          </a:p>
+        </p:txBody>
+      </p:sp>
+      <p:sp>
+        <p:nvSpPr>
+          <p:cNvPr id="3" name="Text 1"/>
+          <p:cNvSpPr/>
+          <p:nvPr/>
+        </p:nvSpPr>
+        <p:spPr>
+          <a:xfrm>
+            <a:off x="11042072" y="440134"/>
+            <a:ext cx="617387" cy="203200"/>
+          </a:xfrm>
+          <a:prstGeom prst="rect">
+            <a:avLst/>
+          </a:prstGeom>
+          <a:noFill/>
+          <a:ln/>
+        </p:spPr>
+        <p:txBody>
+          <a:bodyPr wrap="square" lIns="0" tIns="0" rIns="0" bIns="0" rtlCol="0" anchor="t"/>
+          <a:lstStyle/>
+          <a:p>
+            <a:pPr algn="l" indent="0" marL="0">
+              <a:buNone/>
+            </a:pPr>
+            <a:r>
+              <a:rPr lang="en-US" sz="1333" b="1" dirty="0">
+                <a:solidFill>
+                  <a:srgbClr val="B4B4B4"/>
+                </a:solidFill>
+                <a:latin typeface="Pretendard" pitchFamily="34" charset="0"/>
+                <a:ea typeface="Pretendard" pitchFamily="34" charset="-122"/>
+                <a:cs typeface="Pretendard" pitchFamily="34" charset="-120"/>
+              </a:rPr>
+              <a:t>01 / 05</a:t>
+            </a:r>
+            <a:endParaRPr lang="en-US" sz="1333" dirty="0"/>
+          </a:p>
+        </p:txBody>
+      </p:sp>
+      <p:sp>
+        <p:nvSpPr>
+          <p:cNvPr id="4" name="Text 2"/>
+          <p:cNvSpPr/>
+          <p:nvPr/>
+        </p:nvSpPr>
+        <p:spPr>
+          <a:xfrm>
             <a:off x="541599" y="778669"/>
             <a:ext cx="11105754" cy="8334"/>
           </a:xfrm>
@@ -1263,13 +1341,13 @@
       </p:sp>
       <p:sp>
         <p:nvSpPr>
-          <p:cNvPr id="3" name="Text 1"/>
-          <p:cNvSpPr/>
-          <p:nvPr/>
-        </p:nvSpPr>
-        <p:spPr>
-          <a:xfrm>
-            <a:off x="541599" y="1394817"/>
+          <p:cNvPr id="5" name="Text 3"/>
+          <p:cNvSpPr/>
+          <p:nvPr/>
+        </p:nvSpPr>
+        <p:spPr>
+          <a:xfrm>
+            <a:off x="541599" y="1293217"/>
             <a:ext cx="11327869" cy="812602"/>
           </a:xfrm>
           <a:prstGeom prst="rect">
@@ -1305,13 +1383,13 @@
       </p:sp>
       <p:sp>
         <p:nvSpPr>
-          <p:cNvPr id="4" name="Text 2"/>
-          <p:cNvSpPr/>
-          <p:nvPr/>
-        </p:nvSpPr>
-        <p:spPr>
-          <a:xfrm>
-            <a:off x="541599" y="2309019"/>
+          <p:cNvPr id="6" name="Text 4"/>
+          <p:cNvSpPr/>
+          <p:nvPr/>
+        </p:nvSpPr>
+        <p:spPr>
+          <a:xfrm>
+            <a:off x="541599" y="2207419"/>
             <a:ext cx="11327869" cy="434181"/>
           </a:xfrm>
           <a:prstGeom prst="rect">
@@ -1350,13 +1428,13 @@
       </p:sp>
       <p:sp>
         <p:nvSpPr>
-          <p:cNvPr id="5" name="Text 3"/>
-          <p:cNvSpPr/>
-          <p:nvPr/>
-        </p:nvSpPr>
-        <p:spPr>
-          <a:xfrm>
-            <a:off x="541599" y="3081734"/>
+          <p:cNvPr id="7" name="Text 5"/>
+          <p:cNvSpPr/>
+          <p:nvPr/>
+        </p:nvSpPr>
+        <p:spPr>
+          <a:xfrm>
+            <a:off x="541599" y="2980134"/>
             <a:ext cx="947897" cy="67667"/>
           </a:xfrm>
           <a:prstGeom prst="roundRect">
@@ -1382,13 +1460,13 @@
       </p:sp>
       <p:sp>
         <p:nvSpPr>
-          <p:cNvPr id="6" name="Text 4"/>
-          <p:cNvSpPr/>
-          <p:nvPr/>
-        </p:nvSpPr>
-        <p:spPr>
-          <a:xfrm>
-            <a:off x="541599" y="3487936"/>
+          <p:cNvPr id="8" name="Text 6"/>
+          <p:cNvSpPr/>
+          <p:nvPr/>
+        </p:nvSpPr>
+        <p:spPr>
+          <a:xfrm>
+            <a:off x="541599" y="3386336"/>
             <a:ext cx="8840918" cy="367506"/>
           </a:xfrm>
           <a:prstGeom prst="rect">
@@ -1424,13 +1502,13 @@
       </p:sp>
       <p:sp>
         <p:nvSpPr>
-          <p:cNvPr id="7" name="Text 5"/>
-          <p:cNvSpPr/>
-          <p:nvPr/>
-        </p:nvSpPr>
-        <p:spPr>
-          <a:xfrm>
-            <a:off x="541599" y="3973909"/>
+          <p:cNvPr id="9" name="Text 7"/>
+          <p:cNvSpPr/>
+          <p:nvPr/>
+        </p:nvSpPr>
+        <p:spPr>
+          <a:xfrm>
+            <a:off x="541599" y="3872309"/>
             <a:ext cx="8840918" cy="367506"/>
           </a:xfrm>
           <a:prstGeom prst="rect">
@@ -1466,13 +1544,13 @@
       </p:sp>
       <p:sp>
         <p:nvSpPr>
-          <p:cNvPr id="8" name="Text 6"/>
-          <p:cNvSpPr/>
-          <p:nvPr/>
-        </p:nvSpPr>
-        <p:spPr>
-          <a:xfrm>
-            <a:off x="541599" y="4646216"/>
+          <p:cNvPr id="10" name="Text 8"/>
+          <p:cNvSpPr/>
+          <p:nvPr/>
+        </p:nvSpPr>
+        <p:spPr>
+          <a:xfrm>
+            <a:off x="541599" y="4544616"/>
             <a:ext cx="8840918" cy="330002"/>
           </a:xfrm>
           <a:prstGeom prst="rect">
@@ -1511,13 +1589,13 @@
       </p:sp>
       <p:sp>
         <p:nvSpPr>
-          <p:cNvPr id="9" name="Text 7"/>
-          <p:cNvSpPr/>
-          <p:nvPr/>
-        </p:nvSpPr>
-        <p:spPr>
-          <a:xfrm>
-            <a:off x="541599" y="5314752"/>
+          <p:cNvPr id="11" name="Text 9"/>
+          <p:cNvSpPr/>
+          <p:nvPr/>
+        </p:nvSpPr>
+        <p:spPr>
+          <a:xfrm>
+            <a:off x="541599" y="5213152"/>
             <a:ext cx="11327869" cy="228600"/>
           </a:xfrm>
           <a:prstGeom prst="rect">
@@ -1548,6 +1626,107 @@
               <a:t>발표자 · 소속</a:t>
             </a:r>
             <a:endParaRPr lang="en-US" sz="1466" dirty="0"/>
+          </a:p>
+        </p:txBody>
+      </p:sp>
+      <p:sp>
+        <p:nvSpPr>
+          <p:cNvPr id="12" name="Shape 10"/>
+          <p:cNvSpPr/>
+          <p:nvPr/>
+        </p:nvSpPr>
+        <p:spPr>
+          <a:xfrm>
+            <a:off x="541599" y="5954316"/>
+            <a:ext cx="11105754" cy="0"/>
+          </a:xfrm>
+          <a:prstGeom prst="line">
+            <a:avLst/>
+          </a:prstGeom>
+          <a:noFill/>
+          <a:ln w="12698">
+            <a:solidFill>
+              <a:srgbClr val="E8E8E8"/>
+            </a:solidFill>
+            <a:prstDash val="solid"/>
+          </a:ln>
+        </p:spPr>
+      </p:sp>
+      <p:sp>
+        <p:nvSpPr>
+          <p:cNvPr id="13" name="Text 11"/>
+          <p:cNvSpPr/>
+          <p:nvPr/>
+        </p:nvSpPr>
+        <p:spPr>
+          <a:xfrm>
+            <a:off x="541599" y="6113066"/>
+            <a:ext cx="5011945" cy="203200"/>
+          </a:xfrm>
+          <a:prstGeom prst="rect">
+            <a:avLst/>
+          </a:prstGeom>
+          <a:noFill/>
+          <a:ln/>
+        </p:spPr>
+        <p:txBody>
+          <a:bodyPr wrap="square" lIns="0" tIns="0" rIns="0" bIns="0" rtlCol="0" anchor="t"/>
+          <a:lstStyle/>
+          <a:p>
+            <a:pPr algn="l" indent="0" marL="0">
+              <a:buNone/>
+            </a:pPr>
+            <a:r>
+              <a:rPr lang="en-US" sz="1333" dirty="0">
+                <a:solidFill>
+                  <a:srgbClr val="B4B4B4"/>
+                </a:solidFill>
+                <a:latin typeface="Pretendard" pitchFamily="34" charset="0"/>
+                <a:ea typeface="Pretendard" pitchFamily="34" charset="-122"/>
+                <a:cs typeface="Pretendard" pitchFamily="34" charset="-120"/>
+              </a:rPr>
+              <a:t>출처 — 발표자 제공 개요 · fw-thinking.metacog.co.kr. 수치·차트 없음</a:t>
+            </a:r>
+            <a:endParaRPr lang="en-US" sz="1333" dirty="0"/>
+          </a:p>
+        </p:txBody>
+      </p:sp>
+      <p:sp>
+        <p:nvSpPr>
+          <p:cNvPr id="14" name="Text 12"/>
+          <p:cNvSpPr/>
+          <p:nvPr/>
+        </p:nvSpPr>
+        <p:spPr>
+          <a:xfrm>
+            <a:off x="9107988" y="6113066"/>
+            <a:ext cx="2590152" cy="203200"/>
+          </a:xfrm>
+          <a:prstGeom prst="rect">
+            <a:avLst/>
+          </a:prstGeom>
+          <a:noFill/>
+          <a:ln/>
+        </p:spPr>
+        <p:txBody>
+          <a:bodyPr wrap="square" lIns="0" tIns="0" rIns="0" bIns="0" rtlCol="0" anchor="t"/>
+          <a:lstStyle/>
+          <a:p>
+            <a:pPr algn="l" indent="0" marL="0">
+              <a:buNone/>
+            </a:pPr>
+            <a:r>
+              <a:rPr lang="en-US" sz="1333" dirty="0">
+                <a:solidFill>
+                  <a:srgbClr val="B4B4B4"/>
+                </a:solidFill>
+                <a:latin typeface="Pretendard" pitchFamily="34" charset="0"/>
+                <a:ea typeface="Pretendard" pitchFamily="34" charset="-122"/>
+                <a:cs typeface="Pretendard" pitchFamily="34" charset="-120"/>
+              </a:rPr>
+              <a:t>LEAN SOFTWARE DEVELOPMENT</a:t>
+            </a:r>
+            <a:endParaRPr lang="en-US" sz="1333" dirty="0"/>
           </a:p>
         </p:txBody>
       </p:sp>
@@ -1591,6 +1770,84 @@
         </p:nvSpPr>
         <p:spPr>
           <a:xfrm>
+            <a:off x="541599" y="440134"/>
+            <a:ext cx="1364282" cy="203200"/>
+          </a:xfrm>
+          <a:prstGeom prst="rect">
+            <a:avLst/>
+          </a:prstGeom>
+          <a:noFill/>
+          <a:ln/>
+        </p:spPr>
+        <p:txBody>
+          <a:bodyPr wrap="square" lIns="0" tIns="0" rIns="0" bIns="0" rtlCol="0" anchor="t"/>
+          <a:lstStyle/>
+          <a:p>
+            <a:pPr algn="l" indent="0" marL="0">
+              <a:buNone/>
+            </a:pPr>
+            <a:r>
+              <a:rPr lang="en-US" sz="1333" b="1" dirty="0">
+                <a:solidFill>
+                  <a:srgbClr val="7B7B7B"/>
+                </a:solidFill>
+                <a:latin typeface="Pretendard" pitchFamily="34" charset="0"/>
+                <a:ea typeface="Pretendard" pitchFamily="34" charset="-122"/>
+                <a:cs typeface="Pretendard" pitchFamily="34" charset="-120"/>
+              </a:rPr>
+              <a:t>7가지 원칙 · 1 – 4</a:t>
+            </a:r>
+            <a:endParaRPr lang="en-US" sz="1333" dirty="0"/>
+          </a:p>
+        </p:txBody>
+      </p:sp>
+      <p:sp>
+        <p:nvSpPr>
+          <p:cNvPr id="3" name="Text 1"/>
+          <p:cNvSpPr/>
+          <p:nvPr/>
+        </p:nvSpPr>
+        <p:spPr>
+          <a:xfrm>
+            <a:off x="11003981" y="440134"/>
+            <a:ext cx="656239" cy="203200"/>
+          </a:xfrm>
+          <a:prstGeom prst="rect">
+            <a:avLst/>
+          </a:prstGeom>
+          <a:noFill/>
+          <a:ln/>
+        </p:spPr>
+        <p:txBody>
+          <a:bodyPr wrap="square" lIns="0" tIns="0" rIns="0" bIns="0" rtlCol="0" anchor="t"/>
+          <a:lstStyle/>
+          <a:p>
+            <a:pPr algn="l" indent="0" marL="0">
+              <a:buNone/>
+            </a:pPr>
+            <a:r>
+              <a:rPr lang="en-US" sz="1333" b="1" dirty="0">
+                <a:solidFill>
+                  <a:srgbClr val="B4B4B4"/>
+                </a:solidFill>
+                <a:latin typeface="Pretendard" pitchFamily="34" charset="0"/>
+                <a:ea typeface="Pretendard" pitchFamily="34" charset="-122"/>
+                <a:cs typeface="Pretendard" pitchFamily="34" charset="-120"/>
+              </a:rPr>
+              <a:t>02 / 05</a:t>
+            </a:r>
+            <a:endParaRPr lang="en-US" sz="1333" dirty="0"/>
+          </a:p>
+        </p:txBody>
+      </p:sp>
+      <p:sp>
+        <p:nvSpPr>
+          <p:cNvPr id="4" name="Text 2"/>
+          <p:cNvSpPr/>
+          <p:nvPr/>
+        </p:nvSpPr>
+        <p:spPr>
+          <a:xfrm>
             <a:off x="541599" y="778669"/>
             <a:ext cx="11105754" cy="8334"/>
           </a:xfrm>
@@ -1615,7 +1872,7 @@
       </p:sp>
       <p:sp>
         <p:nvSpPr>
-          <p:cNvPr id="3" name="Text 1"/>
+          <p:cNvPr id="5" name="Text 3"/>
           <p:cNvSpPr/>
           <p:nvPr/>
         </p:nvSpPr>
@@ -1660,13 +1917,13 @@
       </p:sp>
       <p:sp>
         <p:nvSpPr>
-          <p:cNvPr id="4" name="Shape 2"/>
-          <p:cNvSpPr/>
-          <p:nvPr/>
-        </p:nvSpPr>
-        <p:spPr>
-          <a:xfrm>
-            <a:off x="566993" y="2433836"/>
+          <p:cNvPr id="6" name="Shape 4"/>
+          <p:cNvSpPr/>
+          <p:nvPr/>
+        </p:nvSpPr>
+        <p:spPr>
+          <a:xfrm>
+            <a:off x="566993" y="2332236"/>
             <a:ext cx="0" cy="613569"/>
           </a:xfrm>
           <a:prstGeom prst="line">
@@ -1683,13 +1940,13 @@
       </p:sp>
       <p:sp>
         <p:nvSpPr>
-          <p:cNvPr id="5" name="Text 3"/>
-          <p:cNvSpPr/>
-          <p:nvPr/>
-        </p:nvSpPr>
-        <p:spPr>
-          <a:xfrm>
-            <a:off x="778474" y="2433836"/>
+          <p:cNvPr id="7" name="Text 5"/>
+          <p:cNvSpPr/>
+          <p:nvPr/>
+        </p:nvSpPr>
+        <p:spPr>
+          <a:xfrm>
+            <a:off x="778474" y="2332236"/>
             <a:ext cx="448825" cy="342900"/>
           </a:xfrm>
           <a:prstGeom prst="rect">
@@ -1725,13 +1982,13 @@
       </p:sp>
       <p:sp>
         <p:nvSpPr>
-          <p:cNvPr id="6" name="Text 4"/>
-          <p:cNvSpPr/>
-          <p:nvPr/>
-        </p:nvSpPr>
-        <p:spPr>
-          <a:xfrm>
-            <a:off x="1455374" y="2433836"/>
+          <p:cNvPr id="8" name="Text 6"/>
+          <p:cNvSpPr/>
+          <p:nvPr/>
+        </p:nvSpPr>
+        <p:spPr>
+          <a:xfrm>
+            <a:off x="1455374" y="2332236"/>
             <a:ext cx="2969974" cy="342900"/>
           </a:xfrm>
           <a:prstGeom prst="rect">
@@ -1767,13 +2024,13 @@
       </p:sp>
       <p:sp>
         <p:nvSpPr>
-          <p:cNvPr id="7" name="Text 5"/>
-          <p:cNvSpPr/>
-          <p:nvPr/>
-        </p:nvSpPr>
-        <p:spPr>
-          <a:xfrm>
-            <a:off x="1455374" y="2810470"/>
+          <p:cNvPr id="9" name="Text 7"/>
+          <p:cNvSpPr/>
+          <p:nvPr/>
+        </p:nvSpPr>
+        <p:spPr>
+          <a:xfrm>
+            <a:off x="1455374" y="2708870"/>
             <a:ext cx="2969974" cy="236934"/>
           </a:xfrm>
           <a:prstGeom prst="rect">
@@ -1812,13 +2069,13 @@
       </p:sp>
       <p:sp>
         <p:nvSpPr>
-          <p:cNvPr id="8" name="Text 6"/>
-          <p:cNvSpPr/>
-          <p:nvPr/>
-        </p:nvSpPr>
-        <p:spPr>
-          <a:xfrm>
-            <a:off x="4603988" y="2433836"/>
+          <p:cNvPr id="10" name="Text 8"/>
+          <p:cNvSpPr/>
+          <p:nvPr/>
+        </p:nvSpPr>
+        <p:spPr>
+          <a:xfrm>
+            <a:off x="4603988" y="2332236"/>
             <a:ext cx="7184233" cy="355600"/>
           </a:xfrm>
           <a:prstGeom prst="rect">
@@ -1854,13 +2111,13 @@
       </p:sp>
       <p:sp>
         <p:nvSpPr>
-          <p:cNvPr id="9" name="Shape 7"/>
-          <p:cNvSpPr/>
-          <p:nvPr/>
-        </p:nvSpPr>
-        <p:spPr>
-          <a:xfrm>
-            <a:off x="566993" y="3267472"/>
+          <p:cNvPr id="11" name="Shape 9"/>
+          <p:cNvSpPr/>
+          <p:nvPr/>
+        </p:nvSpPr>
+        <p:spPr>
+          <a:xfrm>
+            <a:off x="566993" y="3165872"/>
             <a:ext cx="0" cy="613569"/>
           </a:xfrm>
           <a:prstGeom prst="line">
@@ -1877,13 +2134,13 @@
       </p:sp>
       <p:sp>
         <p:nvSpPr>
-          <p:cNvPr id="10" name="Text 8"/>
-          <p:cNvSpPr/>
-          <p:nvPr/>
-        </p:nvSpPr>
-        <p:spPr>
-          <a:xfrm>
-            <a:off x="778474" y="3267472"/>
+          <p:cNvPr id="12" name="Text 10"/>
+          <p:cNvSpPr/>
+          <p:nvPr/>
+        </p:nvSpPr>
+        <p:spPr>
+          <a:xfrm>
+            <a:off x="778474" y="3165872"/>
             <a:ext cx="448825" cy="342900"/>
           </a:xfrm>
           <a:prstGeom prst="rect">
@@ -1919,13 +2176,13 @@
       </p:sp>
       <p:sp>
         <p:nvSpPr>
-          <p:cNvPr id="11" name="Text 9"/>
-          <p:cNvSpPr/>
-          <p:nvPr/>
-        </p:nvSpPr>
-        <p:spPr>
-          <a:xfrm>
-            <a:off x="1455374" y="3267472"/>
+          <p:cNvPr id="13" name="Text 11"/>
+          <p:cNvSpPr/>
+          <p:nvPr/>
+        </p:nvSpPr>
+        <p:spPr>
+          <a:xfrm>
+            <a:off x="1455374" y="3165872"/>
             <a:ext cx="2969974" cy="342900"/>
           </a:xfrm>
           <a:prstGeom prst="rect">
@@ -1961,13 +2218,13 @@
       </p:sp>
       <p:sp>
         <p:nvSpPr>
-          <p:cNvPr id="12" name="Text 10"/>
-          <p:cNvSpPr/>
-          <p:nvPr/>
-        </p:nvSpPr>
-        <p:spPr>
-          <a:xfrm>
-            <a:off x="1455374" y="3644106"/>
+          <p:cNvPr id="14" name="Text 12"/>
+          <p:cNvSpPr/>
+          <p:nvPr/>
+        </p:nvSpPr>
+        <p:spPr>
+          <a:xfrm>
+            <a:off x="1455374" y="3542506"/>
             <a:ext cx="2969974" cy="236934"/>
           </a:xfrm>
           <a:prstGeom prst="rect">
@@ -2006,13 +2263,13 @@
       </p:sp>
       <p:sp>
         <p:nvSpPr>
-          <p:cNvPr id="13" name="Text 11"/>
-          <p:cNvSpPr/>
-          <p:nvPr/>
-        </p:nvSpPr>
-        <p:spPr>
-          <a:xfrm>
-            <a:off x="4603988" y="3267472"/>
+          <p:cNvPr id="15" name="Text 13"/>
+          <p:cNvSpPr/>
+          <p:nvPr/>
+        </p:nvSpPr>
+        <p:spPr>
+          <a:xfrm>
+            <a:off x="4603988" y="3165872"/>
             <a:ext cx="7184233" cy="355600"/>
           </a:xfrm>
           <a:prstGeom prst="rect">
@@ -2048,13 +2305,13 @@
       </p:sp>
       <p:sp>
         <p:nvSpPr>
-          <p:cNvPr id="14" name="Shape 12"/>
-          <p:cNvSpPr/>
-          <p:nvPr/>
-        </p:nvSpPr>
-        <p:spPr>
-          <a:xfrm>
-            <a:off x="566993" y="4101108"/>
+          <p:cNvPr id="16" name="Shape 14"/>
+          <p:cNvSpPr/>
+          <p:nvPr/>
+        </p:nvSpPr>
+        <p:spPr>
+          <a:xfrm>
+            <a:off x="566993" y="3999508"/>
             <a:ext cx="0" cy="613569"/>
           </a:xfrm>
           <a:prstGeom prst="line">
@@ -2071,13 +2328,13 @@
       </p:sp>
       <p:sp>
         <p:nvSpPr>
-          <p:cNvPr id="15" name="Text 13"/>
-          <p:cNvSpPr/>
-          <p:nvPr/>
-        </p:nvSpPr>
-        <p:spPr>
-          <a:xfrm>
-            <a:off x="778474" y="4101108"/>
+          <p:cNvPr id="17" name="Text 15"/>
+          <p:cNvSpPr/>
+          <p:nvPr/>
+        </p:nvSpPr>
+        <p:spPr>
+          <a:xfrm>
+            <a:off x="778474" y="3999508"/>
             <a:ext cx="448825" cy="342900"/>
           </a:xfrm>
           <a:prstGeom prst="rect">
@@ -2113,13 +2370,13 @@
       </p:sp>
       <p:sp>
         <p:nvSpPr>
-          <p:cNvPr id="16" name="Text 14"/>
-          <p:cNvSpPr/>
-          <p:nvPr/>
-        </p:nvSpPr>
-        <p:spPr>
-          <a:xfrm>
-            <a:off x="1455374" y="4101108"/>
+          <p:cNvPr id="18" name="Text 16"/>
+          <p:cNvSpPr/>
+          <p:nvPr/>
+        </p:nvSpPr>
+        <p:spPr>
+          <a:xfrm>
+            <a:off x="1455374" y="3999508"/>
             <a:ext cx="2969974" cy="342900"/>
           </a:xfrm>
           <a:prstGeom prst="rect">
@@ -2155,13 +2412,13 @@
       </p:sp>
       <p:sp>
         <p:nvSpPr>
-          <p:cNvPr id="17" name="Text 15"/>
-          <p:cNvSpPr/>
-          <p:nvPr/>
-        </p:nvSpPr>
-        <p:spPr>
-          <a:xfrm>
-            <a:off x="1455374" y="4477742"/>
+          <p:cNvPr id="19" name="Text 17"/>
+          <p:cNvSpPr/>
+          <p:nvPr/>
+        </p:nvSpPr>
+        <p:spPr>
+          <a:xfrm>
+            <a:off x="1455374" y="4376142"/>
             <a:ext cx="2969974" cy="236934"/>
           </a:xfrm>
           <a:prstGeom prst="rect">
@@ -2200,13 +2457,13 @@
       </p:sp>
       <p:sp>
         <p:nvSpPr>
-          <p:cNvPr id="18" name="Text 16"/>
-          <p:cNvSpPr/>
-          <p:nvPr/>
-        </p:nvSpPr>
-        <p:spPr>
-          <a:xfrm>
-            <a:off x="4603988" y="4101108"/>
+          <p:cNvPr id="20" name="Text 18"/>
+          <p:cNvSpPr/>
+          <p:nvPr/>
+        </p:nvSpPr>
+        <p:spPr>
+          <a:xfrm>
+            <a:off x="4603988" y="3999508"/>
             <a:ext cx="7184233" cy="355600"/>
           </a:xfrm>
           <a:prstGeom prst="rect">
@@ -2242,13 +2499,13 @@
       </p:sp>
       <p:sp>
         <p:nvSpPr>
-          <p:cNvPr id="19" name="Shape 17"/>
-          <p:cNvSpPr/>
-          <p:nvPr/>
-        </p:nvSpPr>
-        <p:spPr>
-          <a:xfrm>
-            <a:off x="566993" y="4934744"/>
+          <p:cNvPr id="21" name="Shape 19"/>
+          <p:cNvSpPr/>
+          <p:nvPr/>
+        </p:nvSpPr>
+        <p:spPr>
+          <a:xfrm>
+            <a:off x="566993" y="4833144"/>
             <a:ext cx="0" cy="613569"/>
           </a:xfrm>
           <a:prstGeom prst="line">
@@ -2265,13 +2522,13 @@
       </p:sp>
       <p:sp>
         <p:nvSpPr>
-          <p:cNvPr id="20" name="Text 18"/>
-          <p:cNvSpPr/>
-          <p:nvPr/>
-        </p:nvSpPr>
-        <p:spPr>
-          <a:xfrm>
-            <a:off x="778474" y="4934744"/>
+          <p:cNvPr id="22" name="Text 20"/>
+          <p:cNvSpPr/>
+          <p:nvPr/>
+        </p:nvSpPr>
+        <p:spPr>
+          <a:xfrm>
+            <a:off x="778474" y="4833144"/>
             <a:ext cx="448825" cy="342900"/>
           </a:xfrm>
           <a:prstGeom prst="rect">
@@ -2307,13 +2564,13 @@
       </p:sp>
       <p:sp>
         <p:nvSpPr>
-          <p:cNvPr id="21" name="Text 19"/>
-          <p:cNvSpPr/>
-          <p:nvPr/>
-        </p:nvSpPr>
-        <p:spPr>
-          <a:xfrm>
-            <a:off x="1455374" y="4934744"/>
+          <p:cNvPr id="23" name="Text 21"/>
+          <p:cNvSpPr/>
+          <p:nvPr/>
+        </p:nvSpPr>
+        <p:spPr>
+          <a:xfrm>
+            <a:off x="1455374" y="4833144"/>
             <a:ext cx="2969974" cy="342900"/>
           </a:xfrm>
           <a:prstGeom prst="rect">
@@ -2349,13 +2606,13 @@
       </p:sp>
       <p:sp>
         <p:nvSpPr>
-          <p:cNvPr id="22" name="Text 20"/>
-          <p:cNvSpPr/>
-          <p:nvPr/>
-        </p:nvSpPr>
-        <p:spPr>
-          <a:xfrm>
-            <a:off x="1455374" y="5311378"/>
+          <p:cNvPr id="24" name="Text 22"/>
+          <p:cNvSpPr/>
+          <p:nvPr/>
+        </p:nvSpPr>
+        <p:spPr>
+          <a:xfrm>
+            <a:off x="1455374" y="5209778"/>
             <a:ext cx="2969974" cy="236934"/>
           </a:xfrm>
           <a:prstGeom prst="rect">
@@ -2394,13 +2651,13 @@
       </p:sp>
       <p:sp>
         <p:nvSpPr>
-          <p:cNvPr id="23" name="Text 21"/>
-          <p:cNvSpPr/>
-          <p:nvPr/>
-        </p:nvSpPr>
-        <p:spPr>
-          <a:xfrm>
-            <a:off x="4603988" y="4934744"/>
+          <p:cNvPr id="25" name="Text 23"/>
+          <p:cNvSpPr/>
+          <p:nvPr/>
+        </p:nvSpPr>
+        <p:spPr>
+          <a:xfrm>
+            <a:off x="4603988" y="4833144"/>
             <a:ext cx="7184233" cy="355600"/>
           </a:xfrm>
           <a:prstGeom prst="rect">
@@ -2431,6 +2688,107 @@
               <a:t>작은 단위로 빈번하게 배포하여 피드백 주기 단축 (CI/CD)</a:t>
             </a:r>
             <a:endParaRPr lang="en-US" sz="1866" dirty="0"/>
+          </a:p>
+        </p:txBody>
+      </p:sp>
+      <p:sp>
+        <p:nvSpPr>
+          <p:cNvPr id="26" name="Shape 24"/>
+          <p:cNvSpPr/>
+          <p:nvPr/>
+        </p:nvSpPr>
+        <p:spPr>
+          <a:xfrm>
+            <a:off x="541599" y="5954316"/>
+            <a:ext cx="11105754" cy="0"/>
+          </a:xfrm>
+          <a:prstGeom prst="line">
+            <a:avLst/>
+          </a:prstGeom>
+          <a:noFill/>
+          <a:ln w="12698">
+            <a:solidFill>
+              <a:srgbClr val="E8E8E8"/>
+            </a:solidFill>
+            <a:prstDash val="solid"/>
+          </a:ln>
+        </p:spPr>
+      </p:sp>
+      <p:sp>
+        <p:nvSpPr>
+          <p:cNvPr id="27" name="Text 25"/>
+          <p:cNvSpPr/>
+          <p:nvPr/>
+        </p:nvSpPr>
+        <p:spPr>
+          <a:xfrm>
+            <a:off x="541599" y="6113066"/>
+            <a:ext cx="5011945" cy="203200"/>
+          </a:xfrm>
+          <a:prstGeom prst="rect">
+            <a:avLst/>
+          </a:prstGeom>
+          <a:noFill/>
+          <a:ln/>
+        </p:spPr>
+        <p:txBody>
+          <a:bodyPr wrap="square" lIns="0" tIns="0" rIns="0" bIns="0" rtlCol="0" anchor="t"/>
+          <a:lstStyle/>
+          <a:p>
+            <a:pPr algn="l" indent="0" marL="0">
+              <a:buNone/>
+            </a:pPr>
+            <a:r>
+              <a:rPr lang="en-US" sz="1333" dirty="0">
+                <a:solidFill>
+                  <a:srgbClr val="B4B4B4"/>
+                </a:solidFill>
+                <a:latin typeface="Pretendard" pitchFamily="34" charset="0"/>
+                <a:ea typeface="Pretendard" pitchFamily="34" charset="-122"/>
+                <a:cs typeface="Pretendard" pitchFamily="34" charset="-120"/>
+              </a:rPr>
+              <a:t>출처 — 발표자 제공 개요 · fw-thinking.metacog.co.kr. 수치·차트 없음</a:t>
+            </a:r>
+            <a:endParaRPr lang="en-US" sz="1333" dirty="0"/>
+          </a:p>
+        </p:txBody>
+      </p:sp>
+      <p:sp>
+        <p:nvSpPr>
+          <p:cNvPr id="28" name="Text 26"/>
+          <p:cNvSpPr/>
+          <p:nvPr/>
+        </p:nvSpPr>
+        <p:spPr>
+          <a:xfrm>
+            <a:off x="9107988" y="6113066"/>
+            <a:ext cx="2590152" cy="203200"/>
+          </a:xfrm>
+          <a:prstGeom prst="rect">
+            <a:avLst/>
+          </a:prstGeom>
+          <a:noFill/>
+          <a:ln/>
+        </p:spPr>
+        <p:txBody>
+          <a:bodyPr wrap="square" lIns="0" tIns="0" rIns="0" bIns="0" rtlCol="0" anchor="t"/>
+          <a:lstStyle/>
+          <a:p>
+            <a:pPr algn="l" indent="0" marL="0">
+              <a:buNone/>
+            </a:pPr>
+            <a:r>
+              <a:rPr lang="en-US" sz="1333" dirty="0">
+                <a:solidFill>
+                  <a:srgbClr val="B4B4B4"/>
+                </a:solidFill>
+                <a:latin typeface="Pretendard" pitchFamily="34" charset="0"/>
+                <a:ea typeface="Pretendard" pitchFamily="34" charset="-122"/>
+                <a:cs typeface="Pretendard" pitchFamily="34" charset="-120"/>
+              </a:rPr>
+              <a:t>LEAN SOFTWARE DEVELOPMENT</a:t>
+            </a:r>
+            <a:endParaRPr lang="en-US" sz="1333" dirty="0"/>
           </a:p>
         </p:txBody>
       </p:sp>
@@ -2474,6 +2832,84 @@
         </p:nvSpPr>
         <p:spPr>
           <a:xfrm>
+            <a:off x="541599" y="440134"/>
+            <a:ext cx="1377233" cy="203200"/>
+          </a:xfrm>
+          <a:prstGeom prst="rect">
+            <a:avLst/>
+          </a:prstGeom>
+          <a:noFill/>
+          <a:ln/>
+        </p:spPr>
+        <p:txBody>
+          <a:bodyPr wrap="square" lIns="0" tIns="0" rIns="0" bIns="0" rtlCol="0" anchor="t"/>
+          <a:lstStyle/>
+          <a:p>
+            <a:pPr algn="l" indent="0" marL="0">
+              <a:buNone/>
+            </a:pPr>
+            <a:r>
+              <a:rPr lang="en-US" sz="1333" b="1" dirty="0">
+                <a:solidFill>
+                  <a:srgbClr val="7B7B7B"/>
+                </a:solidFill>
+                <a:latin typeface="Pretendard" pitchFamily="34" charset="0"/>
+                <a:ea typeface="Pretendard" pitchFamily="34" charset="-122"/>
+                <a:cs typeface="Pretendard" pitchFamily="34" charset="-120"/>
+              </a:rPr>
+              <a:t>7가지 원칙 · 5 – 7</a:t>
+            </a:r>
+            <a:endParaRPr lang="en-US" sz="1333" dirty="0"/>
+          </a:p>
+        </p:txBody>
+      </p:sp>
+      <p:sp>
+        <p:nvSpPr>
+          <p:cNvPr id="3" name="Text 1"/>
+          <p:cNvSpPr/>
+          <p:nvPr/>
+        </p:nvSpPr>
+        <p:spPr>
+          <a:xfrm>
+            <a:off x="11003981" y="440134"/>
+            <a:ext cx="656239" cy="203200"/>
+          </a:xfrm>
+          <a:prstGeom prst="rect">
+            <a:avLst/>
+          </a:prstGeom>
+          <a:noFill/>
+          <a:ln/>
+        </p:spPr>
+        <p:txBody>
+          <a:bodyPr wrap="square" lIns="0" tIns="0" rIns="0" bIns="0" rtlCol="0" anchor="t"/>
+          <a:lstStyle/>
+          <a:p>
+            <a:pPr algn="l" indent="0" marL="0">
+              <a:buNone/>
+            </a:pPr>
+            <a:r>
+              <a:rPr lang="en-US" sz="1333" b="1" dirty="0">
+                <a:solidFill>
+                  <a:srgbClr val="B4B4B4"/>
+                </a:solidFill>
+                <a:latin typeface="Pretendard" pitchFamily="34" charset="0"/>
+                <a:ea typeface="Pretendard" pitchFamily="34" charset="-122"/>
+                <a:cs typeface="Pretendard" pitchFamily="34" charset="-120"/>
+              </a:rPr>
+              <a:t>03 / 05</a:t>
+            </a:r>
+            <a:endParaRPr lang="en-US" sz="1333" dirty="0"/>
+          </a:p>
+        </p:txBody>
+      </p:sp>
+      <p:sp>
+        <p:nvSpPr>
+          <p:cNvPr id="4" name="Text 2"/>
+          <p:cNvSpPr/>
+          <p:nvPr/>
+        </p:nvSpPr>
+        <p:spPr>
+          <a:xfrm>
             <a:off x="541599" y="778669"/>
             <a:ext cx="11105754" cy="8334"/>
           </a:xfrm>
@@ -2498,7 +2934,7 @@
       </p:sp>
       <p:sp>
         <p:nvSpPr>
-          <p:cNvPr id="3" name="Text 1"/>
+          <p:cNvPr id="5" name="Text 3"/>
           <p:cNvSpPr/>
           <p:nvPr/>
         </p:nvSpPr>
@@ -2543,13 +2979,13 @@
       </p:sp>
       <p:sp>
         <p:nvSpPr>
-          <p:cNvPr id="4" name="Shape 2"/>
-          <p:cNvSpPr/>
-          <p:nvPr/>
-        </p:nvSpPr>
-        <p:spPr>
-          <a:xfrm>
-            <a:off x="566993" y="2698353"/>
+          <p:cNvPr id="6" name="Shape 4"/>
+          <p:cNvSpPr/>
+          <p:nvPr/>
+        </p:nvSpPr>
+        <p:spPr>
+          <a:xfrm>
+            <a:off x="566993" y="2596753"/>
             <a:ext cx="0" cy="613569"/>
           </a:xfrm>
           <a:prstGeom prst="line">
@@ -2566,13 +3002,13 @@
       </p:sp>
       <p:sp>
         <p:nvSpPr>
-          <p:cNvPr id="5" name="Text 3"/>
-          <p:cNvSpPr/>
-          <p:nvPr/>
-        </p:nvSpPr>
-        <p:spPr>
-          <a:xfrm>
-            <a:off x="778474" y="2698353"/>
+          <p:cNvPr id="7" name="Text 5"/>
+          <p:cNvSpPr/>
+          <p:nvPr/>
+        </p:nvSpPr>
+        <p:spPr>
+          <a:xfrm>
+            <a:off x="778474" y="2596753"/>
             <a:ext cx="448825" cy="342900"/>
           </a:xfrm>
           <a:prstGeom prst="rect">
@@ -2608,13 +3044,13 @@
       </p:sp>
       <p:sp>
         <p:nvSpPr>
-          <p:cNvPr id="6" name="Text 4"/>
-          <p:cNvSpPr/>
-          <p:nvPr/>
-        </p:nvSpPr>
-        <p:spPr>
-          <a:xfrm>
-            <a:off x="1455374" y="2698353"/>
+          <p:cNvPr id="8" name="Text 6"/>
+          <p:cNvSpPr/>
+          <p:nvPr/>
+        </p:nvSpPr>
+        <p:spPr>
+          <a:xfrm>
+            <a:off x="1455374" y="2596753"/>
             <a:ext cx="2969974" cy="342900"/>
           </a:xfrm>
           <a:prstGeom prst="rect">
@@ -2650,13 +3086,13 @@
       </p:sp>
       <p:sp>
         <p:nvSpPr>
-          <p:cNvPr id="7" name="Text 5"/>
-          <p:cNvSpPr/>
-          <p:nvPr/>
-        </p:nvSpPr>
-        <p:spPr>
-          <a:xfrm>
-            <a:off x="1455374" y="3074987"/>
+          <p:cNvPr id="9" name="Text 7"/>
+          <p:cNvSpPr/>
+          <p:nvPr/>
+        </p:nvSpPr>
+        <p:spPr>
+          <a:xfrm>
+            <a:off x="1455374" y="2973388"/>
             <a:ext cx="2969974" cy="236934"/>
           </a:xfrm>
           <a:prstGeom prst="rect">
@@ -2695,13 +3131,13 @@
       </p:sp>
       <p:sp>
         <p:nvSpPr>
-          <p:cNvPr id="8" name="Text 6"/>
-          <p:cNvSpPr/>
-          <p:nvPr/>
-        </p:nvSpPr>
-        <p:spPr>
-          <a:xfrm>
-            <a:off x="4603988" y="2698353"/>
+          <p:cNvPr id="10" name="Text 8"/>
+          <p:cNvSpPr/>
+          <p:nvPr/>
+        </p:nvSpPr>
+        <p:spPr>
+          <a:xfrm>
+            <a:off x="4603988" y="2596753"/>
             <a:ext cx="7184233" cy="355600"/>
           </a:xfrm>
           <a:prstGeom prst="rect">
@@ -2737,13 +3173,13 @@
       </p:sp>
       <p:sp>
         <p:nvSpPr>
-          <p:cNvPr id="9" name="Shape 7"/>
-          <p:cNvSpPr/>
-          <p:nvPr/>
-        </p:nvSpPr>
-        <p:spPr>
-          <a:xfrm>
-            <a:off x="566993" y="3684389"/>
+          <p:cNvPr id="11" name="Shape 9"/>
+          <p:cNvSpPr/>
+          <p:nvPr/>
+        </p:nvSpPr>
+        <p:spPr>
+          <a:xfrm>
+            <a:off x="566993" y="3582789"/>
             <a:ext cx="0" cy="613569"/>
           </a:xfrm>
           <a:prstGeom prst="line">
@@ -2760,13 +3196,13 @@
       </p:sp>
       <p:sp>
         <p:nvSpPr>
-          <p:cNvPr id="10" name="Text 8"/>
-          <p:cNvSpPr/>
-          <p:nvPr/>
-        </p:nvSpPr>
-        <p:spPr>
-          <a:xfrm>
-            <a:off x="778474" y="3684389"/>
+          <p:cNvPr id="12" name="Text 10"/>
+          <p:cNvSpPr/>
+          <p:nvPr/>
+        </p:nvSpPr>
+        <p:spPr>
+          <a:xfrm>
+            <a:off x="778474" y="3582789"/>
             <a:ext cx="448825" cy="342900"/>
           </a:xfrm>
           <a:prstGeom prst="rect">
@@ -2802,13 +3238,13 @@
       </p:sp>
       <p:sp>
         <p:nvSpPr>
-          <p:cNvPr id="11" name="Text 9"/>
-          <p:cNvSpPr/>
-          <p:nvPr/>
-        </p:nvSpPr>
-        <p:spPr>
-          <a:xfrm>
-            <a:off x="1455374" y="3684389"/>
+          <p:cNvPr id="13" name="Text 11"/>
+          <p:cNvSpPr/>
+          <p:nvPr/>
+        </p:nvSpPr>
+        <p:spPr>
+          <a:xfrm>
+            <a:off x="1455374" y="3582789"/>
             <a:ext cx="2969974" cy="342900"/>
           </a:xfrm>
           <a:prstGeom prst="rect">
@@ -2844,13 +3280,13 @@
       </p:sp>
       <p:sp>
         <p:nvSpPr>
-          <p:cNvPr id="12" name="Text 10"/>
-          <p:cNvSpPr/>
-          <p:nvPr/>
-        </p:nvSpPr>
-        <p:spPr>
-          <a:xfrm>
-            <a:off x="1455374" y="4061023"/>
+          <p:cNvPr id="14" name="Text 12"/>
+          <p:cNvSpPr/>
+          <p:nvPr/>
+        </p:nvSpPr>
+        <p:spPr>
+          <a:xfrm>
+            <a:off x="1455374" y="3959423"/>
             <a:ext cx="2969974" cy="236934"/>
           </a:xfrm>
           <a:prstGeom prst="rect">
@@ -2889,13 +3325,13 @@
       </p:sp>
       <p:sp>
         <p:nvSpPr>
-          <p:cNvPr id="13" name="Text 11"/>
-          <p:cNvSpPr/>
-          <p:nvPr/>
-        </p:nvSpPr>
-        <p:spPr>
-          <a:xfrm>
-            <a:off x="4603988" y="3684389"/>
+          <p:cNvPr id="15" name="Text 13"/>
+          <p:cNvSpPr/>
+          <p:nvPr/>
+        </p:nvSpPr>
+        <p:spPr>
+          <a:xfrm>
+            <a:off x="4603988" y="3582789"/>
             <a:ext cx="7184233" cy="355600"/>
           </a:xfrm>
           <a:prstGeom prst="rect">
@@ -2931,13 +3367,13 @@
       </p:sp>
       <p:sp>
         <p:nvSpPr>
-          <p:cNvPr id="14" name="Shape 12"/>
-          <p:cNvSpPr/>
-          <p:nvPr/>
-        </p:nvSpPr>
-        <p:spPr>
-          <a:xfrm>
-            <a:off x="566993" y="4670425"/>
+          <p:cNvPr id="16" name="Shape 14"/>
+          <p:cNvSpPr/>
+          <p:nvPr/>
+        </p:nvSpPr>
+        <p:spPr>
+          <a:xfrm>
+            <a:off x="566993" y="4568825"/>
             <a:ext cx="0" cy="613569"/>
           </a:xfrm>
           <a:prstGeom prst="line">
@@ -2954,13 +3390,13 @@
       </p:sp>
       <p:sp>
         <p:nvSpPr>
-          <p:cNvPr id="15" name="Text 13"/>
-          <p:cNvSpPr/>
-          <p:nvPr/>
-        </p:nvSpPr>
-        <p:spPr>
-          <a:xfrm>
-            <a:off x="778474" y="4670425"/>
+          <p:cNvPr id="17" name="Text 15"/>
+          <p:cNvSpPr/>
+          <p:nvPr/>
+        </p:nvSpPr>
+        <p:spPr>
+          <a:xfrm>
+            <a:off x="778474" y="4568825"/>
             <a:ext cx="448825" cy="342900"/>
           </a:xfrm>
           <a:prstGeom prst="rect">
@@ -2996,13 +3432,13 @@
       </p:sp>
       <p:sp>
         <p:nvSpPr>
-          <p:cNvPr id="16" name="Text 14"/>
-          <p:cNvSpPr/>
-          <p:nvPr/>
-        </p:nvSpPr>
-        <p:spPr>
-          <a:xfrm>
-            <a:off x="1455374" y="4670425"/>
+          <p:cNvPr id="18" name="Text 16"/>
+          <p:cNvSpPr/>
+          <p:nvPr/>
+        </p:nvSpPr>
+        <p:spPr>
+          <a:xfrm>
+            <a:off x="1455374" y="4568825"/>
             <a:ext cx="2969974" cy="342900"/>
           </a:xfrm>
           <a:prstGeom prst="rect">
@@ -3038,13 +3474,13 @@
       </p:sp>
       <p:sp>
         <p:nvSpPr>
-          <p:cNvPr id="17" name="Text 15"/>
-          <p:cNvSpPr/>
-          <p:nvPr/>
-        </p:nvSpPr>
-        <p:spPr>
-          <a:xfrm>
-            <a:off x="1455374" y="5047059"/>
+          <p:cNvPr id="19" name="Text 17"/>
+          <p:cNvSpPr/>
+          <p:nvPr/>
+        </p:nvSpPr>
+        <p:spPr>
+          <a:xfrm>
+            <a:off x="1455374" y="4945459"/>
             <a:ext cx="2969974" cy="236934"/>
           </a:xfrm>
           <a:prstGeom prst="rect">
@@ -3083,13 +3519,13 @@
       </p:sp>
       <p:sp>
         <p:nvSpPr>
-          <p:cNvPr id="18" name="Text 16"/>
-          <p:cNvSpPr/>
-          <p:nvPr/>
-        </p:nvSpPr>
-        <p:spPr>
-          <a:xfrm>
-            <a:off x="4603988" y="4670425"/>
+          <p:cNvPr id="20" name="Text 18"/>
+          <p:cNvSpPr/>
+          <p:nvPr/>
+        </p:nvSpPr>
+        <p:spPr>
+          <a:xfrm>
+            <a:off x="4603988" y="4568825"/>
             <a:ext cx="7184233" cy="355600"/>
           </a:xfrm>
           <a:prstGeom prst="rect">
@@ -3120,6 +3556,107 @@
               <a:t>개별 단계가 아닌 전체 가치 흐름의 처리량 극대화</a:t>
             </a:r>
             <a:endParaRPr lang="en-US" sz="1866" dirty="0"/>
+          </a:p>
+        </p:txBody>
+      </p:sp>
+      <p:sp>
+        <p:nvSpPr>
+          <p:cNvPr id="21" name="Shape 19"/>
+          <p:cNvSpPr/>
+          <p:nvPr/>
+        </p:nvSpPr>
+        <p:spPr>
+          <a:xfrm>
+            <a:off x="541599" y="5954316"/>
+            <a:ext cx="11105754" cy="0"/>
+          </a:xfrm>
+          <a:prstGeom prst="line">
+            <a:avLst/>
+          </a:prstGeom>
+          <a:noFill/>
+          <a:ln w="12698">
+            <a:solidFill>
+              <a:srgbClr val="E8E8E8"/>
+            </a:solidFill>
+            <a:prstDash val="solid"/>
+          </a:ln>
+        </p:spPr>
+      </p:sp>
+      <p:sp>
+        <p:nvSpPr>
+          <p:cNvPr id="22" name="Text 20"/>
+          <p:cNvSpPr/>
+          <p:nvPr/>
+        </p:nvSpPr>
+        <p:spPr>
+          <a:xfrm>
+            <a:off x="541599" y="6113066"/>
+            <a:ext cx="5011945" cy="203200"/>
+          </a:xfrm>
+          <a:prstGeom prst="rect">
+            <a:avLst/>
+          </a:prstGeom>
+          <a:noFill/>
+          <a:ln/>
+        </p:spPr>
+        <p:txBody>
+          <a:bodyPr wrap="square" lIns="0" tIns="0" rIns="0" bIns="0" rtlCol="0" anchor="t"/>
+          <a:lstStyle/>
+          <a:p>
+            <a:pPr algn="l" indent="0" marL="0">
+              <a:buNone/>
+            </a:pPr>
+            <a:r>
+              <a:rPr lang="en-US" sz="1333" dirty="0">
+                <a:solidFill>
+                  <a:srgbClr val="B4B4B4"/>
+                </a:solidFill>
+                <a:latin typeface="Pretendard" pitchFamily="34" charset="0"/>
+                <a:ea typeface="Pretendard" pitchFamily="34" charset="-122"/>
+                <a:cs typeface="Pretendard" pitchFamily="34" charset="-120"/>
+              </a:rPr>
+              <a:t>출처 — 발표자 제공 개요 · fw-thinking.metacog.co.kr. 수치·차트 없음</a:t>
+            </a:r>
+            <a:endParaRPr lang="en-US" sz="1333" dirty="0"/>
+          </a:p>
+        </p:txBody>
+      </p:sp>
+      <p:sp>
+        <p:nvSpPr>
+          <p:cNvPr id="23" name="Text 21"/>
+          <p:cNvSpPr/>
+          <p:nvPr/>
+        </p:nvSpPr>
+        <p:spPr>
+          <a:xfrm>
+            <a:off x="9107988" y="6113066"/>
+            <a:ext cx="2590152" cy="203200"/>
+          </a:xfrm>
+          <a:prstGeom prst="rect">
+            <a:avLst/>
+          </a:prstGeom>
+          <a:noFill/>
+          <a:ln/>
+        </p:spPr>
+        <p:txBody>
+          <a:bodyPr wrap="square" lIns="0" tIns="0" rIns="0" bIns="0" rtlCol="0" anchor="t"/>
+          <a:lstStyle/>
+          <a:p>
+            <a:pPr algn="l" indent="0" marL="0">
+              <a:buNone/>
+            </a:pPr>
+            <a:r>
+              <a:rPr lang="en-US" sz="1333" dirty="0">
+                <a:solidFill>
+                  <a:srgbClr val="B4B4B4"/>
+                </a:solidFill>
+                <a:latin typeface="Pretendard" pitchFamily="34" charset="0"/>
+                <a:ea typeface="Pretendard" pitchFamily="34" charset="-122"/>
+                <a:cs typeface="Pretendard" pitchFamily="34" charset="-120"/>
+              </a:rPr>
+              <a:t>LEAN SOFTWARE DEVELOPMENT</a:t>
+            </a:r>
+            <a:endParaRPr lang="en-US" sz="1333" dirty="0"/>
           </a:p>
         </p:txBody>
       </p:sp>
@@ -3163,6 +3700,84 @@
         </p:nvSpPr>
         <p:spPr>
           <a:xfrm>
+            <a:off x="541599" y="440134"/>
+            <a:ext cx="1510990" cy="203200"/>
+          </a:xfrm>
+          <a:prstGeom prst="rect">
+            <a:avLst/>
+          </a:prstGeom>
+          <a:noFill/>
+          <a:ln/>
+        </p:spPr>
+        <p:txBody>
+          <a:bodyPr wrap="square" lIns="0" tIns="0" rIns="0" bIns="0" rtlCol="0" anchor="t"/>
+          <a:lstStyle/>
+          <a:p>
+            <a:pPr algn="l" indent="0" marL="0">
+              <a:buNone/>
+            </a:pPr>
+            <a:r>
+              <a:rPr lang="en-US" sz="1333" b="1" dirty="0">
+                <a:solidFill>
+                  <a:srgbClr val="7B7B7B"/>
+                </a:solidFill>
+                <a:latin typeface="Pretendard" pitchFamily="34" charset="0"/>
+                <a:ea typeface="Pretendard" pitchFamily="34" charset="-122"/>
+                <a:cs typeface="Pretendard" pitchFamily="34" charset="-120"/>
+              </a:rPr>
+              <a:t>7가지 낭비 · MUDA</a:t>
+            </a:r>
+            <a:endParaRPr lang="en-US" sz="1333" dirty="0"/>
+          </a:p>
+        </p:txBody>
+      </p:sp>
+      <p:sp>
+        <p:nvSpPr>
+          <p:cNvPr id="3" name="Text 1"/>
+          <p:cNvSpPr/>
+          <p:nvPr/>
+        </p:nvSpPr>
+        <p:spPr>
+          <a:xfrm>
+            <a:off x="11003981" y="440134"/>
+            <a:ext cx="656239" cy="203200"/>
+          </a:xfrm>
+          <a:prstGeom prst="rect">
+            <a:avLst/>
+          </a:prstGeom>
+          <a:noFill/>
+          <a:ln/>
+        </p:spPr>
+        <p:txBody>
+          <a:bodyPr wrap="square" lIns="0" tIns="0" rIns="0" bIns="0" rtlCol="0" anchor="t"/>
+          <a:lstStyle/>
+          <a:p>
+            <a:pPr algn="l" indent="0" marL="0">
+              <a:buNone/>
+            </a:pPr>
+            <a:r>
+              <a:rPr lang="en-US" sz="1333" b="1" dirty="0">
+                <a:solidFill>
+                  <a:srgbClr val="B4B4B4"/>
+                </a:solidFill>
+                <a:latin typeface="Pretendard" pitchFamily="34" charset="0"/>
+                <a:ea typeface="Pretendard" pitchFamily="34" charset="-122"/>
+                <a:cs typeface="Pretendard" pitchFamily="34" charset="-120"/>
+              </a:rPr>
+              <a:t>04 / 05</a:t>
+            </a:r>
+            <a:endParaRPr lang="en-US" sz="1333" dirty="0"/>
+          </a:p>
+        </p:txBody>
+      </p:sp>
+      <p:sp>
+        <p:nvSpPr>
+          <p:cNvPr id="4" name="Text 2"/>
+          <p:cNvSpPr/>
+          <p:nvPr/>
+        </p:nvSpPr>
+        <p:spPr>
+          <a:xfrm>
             <a:off x="541599" y="778669"/>
             <a:ext cx="11105754" cy="8334"/>
           </a:xfrm>
@@ -3187,7 +3802,7 @@
       </p:sp>
       <p:sp>
         <p:nvSpPr>
-          <p:cNvPr id="3" name="Text 1"/>
+          <p:cNvPr id="5" name="Text 3"/>
           <p:cNvSpPr/>
           <p:nvPr/>
         </p:nvSpPr>
@@ -3232,7 +3847,7 @@
       </p:sp>
       <p:sp>
         <p:nvSpPr>
-          <p:cNvPr id="4" name="Text 2"/>
+          <p:cNvPr id="6" name="Text 4"/>
           <p:cNvSpPr/>
           <p:nvPr/>
         </p:nvSpPr>
@@ -3264,7 +3879,7 @@
       </p:sp>
       <p:sp>
         <p:nvSpPr>
-          <p:cNvPr id="5" name="Shape 3"/>
+          <p:cNvPr id="7" name="Shape 5"/>
           <p:cNvSpPr/>
           <p:nvPr/>
         </p:nvSpPr>
@@ -3287,7 +3902,7 @@
       </p:sp>
       <p:sp>
         <p:nvSpPr>
-          <p:cNvPr id="6" name="Text 4"/>
+          <p:cNvPr id="8" name="Text 6"/>
           <p:cNvSpPr/>
           <p:nvPr/>
         </p:nvSpPr>
@@ -3329,7 +3944,7 @@
       </p:sp>
       <p:sp>
         <p:nvSpPr>
-          <p:cNvPr id="7" name="Text 5"/>
+          <p:cNvPr id="9" name="Text 7"/>
           <p:cNvSpPr/>
           <p:nvPr/>
         </p:nvSpPr>
@@ -3371,7 +3986,7 @@
       </p:sp>
       <p:sp>
         <p:nvSpPr>
-          <p:cNvPr id="8" name="Text 6"/>
+          <p:cNvPr id="10" name="Text 8"/>
           <p:cNvSpPr/>
           <p:nvPr/>
         </p:nvSpPr>
@@ -3403,7 +4018,7 @@
       </p:sp>
       <p:sp>
         <p:nvSpPr>
-          <p:cNvPr id="9" name="Shape 7"/>
+          <p:cNvPr id="11" name="Shape 9"/>
           <p:cNvSpPr/>
           <p:nvPr/>
         </p:nvSpPr>
@@ -3426,7 +4041,7 @@
       </p:sp>
       <p:sp>
         <p:nvSpPr>
-          <p:cNvPr id="10" name="Text 8"/>
+          <p:cNvPr id="12" name="Text 10"/>
           <p:cNvSpPr/>
           <p:nvPr/>
         </p:nvSpPr>
@@ -3468,7 +4083,7 @@
       </p:sp>
       <p:sp>
         <p:nvSpPr>
-          <p:cNvPr id="11" name="Text 9"/>
+          <p:cNvPr id="13" name="Text 11"/>
           <p:cNvSpPr/>
           <p:nvPr/>
         </p:nvSpPr>
@@ -3510,7 +4125,7 @@
       </p:sp>
       <p:sp>
         <p:nvSpPr>
-          <p:cNvPr id="12" name="Text 10"/>
+          <p:cNvPr id="14" name="Text 12"/>
           <p:cNvSpPr/>
           <p:nvPr/>
         </p:nvSpPr>
@@ -3542,7 +4157,7 @@
       </p:sp>
       <p:sp>
         <p:nvSpPr>
-          <p:cNvPr id="13" name="Shape 11"/>
+          <p:cNvPr id="15" name="Shape 13"/>
           <p:cNvSpPr/>
           <p:nvPr/>
         </p:nvSpPr>
@@ -3565,7 +4180,7 @@
       </p:sp>
       <p:sp>
         <p:nvSpPr>
-          <p:cNvPr id="14" name="Text 12"/>
+          <p:cNvPr id="16" name="Text 14"/>
           <p:cNvSpPr/>
           <p:nvPr/>
         </p:nvSpPr>
@@ -3607,7 +4222,7 @@
       </p:sp>
       <p:sp>
         <p:nvSpPr>
-          <p:cNvPr id="15" name="Text 13"/>
+          <p:cNvPr id="17" name="Text 15"/>
           <p:cNvSpPr/>
           <p:nvPr/>
         </p:nvSpPr>
@@ -3649,7 +4264,7 @@
       </p:sp>
       <p:sp>
         <p:nvSpPr>
-          <p:cNvPr id="16" name="Text 14"/>
+          <p:cNvPr id="18" name="Text 16"/>
           <p:cNvSpPr/>
           <p:nvPr/>
         </p:nvSpPr>
@@ -3681,7 +4296,7 @@
       </p:sp>
       <p:sp>
         <p:nvSpPr>
-          <p:cNvPr id="17" name="Shape 15"/>
+          <p:cNvPr id="19" name="Shape 17"/>
           <p:cNvSpPr/>
           <p:nvPr/>
         </p:nvSpPr>
@@ -3704,7 +4319,7 @@
       </p:sp>
       <p:sp>
         <p:nvSpPr>
-          <p:cNvPr id="18" name="Text 16"/>
+          <p:cNvPr id="20" name="Text 18"/>
           <p:cNvSpPr/>
           <p:nvPr/>
         </p:nvSpPr>
@@ -3746,7 +4361,7 @@
       </p:sp>
       <p:sp>
         <p:nvSpPr>
-          <p:cNvPr id="19" name="Text 17"/>
+          <p:cNvPr id="21" name="Text 19"/>
           <p:cNvSpPr/>
           <p:nvPr/>
         </p:nvSpPr>
@@ -3788,7 +4403,7 @@
       </p:sp>
       <p:sp>
         <p:nvSpPr>
-          <p:cNvPr id="20" name="Text 18"/>
+          <p:cNvPr id="22" name="Text 20"/>
           <p:cNvSpPr/>
           <p:nvPr/>
         </p:nvSpPr>
@@ -3820,7 +4435,7 @@
       </p:sp>
       <p:sp>
         <p:nvSpPr>
-          <p:cNvPr id="21" name="Shape 19"/>
+          <p:cNvPr id="23" name="Shape 21"/>
           <p:cNvSpPr/>
           <p:nvPr/>
         </p:nvSpPr>
@@ -3843,7 +4458,7 @@
       </p:sp>
       <p:sp>
         <p:nvSpPr>
-          <p:cNvPr id="22" name="Text 20"/>
+          <p:cNvPr id="24" name="Text 22"/>
           <p:cNvSpPr/>
           <p:nvPr/>
         </p:nvSpPr>
@@ -3885,7 +4500,7 @@
       </p:sp>
       <p:sp>
         <p:nvSpPr>
-          <p:cNvPr id="23" name="Text 21"/>
+          <p:cNvPr id="25" name="Text 23"/>
           <p:cNvSpPr/>
           <p:nvPr/>
         </p:nvSpPr>
@@ -3927,7 +4542,7 @@
       </p:sp>
       <p:sp>
         <p:nvSpPr>
-          <p:cNvPr id="24" name="Text 22"/>
+          <p:cNvPr id="26" name="Text 24"/>
           <p:cNvSpPr/>
           <p:nvPr/>
         </p:nvSpPr>
@@ -3959,7 +4574,7 @@
       </p:sp>
       <p:sp>
         <p:nvSpPr>
-          <p:cNvPr id="25" name="Shape 23"/>
+          <p:cNvPr id="27" name="Shape 25"/>
           <p:cNvSpPr/>
           <p:nvPr/>
         </p:nvSpPr>
@@ -3982,7 +4597,7 @@
       </p:sp>
       <p:sp>
         <p:nvSpPr>
-          <p:cNvPr id="26" name="Text 24"/>
+          <p:cNvPr id="28" name="Text 26"/>
           <p:cNvSpPr/>
           <p:nvPr/>
         </p:nvSpPr>
@@ -4024,7 +4639,7 @@
       </p:sp>
       <p:sp>
         <p:nvSpPr>
-          <p:cNvPr id="27" name="Text 25"/>
+          <p:cNvPr id="29" name="Text 27"/>
           <p:cNvSpPr/>
           <p:nvPr/>
         </p:nvSpPr>
@@ -4066,7 +4681,7 @@
       </p:sp>
       <p:sp>
         <p:nvSpPr>
-          <p:cNvPr id="28" name="Text 26"/>
+          <p:cNvPr id="30" name="Text 28"/>
           <p:cNvSpPr/>
           <p:nvPr/>
         </p:nvSpPr>
@@ -4098,7 +4713,7 @@
       </p:sp>
       <p:sp>
         <p:nvSpPr>
-          <p:cNvPr id="29" name="Shape 27"/>
+          <p:cNvPr id="31" name="Shape 29"/>
           <p:cNvSpPr/>
           <p:nvPr/>
         </p:nvSpPr>
@@ -4121,7 +4736,7 @@
       </p:sp>
       <p:sp>
         <p:nvSpPr>
-          <p:cNvPr id="30" name="Text 28"/>
+          <p:cNvPr id="32" name="Text 30"/>
           <p:cNvSpPr/>
           <p:nvPr/>
         </p:nvSpPr>
@@ -4163,7 +4778,7 @@
       </p:sp>
       <p:sp>
         <p:nvSpPr>
-          <p:cNvPr id="31" name="Text 29"/>
+          <p:cNvPr id="33" name="Text 31"/>
           <p:cNvSpPr/>
           <p:nvPr/>
         </p:nvSpPr>
@@ -4200,6 +4815,107 @@
               <a:t>버그 수정 및 재작업 비용</a:t>
             </a:r>
             <a:endParaRPr lang="en-US" sz="1866" dirty="0"/>
+          </a:p>
+        </p:txBody>
+      </p:sp>
+      <p:sp>
+        <p:nvSpPr>
+          <p:cNvPr id="34" name="Shape 32"/>
+          <p:cNvSpPr/>
+          <p:nvPr/>
+        </p:nvSpPr>
+        <p:spPr>
+          <a:xfrm>
+            <a:off x="541599" y="5954316"/>
+            <a:ext cx="11105754" cy="0"/>
+          </a:xfrm>
+          <a:prstGeom prst="line">
+            <a:avLst/>
+          </a:prstGeom>
+          <a:noFill/>
+          <a:ln w="12698">
+            <a:solidFill>
+              <a:srgbClr val="E8E8E8"/>
+            </a:solidFill>
+            <a:prstDash val="solid"/>
+          </a:ln>
+        </p:spPr>
+      </p:sp>
+      <p:sp>
+        <p:nvSpPr>
+          <p:cNvPr id="35" name="Text 33"/>
+          <p:cNvSpPr/>
+          <p:nvPr/>
+        </p:nvSpPr>
+        <p:spPr>
+          <a:xfrm>
+            <a:off x="541599" y="6113066"/>
+            <a:ext cx="5011945" cy="203200"/>
+          </a:xfrm>
+          <a:prstGeom prst="rect">
+            <a:avLst/>
+          </a:prstGeom>
+          <a:noFill/>
+          <a:ln/>
+        </p:spPr>
+        <p:txBody>
+          <a:bodyPr wrap="square" lIns="0" tIns="0" rIns="0" bIns="0" rtlCol="0" anchor="t"/>
+          <a:lstStyle/>
+          <a:p>
+            <a:pPr algn="l" indent="0" marL="0">
+              <a:buNone/>
+            </a:pPr>
+            <a:r>
+              <a:rPr lang="en-US" sz="1333" dirty="0">
+                <a:solidFill>
+                  <a:srgbClr val="B4B4B4"/>
+                </a:solidFill>
+                <a:latin typeface="Pretendard" pitchFamily="34" charset="0"/>
+                <a:ea typeface="Pretendard" pitchFamily="34" charset="-122"/>
+                <a:cs typeface="Pretendard" pitchFamily="34" charset="-120"/>
+              </a:rPr>
+              <a:t>출처 — 발표자 제공 개요 · fw-thinking.metacog.co.kr. 수치·차트 없음</a:t>
+            </a:r>
+            <a:endParaRPr lang="en-US" sz="1333" dirty="0"/>
+          </a:p>
+        </p:txBody>
+      </p:sp>
+      <p:sp>
+        <p:nvSpPr>
+          <p:cNvPr id="36" name="Text 34"/>
+          <p:cNvSpPr/>
+          <p:nvPr/>
+        </p:nvSpPr>
+        <p:spPr>
+          <a:xfrm>
+            <a:off x="9107988" y="6113066"/>
+            <a:ext cx="2590152" cy="203200"/>
+          </a:xfrm>
+          <a:prstGeom prst="rect">
+            <a:avLst/>
+          </a:prstGeom>
+          <a:noFill/>
+          <a:ln/>
+        </p:spPr>
+        <p:txBody>
+          <a:bodyPr wrap="square" lIns="0" tIns="0" rIns="0" bIns="0" rtlCol="0" anchor="t"/>
+          <a:lstStyle/>
+          <a:p>
+            <a:pPr algn="l" indent="0" marL="0">
+              <a:buNone/>
+            </a:pPr>
+            <a:r>
+              <a:rPr lang="en-US" sz="1333" dirty="0">
+                <a:solidFill>
+                  <a:srgbClr val="B4B4B4"/>
+                </a:solidFill>
+                <a:latin typeface="Pretendard" pitchFamily="34" charset="0"/>
+                <a:ea typeface="Pretendard" pitchFamily="34" charset="-122"/>
+                <a:cs typeface="Pretendard" pitchFamily="34" charset="-120"/>
+              </a:rPr>
+              <a:t>LEAN SOFTWARE DEVELOPMENT</a:t>
+            </a:r>
+            <a:endParaRPr lang="en-US" sz="1333" dirty="0"/>
           </a:p>
         </p:txBody>
       </p:sp>
@@ -4243,6 +4959,84 @@
         </p:nvSpPr>
         <p:spPr>
           <a:xfrm>
+            <a:off x="541599" y="440134"/>
+            <a:ext cx="1562793" cy="203200"/>
+          </a:xfrm>
+          <a:prstGeom prst="rect">
+            <a:avLst/>
+          </a:prstGeom>
+          <a:noFill/>
+          <a:ln/>
+        </p:spPr>
+        <p:txBody>
+          <a:bodyPr wrap="square" lIns="0" tIns="0" rIns="0" bIns="0" rtlCol="0" anchor="t"/>
+          <a:lstStyle/>
+          <a:p>
+            <a:pPr algn="l" indent="0" marL="0">
+              <a:buNone/>
+            </a:pPr>
+            <a:r>
+              <a:rPr lang="en-US" sz="1333" b="1" dirty="0">
+                <a:solidFill>
+                  <a:srgbClr val="7B7B7B"/>
+                </a:solidFill>
+                <a:latin typeface="Pretendard" pitchFamily="34" charset="0"/>
+                <a:ea typeface="Pretendard" pitchFamily="34" charset="-122"/>
+                <a:cs typeface="Pretendard" pitchFamily="34" charset="-120"/>
+              </a:rPr>
+              <a:t>기대 효과 · 실무 적용</a:t>
+            </a:r>
+            <a:endParaRPr lang="en-US" sz="1333" dirty="0"/>
+          </a:p>
+        </p:txBody>
+      </p:sp>
+      <p:sp>
+        <p:nvSpPr>
+          <p:cNvPr id="3" name="Text 1"/>
+          <p:cNvSpPr/>
+          <p:nvPr/>
+        </p:nvSpPr>
+        <p:spPr>
+          <a:xfrm>
+            <a:off x="11016678" y="440134"/>
+            <a:ext cx="643289" cy="203200"/>
+          </a:xfrm>
+          <a:prstGeom prst="rect">
+            <a:avLst/>
+          </a:prstGeom>
+          <a:noFill/>
+          <a:ln/>
+        </p:spPr>
+        <p:txBody>
+          <a:bodyPr wrap="square" lIns="0" tIns="0" rIns="0" bIns="0" rtlCol="0" anchor="t"/>
+          <a:lstStyle/>
+          <a:p>
+            <a:pPr algn="l" indent="0" marL="0">
+              <a:buNone/>
+            </a:pPr>
+            <a:r>
+              <a:rPr lang="en-US" sz="1333" b="1" dirty="0">
+                <a:solidFill>
+                  <a:srgbClr val="B4B4B4"/>
+                </a:solidFill>
+                <a:latin typeface="Pretendard" pitchFamily="34" charset="0"/>
+                <a:ea typeface="Pretendard" pitchFamily="34" charset="-122"/>
+                <a:cs typeface="Pretendard" pitchFamily="34" charset="-120"/>
+              </a:rPr>
+              <a:t>05 / 05</a:t>
+            </a:r>
+            <a:endParaRPr lang="en-US" sz="1333" dirty="0"/>
+          </a:p>
+        </p:txBody>
+      </p:sp>
+      <p:sp>
+        <p:nvSpPr>
+          <p:cNvPr id="4" name="Text 2"/>
+          <p:cNvSpPr/>
+          <p:nvPr/>
+        </p:nvSpPr>
+        <p:spPr>
+          <a:xfrm>
             <a:off x="541599" y="778669"/>
             <a:ext cx="11105754" cy="8334"/>
           </a:xfrm>
@@ -4267,7 +5061,7 @@
       </p:sp>
       <p:sp>
         <p:nvSpPr>
-          <p:cNvPr id="3" name="Text 1"/>
+          <p:cNvPr id="5" name="Text 3"/>
           <p:cNvSpPr/>
           <p:nvPr/>
         </p:nvSpPr>
@@ -4312,13 +5106,13 @@
       </p:sp>
       <p:sp>
         <p:nvSpPr>
-          <p:cNvPr id="4" name="Shape 2"/>
-          <p:cNvSpPr/>
-          <p:nvPr/>
-        </p:nvSpPr>
-        <p:spPr>
-          <a:xfrm>
-            <a:off x="566993" y="2589014"/>
+          <p:cNvPr id="6" name="Shape 4"/>
+          <p:cNvSpPr/>
+          <p:nvPr/>
+        </p:nvSpPr>
+        <p:spPr>
+          <a:xfrm>
+            <a:off x="566993" y="2487414"/>
             <a:ext cx="0" cy="355600"/>
           </a:xfrm>
           <a:prstGeom prst="line">
@@ -4335,13 +5129,13 @@
       </p:sp>
       <p:sp>
         <p:nvSpPr>
-          <p:cNvPr id="5" name="Text 3"/>
-          <p:cNvSpPr/>
-          <p:nvPr/>
-        </p:nvSpPr>
-        <p:spPr>
-          <a:xfrm>
-            <a:off x="778474" y="2589014"/>
+          <p:cNvPr id="7" name="Text 5"/>
+          <p:cNvSpPr/>
+          <p:nvPr/>
+        </p:nvSpPr>
+        <p:spPr>
+          <a:xfrm>
+            <a:off x="778474" y="2487414"/>
             <a:ext cx="2900971" cy="342900"/>
           </a:xfrm>
           <a:prstGeom prst="rect">
@@ -4377,13 +5171,13 @@
       </p:sp>
       <p:sp>
         <p:nvSpPr>
-          <p:cNvPr id="6" name="Text 4"/>
-          <p:cNvSpPr/>
-          <p:nvPr/>
-        </p:nvSpPr>
-        <p:spPr>
-          <a:xfrm>
-            <a:off x="3859438" y="2589014"/>
+          <p:cNvPr id="8" name="Text 6"/>
+          <p:cNvSpPr/>
+          <p:nvPr/>
+        </p:nvSpPr>
+        <p:spPr>
+          <a:xfrm>
+            <a:off x="3859438" y="2487414"/>
             <a:ext cx="7943673" cy="355600"/>
           </a:xfrm>
           <a:prstGeom prst="rect">
@@ -4419,13 +5213,13 @@
       </p:sp>
       <p:sp>
         <p:nvSpPr>
-          <p:cNvPr id="7" name="Shape 5"/>
-          <p:cNvSpPr/>
-          <p:nvPr/>
-        </p:nvSpPr>
-        <p:spPr>
-          <a:xfrm>
-            <a:off x="566993" y="3147814"/>
+          <p:cNvPr id="9" name="Shape 7"/>
+          <p:cNvSpPr/>
+          <p:nvPr/>
+        </p:nvSpPr>
+        <p:spPr>
+          <a:xfrm>
+            <a:off x="566993" y="3046214"/>
             <a:ext cx="0" cy="355600"/>
           </a:xfrm>
           <a:prstGeom prst="line">
@@ -4442,13 +5236,13 @@
       </p:sp>
       <p:sp>
         <p:nvSpPr>
-          <p:cNvPr id="8" name="Text 6"/>
-          <p:cNvSpPr/>
-          <p:nvPr/>
-        </p:nvSpPr>
-        <p:spPr>
-          <a:xfrm>
-            <a:off x="778474" y="3147814"/>
+          <p:cNvPr id="10" name="Text 8"/>
+          <p:cNvSpPr/>
+          <p:nvPr/>
+        </p:nvSpPr>
+        <p:spPr>
+          <a:xfrm>
+            <a:off x="778474" y="3046214"/>
             <a:ext cx="2900971" cy="342900"/>
           </a:xfrm>
           <a:prstGeom prst="rect">
@@ -4484,13 +5278,13 @@
       </p:sp>
       <p:sp>
         <p:nvSpPr>
-          <p:cNvPr id="9" name="Text 7"/>
-          <p:cNvSpPr/>
-          <p:nvPr/>
-        </p:nvSpPr>
-        <p:spPr>
-          <a:xfrm>
-            <a:off x="3859438" y="3147814"/>
+          <p:cNvPr id="11" name="Text 9"/>
+          <p:cNvSpPr/>
+          <p:nvPr/>
+        </p:nvSpPr>
+        <p:spPr>
+          <a:xfrm>
+            <a:off x="3859438" y="3046214"/>
             <a:ext cx="7943673" cy="355600"/>
           </a:xfrm>
           <a:prstGeom prst="rect">
@@ -4526,13 +5320,13 @@
       </p:sp>
       <p:sp>
         <p:nvSpPr>
-          <p:cNvPr id="10" name="Shape 8"/>
-          <p:cNvSpPr/>
-          <p:nvPr/>
-        </p:nvSpPr>
-        <p:spPr>
-          <a:xfrm>
-            <a:off x="566993" y="3706614"/>
+          <p:cNvPr id="12" name="Shape 10"/>
+          <p:cNvSpPr/>
+          <p:nvPr/>
+        </p:nvSpPr>
+        <p:spPr>
+          <a:xfrm>
+            <a:off x="566993" y="3605014"/>
             <a:ext cx="0" cy="355600"/>
           </a:xfrm>
           <a:prstGeom prst="line">
@@ -4549,13 +5343,13 @@
       </p:sp>
       <p:sp>
         <p:nvSpPr>
-          <p:cNvPr id="11" name="Text 9"/>
-          <p:cNvSpPr/>
-          <p:nvPr/>
-        </p:nvSpPr>
-        <p:spPr>
-          <a:xfrm>
-            <a:off x="778474" y="3706614"/>
+          <p:cNvPr id="13" name="Text 11"/>
+          <p:cNvSpPr/>
+          <p:nvPr/>
+        </p:nvSpPr>
+        <p:spPr>
+          <a:xfrm>
+            <a:off x="778474" y="3605014"/>
             <a:ext cx="2900971" cy="342900"/>
           </a:xfrm>
           <a:prstGeom prst="rect">
@@ -4591,13 +5385,13 @@
       </p:sp>
       <p:sp>
         <p:nvSpPr>
-          <p:cNvPr id="12" name="Text 10"/>
-          <p:cNvSpPr/>
-          <p:nvPr/>
-        </p:nvSpPr>
-        <p:spPr>
-          <a:xfrm>
-            <a:off x="3859438" y="3706614"/>
+          <p:cNvPr id="14" name="Text 12"/>
+          <p:cNvSpPr/>
+          <p:nvPr/>
+        </p:nvSpPr>
+        <p:spPr>
+          <a:xfrm>
+            <a:off x="3859438" y="3605014"/>
             <a:ext cx="7943673" cy="355600"/>
           </a:xfrm>
           <a:prstGeom prst="rect">
@@ -4633,13 +5427,13 @@
       </p:sp>
       <p:sp>
         <p:nvSpPr>
-          <p:cNvPr id="13" name="Shape 11"/>
-          <p:cNvSpPr/>
-          <p:nvPr/>
-        </p:nvSpPr>
-        <p:spPr>
-          <a:xfrm>
-            <a:off x="566993" y="4265414"/>
+          <p:cNvPr id="15" name="Shape 13"/>
+          <p:cNvSpPr/>
+          <p:nvPr/>
+        </p:nvSpPr>
+        <p:spPr>
+          <a:xfrm>
+            <a:off x="566993" y="4163814"/>
             <a:ext cx="0" cy="355600"/>
           </a:xfrm>
           <a:prstGeom prst="line">
@@ -4656,13 +5450,13 @@
       </p:sp>
       <p:sp>
         <p:nvSpPr>
-          <p:cNvPr id="14" name="Text 12"/>
-          <p:cNvSpPr/>
-          <p:nvPr/>
-        </p:nvSpPr>
-        <p:spPr>
-          <a:xfrm>
-            <a:off x="778474" y="4265414"/>
+          <p:cNvPr id="16" name="Text 14"/>
+          <p:cNvSpPr/>
+          <p:nvPr/>
+        </p:nvSpPr>
+        <p:spPr>
+          <a:xfrm>
+            <a:off x="778474" y="4163814"/>
             <a:ext cx="2900971" cy="342900"/>
           </a:xfrm>
           <a:prstGeom prst="rect">
@@ -4698,13 +5492,13 @@
       </p:sp>
       <p:sp>
         <p:nvSpPr>
-          <p:cNvPr id="15" name="Text 13"/>
-          <p:cNvSpPr/>
-          <p:nvPr/>
-        </p:nvSpPr>
-        <p:spPr>
-          <a:xfrm>
-            <a:off x="3859438" y="4265414"/>
+          <p:cNvPr id="17" name="Text 15"/>
+          <p:cNvSpPr/>
+          <p:nvPr/>
+        </p:nvSpPr>
+        <p:spPr>
+          <a:xfrm>
+            <a:off x="3859438" y="4163814"/>
             <a:ext cx="7943673" cy="355600"/>
           </a:xfrm>
           <a:prstGeom prst="rect">
@@ -4740,13 +5534,45 @@
       </p:sp>
       <p:sp>
         <p:nvSpPr>
-          <p:cNvPr id="16" name="Text 14"/>
-          <p:cNvSpPr/>
-          <p:nvPr/>
-        </p:nvSpPr>
-        <p:spPr>
-          <a:xfrm>
-            <a:off x="846323" y="5061148"/>
+          <p:cNvPr id="18" name="Text 16"/>
+          <p:cNvSpPr/>
+          <p:nvPr/>
+        </p:nvSpPr>
+        <p:spPr>
+          <a:xfrm>
+            <a:off x="541599" y="5049242"/>
+            <a:ext cx="152362" cy="152400"/>
+          </a:xfrm>
+          <a:prstGeom prst="roundRect">
+            <a:avLst>
+              <a:gd name="adj" fmla="val 8326035"/>
+            </a:avLst>
+          </a:prstGeom>
+          <a:solidFill>
+            <a:srgbClr val="03C75A"/>
+          </a:solidFill>
+          <a:ln/>
+        </p:spPr>
+        <p:txBody>
+          <a:bodyPr wrap="square" rtlCol="0" anchor="ctr"/>
+          <a:lstStyle/>
+          <a:p>
+            <a:pPr indent="0" marL="0">
+              <a:buNone/>
+            </a:pPr>
+            <a:endParaRPr lang="en-US" dirty="0"/>
+          </a:p>
+        </p:txBody>
+      </p:sp>
+      <p:sp>
+        <p:nvSpPr>
+          <p:cNvPr id="19" name="Text 17"/>
+          <p:cNvSpPr/>
+          <p:nvPr/>
+        </p:nvSpPr>
+        <p:spPr>
+          <a:xfrm>
+            <a:off x="846323" y="4959548"/>
             <a:ext cx="7731605" cy="331986"/>
           </a:xfrm>
           <a:prstGeom prst="rect">
@@ -4777,6 +5603,107 @@
               <a:t>낭비를 줄이는 것이 목적이 아니라, 전체 가치 흐름의 처리량을 올리는 것이 목적이다.</a:t>
             </a:r>
             <a:endParaRPr lang="en-US" sz="1866" dirty="0"/>
+          </a:p>
+        </p:txBody>
+      </p:sp>
+      <p:sp>
+        <p:nvSpPr>
+          <p:cNvPr id="20" name="Shape 18"/>
+          <p:cNvSpPr/>
+          <p:nvPr/>
+        </p:nvSpPr>
+        <p:spPr>
+          <a:xfrm>
+            <a:off x="541599" y="5954316"/>
+            <a:ext cx="11105754" cy="0"/>
+          </a:xfrm>
+          <a:prstGeom prst="line">
+            <a:avLst/>
+          </a:prstGeom>
+          <a:noFill/>
+          <a:ln w="12698">
+            <a:solidFill>
+              <a:srgbClr val="E8E8E8"/>
+            </a:solidFill>
+            <a:prstDash val="solid"/>
+          </a:ln>
+        </p:spPr>
+      </p:sp>
+      <p:sp>
+        <p:nvSpPr>
+          <p:cNvPr id="21" name="Text 19"/>
+          <p:cNvSpPr/>
+          <p:nvPr/>
+        </p:nvSpPr>
+        <p:spPr>
+          <a:xfrm>
+            <a:off x="541599" y="6113066"/>
+            <a:ext cx="5011945" cy="203200"/>
+          </a:xfrm>
+          <a:prstGeom prst="rect">
+            <a:avLst/>
+          </a:prstGeom>
+          <a:noFill/>
+          <a:ln/>
+        </p:spPr>
+        <p:txBody>
+          <a:bodyPr wrap="square" lIns="0" tIns="0" rIns="0" bIns="0" rtlCol="0" anchor="t"/>
+          <a:lstStyle/>
+          <a:p>
+            <a:pPr algn="l" indent="0" marL="0">
+              <a:buNone/>
+            </a:pPr>
+            <a:r>
+              <a:rPr lang="en-US" sz="1333" dirty="0">
+                <a:solidFill>
+                  <a:srgbClr val="B4B4B4"/>
+                </a:solidFill>
+                <a:latin typeface="Pretendard" pitchFamily="34" charset="0"/>
+                <a:ea typeface="Pretendard" pitchFamily="34" charset="-122"/>
+                <a:cs typeface="Pretendard" pitchFamily="34" charset="-120"/>
+              </a:rPr>
+              <a:t>출처 — 발표자 제공 개요 · fw-thinking.metacog.co.kr. 수치·차트 없음</a:t>
+            </a:r>
+            <a:endParaRPr lang="en-US" sz="1333" dirty="0"/>
+          </a:p>
+        </p:txBody>
+      </p:sp>
+      <p:sp>
+        <p:nvSpPr>
+          <p:cNvPr id="22" name="Text 20"/>
+          <p:cNvSpPr/>
+          <p:nvPr/>
+        </p:nvSpPr>
+        <p:spPr>
+          <a:xfrm>
+            <a:off x="9107988" y="6113066"/>
+            <a:ext cx="2590152" cy="203200"/>
+          </a:xfrm>
+          <a:prstGeom prst="rect">
+            <a:avLst/>
+          </a:prstGeom>
+          <a:noFill/>
+          <a:ln/>
+        </p:spPr>
+        <p:txBody>
+          <a:bodyPr wrap="square" lIns="0" tIns="0" rIns="0" bIns="0" rtlCol="0" anchor="t"/>
+          <a:lstStyle/>
+          <a:p>
+            <a:pPr algn="l" indent="0" marL="0">
+              <a:buNone/>
+            </a:pPr>
+            <a:r>
+              <a:rPr lang="en-US" sz="1333" dirty="0">
+                <a:solidFill>
+                  <a:srgbClr val="B4B4B4"/>
+                </a:solidFill>
+                <a:latin typeface="Pretendard" pitchFamily="34" charset="0"/>
+                <a:ea typeface="Pretendard" pitchFamily="34" charset="-122"/>
+                <a:cs typeface="Pretendard" pitchFamily="34" charset="-120"/>
+              </a:rPr>
+              <a:t>LEAN SOFTWARE DEVELOPMENT</a:t>
+            </a:r>
+            <a:endParaRPr lang="en-US" sz="1333" dirty="0"/>
           </a:p>
         </p:txBody>
       </p:sp>

--- a/decks/lean-software-development/lean-software-development.pptx
+++ b/decks/lean-software-development/lean-software-development.pptx
@@ -1249,7 +1249,7 @@
           <a:ln/>
         </p:spPr>
         <p:txBody>
-          <a:bodyPr wrap="square" lIns="0" tIns="0" rIns="0" bIns="0" rtlCol="0" anchor="t"/>
+          <a:bodyPr wrap="none" lIns="0" tIns="0" rIns="0" bIns="0" rtlCol="0" anchor="t"/>
           <a:lstStyle/>
           <a:p>
             <a:pPr algn="l" indent="0" marL="0">
@@ -1288,7 +1288,7 @@
           <a:ln/>
         </p:spPr>
         <p:txBody>
-          <a:bodyPr wrap="square" lIns="0" tIns="0" rIns="0" bIns="0" rtlCol="0" anchor="t"/>
+          <a:bodyPr wrap="none" lIns="0" tIns="0" rIns="0" bIns="0" rtlCol="0" anchor="t"/>
           <a:lstStyle/>
           <a:p>
             <a:pPr algn="l" indent="0" marL="0">
@@ -1357,7 +1357,7 @@
           <a:ln/>
         </p:spPr>
         <p:txBody>
-          <a:bodyPr wrap="square" lIns="0" tIns="0" rIns="0" bIns="0" rtlCol="0" anchor="t"/>
+          <a:bodyPr wrap="none" lIns="0" tIns="0" rIns="0" bIns="0" rtlCol="0" anchor="t"/>
           <a:lstStyle/>
           <a:p>
             <a:pPr algn="l" indent="0" marL="0">
@@ -1399,7 +1399,7 @@
           <a:ln/>
         </p:spPr>
         <p:txBody>
-          <a:bodyPr wrap="square" lIns="0" tIns="0" rIns="0" bIns="0" rtlCol="0" anchor="t"/>
+          <a:bodyPr wrap="none" lIns="0" tIns="0" rIns="0" bIns="0" rtlCol="0" anchor="t"/>
           <a:lstStyle/>
           <a:p>
             <a:pPr algn="l" indent="0" marL="0">
@@ -1476,7 +1476,7 @@
           <a:ln/>
         </p:spPr>
         <p:txBody>
-          <a:bodyPr wrap="square" lIns="0" tIns="0" rIns="0" bIns="0" rtlCol="0" anchor="t"/>
+          <a:bodyPr wrap="none" lIns="0" tIns="0" rIns="0" bIns="0" rtlCol="0" anchor="t"/>
           <a:lstStyle/>
           <a:p>
             <a:pPr algn="l" indent="0" marL="0">
@@ -1518,7 +1518,7 @@
           <a:ln/>
         </p:spPr>
         <p:txBody>
-          <a:bodyPr wrap="square" lIns="0" tIns="0" rIns="0" bIns="0" rtlCol="0" anchor="t"/>
+          <a:bodyPr wrap="none" lIns="0" tIns="0" rIns="0" bIns="0" rtlCol="0" anchor="t"/>
           <a:lstStyle/>
           <a:p>
             <a:pPr algn="l" indent="0" marL="0">
@@ -1560,7 +1560,7 @@
           <a:ln/>
         </p:spPr>
         <p:txBody>
-          <a:bodyPr wrap="square" lIns="0" tIns="0" rIns="0" bIns="0" rtlCol="0" anchor="t"/>
+          <a:bodyPr wrap="none" lIns="0" tIns="0" rIns="0" bIns="0" rtlCol="0" anchor="t"/>
           <a:lstStyle/>
           <a:p>
             <a:pPr algn="l" indent="0" marL="0">
@@ -1605,7 +1605,7 @@
           <a:ln/>
         </p:spPr>
         <p:txBody>
-          <a:bodyPr wrap="square" lIns="0" tIns="0" rIns="0" bIns="0" rtlCol="0" anchor="t"/>
+          <a:bodyPr wrap="none" lIns="0" tIns="0" rIns="0" bIns="0" rtlCol="0" anchor="t"/>
           <a:lstStyle/>
           <a:p>
             <a:pPr algn="l" indent="0" marL="0">
@@ -1651,6 +1651,10 @@
             <a:prstDash val="solid"/>
           </a:ln>
         </p:spPr>
+        <p:txBody>
+          <a:bodyPr/>
+          <a:p/>
+        </p:txBody>
       </p:sp>
       <p:sp>
         <p:nvSpPr>
@@ -1670,7 +1674,7 @@
           <a:ln/>
         </p:spPr>
         <p:txBody>
-          <a:bodyPr wrap="square" lIns="0" tIns="0" rIns="0" bIns="0" rtlCol="0" anchor="t"/>
+          <a:bodyPr wrap="none" lIns="0" tIns="0" rIns="0" bIns="0" rtlCol="0" anchor="t"/>
           <a:lstStyle/>
           <a:p>
             <a:pPr algn="l" indent="0" marL="0">
@@ -1709,7 +1713,7 @@
           <a:ln/>
         </p:spPr>
         <p:txBody>
-          <a:bodyPr wrap="square" lIns="0" tIns="0" rIns="0" bIns="0" rtlCol="0" anchor="t"/>
+          <a:bodyPr wrap="none" lIns="0" tIns="0" rIns="0" bIns="0" rtlCol="0" anchor="t"/>
           <a:lstStyle/>
           <a:p>
             <a:pPr algn="l" indent="0" marL="0">
@@ -1780,7 +1784,7 @@
           <a:ln/>
         </p:spPr>
         <p:txBody>
-          <a:bodyPr wrap="square" lIns="0" tIns="0" rIns="0" bIns="0" rtlCol="0" anchor="t"/>
+          <a:bodyPr wrap="none" lIns="0" tIns="0" rIns="0" bIns="0" rtlCol="0" anchor="t"/>
           <a:lstStyle/>
           <a:p>
             <a:pPr algn="l" indent="0" marL="0">
@@ -1819,7 +1823,7 @@
           <a:ln/>
         </p:spPr>
         <p:txBody>
-          <a:bodyPr wrap="square" lIns="0" tIns="0" rIns="0" bIns="0" rtlCol="0" anchor="t"/>
+          <a:bodyPr wrap="none" lIns="0" tIns="0" rIns="0" bIns="0" rtlCol="0" anchor="t"/>
           <a:lstStyle/>
           <a:p>
             <a:pPr algn="l" indent="0" marL="0">
@@ -1888,7 +1892,7 @@
           <a:ln/>
         </p:spPr>
         <p:txBody>
-          <a:bodyPr wrap="square" lIns="0" tIns="0" rIns="0" bIns="0" rtlCol="0" anchor="t"/>
+          <a:bodyPr wrap="none" lIns="0" tIns="0" rIns="0" bIns="0" rtlCol="0" anchor="t"/>
           <a:lstStyle/>
           <a:p>
             <a:pPr algn="l" indent="0" marL="0">
@@ -1937,6 +1941,10 @@
             <a:prstDash val="solid"/>
           </a:ln>
         </p:spPr>
+        <p:txBody>
+          <a:bodyPr/>
+          <a:p/>
+        </p:txBody>
       </p:sp>
       <p:sp>
         <p:nvSpPr>
@@ -1956,7 +1964,7 @@
           <a:ln/>
         </p:spPr>
         <p:txBody>
-          <a:bodyPr wrap="square" lIns="0" tIns="0" rIns="0" bIns="0" rtlCol="0" anchor="t"/>
+          <a:bodyPr wrap="none" lIns="0" tIns="0" rIns="0" bIns="0" rtlCol="0" anchor="t"/>
           <a:lstStyle/>
           <a:p>
             <a:pPr algn="l" indent="0" marL="0">
@@ -1998,7 +2006,7 @@
           <a:ln/>
         </p:spPr>
         <p:txBody>
-          <a:bodyPr wrap="square" lIns="0" tIns="0" rIns="0" bIns="0" rtlCol="0" anchor="t"/>
+          <a:bodyPr wrap="none" lIns="0" tIns="0" rIns="0" bIns="0" rtlCol="0" anchor="t"/>
           <a:lstStyle/>
           <a:p>
             <a:pPr algn="l" indent="0" marL="0">
@@ -2040,7 +2048,7 @@
           <a:ln/>
         </p:spPr>
         <p:txBody>
-          <a:bodyPr wrap="square" lIns="0" tIns="0" rIns="0" bIns="0" rtlCol="0" anchor="t"/>
+          <a:bodyPr wrap="none" lIns="0" tIns="0" rIns="0" bIns="0" rtlCol="0" anchor="t"/>
           <a:lstStyle/>
           <a:p>
             <a:pPr algn="l" indent="0" marL="0">
@@ -2085,7 +2093,7 @@
           <a:ln/>
         </p:spPr>
         <p:txBody>
-          <a:bodyPr wrap="square" lIns="0" tIns="0" rIns="0" bIns="0" rtlCol="0" anchor="t"/>
+          <a:bodyPr wrap="none" lIns="0" tIns="0" rIns="0" bIns="0" rtlCol="0" anchor="t"/>
           <a:lstStyle/>
           <a:p>
             <a:pPr algn="l" indent="0" marL="0">
@@ -2131,6 +2139,10 @@
             <a:prstDash val="solid"/>
           </a:ln>
         </p:spPr>
+        <p:txBody>
+          <a:bodyPr/>
+          <a:p/>
+        </p:txBody>
       </p:sp>
       <p:sp>
         <p:nvSpPr>
@@ -2150,7 +2162,7 @@
           <a:ln/>
         </p:spPr>
         <p:txBody>
-          <a:bodyPr wrap="square" lIns="0" tIns="0" rIns="0" bIns="0" rtlCol="0" anchor="t"/>
+          <a:bodyPr wrap="none" lIns="0" tIns="0" rIns="0" bIns="0" rtlCol="0" anchor="t"/>
           <a:lstStyle/>
           <a:p>
             <a:pPr algn="l" indent="0" marL="0">
@@ -2192,7 +2204,7 @@
           <a:ln/>
         </p:spPr>
         <p:txBody>
-          <a:bodyPr wrap="square" lIns="0" tIns="0" rIns="0" bIns="0" rtlCol="0" anchor="t"/>
+          <a:bodyPr wrap="none" lIns="0" tIns="0" rIns="0" bIns="0" rtlCol="0" anchor="t"/>
           <a:lstStyle/>
           <a:p>
             <a:pPr algn="l" indent="0" marL="0">
@@ -2234,7 +2246,7 @@
           <a:ln/>
         </p:spPr>
         <p:txBody>
-          <a:bodyPr wrap="square" lIns="0" tIns="0" rIns="0" bIns="0" rtlCol="0" anchor="t"/>
+          <a:bodyPr wrap="none" lIns="0" tIns="0" rIns="0" bIns="0" rtlCol="0" anchor="t"/>
           <a:lstStyle/>
           <a:p>
             <a:pPr algn="l" indent="0" marL="0">
@@ -2279,7 +2291,7 @@
           <a:ln/>
         </p:spPr>
         <p:txBody>
-          <a:bodyPr wrap="square" lIns="0" tIns="0" rIns="0" bIns="0" rtlCol="0" anchor="t"/>
+          <a:bodyPr wrap="none" lIns="0" tIns="0" rIns="0" bIns="0" rtlCol="0" anchor="t"/>
           <a:lstStyle/>
           <a:p>
             <a:pPr algn="l" indent="0" marL="0">
@@ -2325,6 +2337,10 @@
             <a:prstDash val="solid"/>
           </a:ln>
         </p:spPr>
+        <p:txBody>
+          <a:bodyPr/>
+          <a:p/>
+        </p:txBody>
       </p:sp>
       <p:sp>
         <p:nvSpPr>
@@ -2344,7 +2360,7 @@
           <a:ln/>
         </p:spPr>
         <p:txBody>
-          <a:bodyPr wrap="square" lIns="0" tIns="0" rIns="0" bIns="0" rtlCol="0" anchor="t"/>
+          <a:bodyPr wrap="none" lIns="0" tIns="0" rIns="0" bIns="0" rtlCol="0" anchor="t"/>
           <a:lstStyle/>
           <a:p>
             <a:pPr algn="l" indent="0" marL="0">
@@ -2386,7 +2402,7 @@
           <a:ln/>
         </p:spPr>
         <p:txBody>
-          <a:bodyPr wrap="square" lIns="0" tIns="0" rIns="0" bIns="0" rtlCol="0" anchor="t"/>
+          <a:bodyPr wrap="none" lIns="0" tIns="0" rIns="0" bIns="0" rtlCol="0" anchor="t"/>
           <a:lstStyle/>
           <a:p>
             <a:pPr algn="l" indent="0" marL="0">
@@ -2428,7 +2444,7 @@
           <a:ln/>
         </p:spPr>
         <p:txBody>
-          <a:bodyPr wrap="square" lIns="0" tIns="0" rIns="0" bIns="0" rtlCol="0" anchor="t"/>
+          <a:bodyPr wrap="none" lIns="0" tIns="0" rIns="0" bIns="0" rtlCol="0" anchor="t"/>
           <a:lstStyle/>
           <a:p>
             <a:pPr algn="l" indent="0" marL="0">
@@ -2473,7 +2489,7 @@
           <a:ln/>
         </p:spPr>
         <p:txBody>
-          <a:bodyPr wrap="square" lIns="0" tIns="0" rIns="0" bIns="0" rtlCol="0" anchor="t"/>
+          <a:bodyPr wrap="none" lIns="0" tIns="0" rIns="0" bIns="0" rtlCol="0" anchor="t"/>
           <a:lstStyle/>
           <a:p>
             <a:pPr algn="l" indent="0" marL="0">
@@ -2519,6 +2535,10 @@
             <a:prstDash val="solid"/>
           </a:ln>
         </p:spPr>
+        <p:txBody>
+          <a:bodyPr/>
+          <a:p/>
+        </p:txBody>
       </p:sp>
       <p:sp>
         <p:nvSpPr>
@@ -2538,7 +2558,7 @@
           <a:ln/>
         </p:spPr>
         <p:txBody>
-          <a:bodyPr wrap="square" lIns="0" tIns="0" rIns="0" bIns="0" rtlCol="0" anchor="t"/>
+          <a:bodyPr wrap="none" lIns="0" tIns="0" rIns="0" bIns="0" rtlCol="0" anchor="t"/>
           <a:lstStyle/>
           <a:p>
             <a:pPr algn="l" indent="0" marL="0">
@@ -2580,7 +2600,7 @@
           <a:ln/>
         </p:spPr>
         <p:txBody>
-          <a:bodyPr wrap="square" lIns="0" tIns="0" rIns="0" bIns="0" rtlCol="0" anchor="t"/>
+          <a:bodyPr wrap="none" lIns="0" tIns="0" rIns="0" bIns="0" rtlCol="0" anchor="t"/>
           <a:lstStyle/>
           <a:p>
             <a:pPr algn="l" indent="0" marL="0">
@@ -2622,7 +2642,7 @@
           <a:ln/>
         </p:spPr>
         <p:txBody>
-          <a:bodyPr wrap="square" lIns="0" tIns="0" rIns="0" bIns="0" rtlCol="0" anchor="t"/>
+          <a:bodyPr wrap="none" lIns="0" tIns="0" rIns="0" bIns="0" rtlCol="0" anchor="t"/>
           <a:lstStyle/>
           <a:p>
             <a:pPr algn="l" indent="0" marL="0">
@@ -2667,7 +2687,7 @@
           <a:ln/>
         </p:spPr>
         <p:txBody>
-          <a:bodyPr wrap="square" lIns="0" tIns="0" rIns="0" bIns="0" rtlCol="0" anchor="t"/>
+          <a:bodyPr wrap="none" lIns="0" tIns="0" rIns="0" bIns="0" rtlCol="0" anchor="t"/>
           <a:lstStyle/>
           <a:p>
             <a:pPr algn="l" indent="0" marL="0">
@@ -2713,6 +2733,10 @@
             <a:prstDash val="solid"/>
           </a:ln>
         </p:spPr>
+        <p:txBody>
+          <a:bodyPr/>
+          <a:p/>
+        </p:txBody>
       </p:sp>
       <p:sp>
         <p:nvSpPr>
@@ -2732,7 +2756,7 @@
           <a:ln/>
         </p:spPr>
         <p:txBody>
-          <a:bodyPr wrap="square" lIns="0" tIns="0" rIns="0" bIns="0" rtlCol="0" anchor="t"/>
+          <a:bodyPr wrap="none" lIns="0" tIns="0" rIns="0" bIns="0" rtlCol="0" anchor="t"/>
           <a:lstStyle/>
           <a:p>
             <a:pPr algn="l" indent="0" marL="0">
@@ -2771,7 +2795,7 @@
           <a:ln/>
         </p:spPr>
         <p:txBody>
-          <a:bodyPr wrap="square" lIns="0" tIns="0" rIns="0" bIns="0" rtlCol="0" anchor="t"/>
+          <a:bodyPr wrap="none" lIns="0" tIns="0" rIns="0" bIns="0" rtlCol="0" anchor="t"/>
           <a:lstStyle/>
           <a:p>
             <a:pPr algn="l" indent="0" marL="0">
@@ -2842,7 +2866,7 @@
           <a:ln/>
         </p:spPr>
         <p:txBody>
-          <a:bodyPr wrap="square" lIns="0" tIns="0" rIns="0" bIns="0" rtlCol="0" anchor="t"/>
+          <a:bodyPr wrap="none" lIns="0" tIns="0" rIns="0" bIns="0" rtlCol="0" anchor="t"/>
           <a:lstStyle/>
           <a:p>
             <a:pPr algn="l" indent="0" marL="0">
@@ -2881,7 +2905,7 @@
           <a:ln/>
         </p:spPr>
         <p:txBody>
-          <a:bodyPr wrap="square" lIns="0" tIns="0" rIns="0" bIns="0" rtlCol="0" anchor="t"/>
+          <a:bodyPr wrap="none" lIns="0" tIns="0" rIns="0" bIns="0" rtlCol="0" anchor="t"/>
           <a:lstStyle/>
           <a:p>
             <a:pPr algn="l" indent="0" marL="0">
@@ -2950,7 +2974,7 @@
           <a:ln/>
         </p:spPr>
         <p:txBody>
-          <a:bodyPr wrap="square" lIns="0" tIns="0" rIns="0" bIns="0" rtlCol="0" anchor="t"/>
+          <a:bodyPr wrap="none" lIns="0" tIns="0" rIns="0" bIns="0" rtlCol="0" anchor="t"/>
           <a:lstStyle/>
           <a:p>
             <a:pPr algn="l" indent="0" marL="0">
@@ -2999,6 +3023,10 @@
             <a:prstDash val="solid"/>
           </a:ln>
         </p:spPr>
+        <p:txBody>
+          <a:bodyPr/>
+          <a:p/>
+        </p:txBody>
       </p:sp>
       <p:sp>
         <p:nvSpPr>
@@ -3018,7 +3046,7 @@
           <a:ln/>
         </p:spPr>
         <p:txBody>
-          <a:bodyPr wrap="square" lIns="0" tIns="0" rIns="0" bIns="0" rtlCol="0" anchor="t"/>
+          <a:bodyPr wrap="none" lIns="0" tIns="0" rIns="0" bIns="0" rtlCol="0" anchor="t"/>
           <a:lstStyle/>
           <a:p>
             <a:pPr algn="l" indent="0" marL="0">
@@ -3060,7 +3088,7 @@
           <a:ln/>
         </p:spPr>
         <p:txBody>
-          <a:bodyPr wrap="square" lIns="0" tIns="0" rIns="0" bIns="0" rtlCol="0" anchor="t"/>
+          <a:bodyPr wrap="none" lIns="0" tIns="0" rIns="0" bIns="0" rtlCol="0" anchor="t"/>
           <a:lstStyle/>
           <a:p>
             <a:pPr algn="l" indent="0" marL="0">
@@ -3102,7 +3130,7 @@
           <a:ln/>
         </p:spPr>
         <p:txBody>
-          <a:bodyPr wrap="square" lIns="0" tIns="0" rIns="0" bIns="0" rtlCol="0" anchor="t"/>
+          <a:bodyPr wrap="none" lIns="0" tIns="0" rIns="0" bIns="0" rtlCol="0" anchor="t"/>
           <a:lstStyle/>
           <a:p>
             <a:pPr algn="l" indent="0" marL="0">
@@ -3147,7 +3175,7 @@
           <a:ln/>
         </p:spPr>
         <p:txBody>
-          <a:bodyPr wrap="square" lIns="0" tIns="0" rIns="0" bIns="0" rtlCol="0" anchor="t"/>
+          <a:bodyPr wrap="none" lIns="0" tIns="0" rIns="0" bIns="0" rtlCol="0" anchor="t"/>
           <a:lstStyle/>
           <a:p>
             <a:pPr algn="l" indent="0" marL="0">
@@ -3193,6 +3221,10 @@
             <a:prstDash val="solid"/>
           </a:ln>
         </p:spPr>
+        <p:txBody>
+          <a:bodyPr/>
+          <a:p/>
+        </p:txBody>
       </p:sp>
       <p:sp>
         <p:nvSpPr>
@@ -3212,7 +3244,7 @@
           <a:ln/>
         </p:spPr>
         <p:txBody>
-          <a:bodyPr wrap="square" lIns="0" tIns="0" rIns="0" bIns="0" rtlCol="0" anchor="t"/>
+          <a:bodyPr wrap="none" lIns="0" tIns="0" rIns="0" bIns="0" rtlCol="0" anchor="t"/>
           <a:lstStyle/>
           <a:p>
             <a:pPr algn="l" indent="0" marL="0">
@@ -3254,7 +3286,7 @@
           <a:ln/>
         </p:spPr>
         <p:txBody>
-          <a:bodyPr wrap="square" lIns="0" tIns="0" rIns="0" bIns="0" rtlCol="0" anchor="t"/>
+          <a:bodyPr wrap="none" lIns="0" tIns="0" rIns="0" bIns="0" rtlCol="0" anchor="t"/>
           <a:lstStyle/>
           <a:p>
             <a:pPr algn="l" indent="0" marL="0">
@@ -3296,7 +3328,7 @@
           <a:ln/>
         </p:spPr>
         <p:txBody>
-          <a:bodyPr wrap="square" lIns="0" tIns="0" rIns="0" bIns="0" rtlCol="0" anchor="t"/>
+          <a:bodyPr wrap="none" lIns="0" tIns="0" rIns="0" bIns="0" rtlCol="0" anchor="t"/>
           <a:lstStyle/>
           <a:p>
             <a:pPr algn="l" indent="0" marL="0">
@@ -3341,7 +3373,7 @@
           <a:ln/>
         </p:spPr>
         <p:txBody>
-          <a:bodyPr wrap="square" lIns="0" tIns="0" rIns="0" bIns="0" rtlCol="0" anchor="t"/>
+          <a:bodyPr wrap="none" lIns="0" tIns="0" rIns="0" bIns="0" rtlCol="0" anchor="t"/>
           <a:lstStyle/>
           <a:p>
             <a:pPr algn="l" indent="0" marL="0">
@@ -3387,6 +3419,10 @@
             <a:prstDash val="solid"/>
           </a:ln>
         </p:spPr>
+        <p:txBody>
+          <a:bodyPr/>
+          <a:p/>
+        </p:txBody>
       </p:sp>
       <p:sp>
         <p:nvSpPr>
@@ -3406,7 +3442,7 @@
           <a:ln/>
         </p:spPr>
         <p:txBody>
-          <a:bodyPr wrap="square" lIns="0" tIns="0" rIns="0" bIns="0" rtlCol="0" anchor="t"/>
+          <a:bodyPr wrap="none" lIns="0" tIns="0" rIns="0" bIns="0" rtlCol="0" anchor="t"/>
           <a:lstStyle/>
           <a:p>
             <a:pPr algn="l" indent="0" marL="0">
@@ -3448,7 +3484,7 @@
           <a:ln/>
         </p:spPr>
         <p:txBody>
-          <a:bodyPr wrap="square" lIns="0" tIns="0" rIns="0" bIns="0" rtlCol="0" anchor="t"/>
+          <a:bodyPr wrap="none" lIns="0" tIns="0" rIns="0" bIns="0" rtlCol="0" anchor="t"/>
           <a:lstStyle/>
           <a:p>
             <a:pPr algn="l" indent="0" marL="0">
@@ -3490,7 +3526,7 @@
           <a:ln/>
         </p:spPr>
         <p:txBody>
-          <a:bodyPr wrap="square" lIns="0" tIns="0" rIns="0" bIns="0" rtlCol="0" anchor="t"/>
+          <a:bodyPr wrap="none" lIns="0" tIns="0" rIns="0" bIns="0" rtlCol="0" anchor="t"/>
           <a:lstStyle/>
           <a:p>
             <a:pPr algn="l" indent="0" marL="0">
@@ -3535,7 +3571,7 @@
           <a:ln/>
         </p:spPr>
         <p:txBody>
-          <a:bodyPr wrap="square" lIns="0" tIns="0" rIns="0" bIns="0" rtlCol="0" anchor="t"/>
+          <a:bodyPr wrap="none" lIns="0" tIns="0" rIns="0" bIns="0" rtlCol="0" anchor="t"/>
           <a:lstStyle/>
           <a:p>
             <a:pPr algn="l" indent="0" marL="0">
@@ -3581,6 +3617,10 @@
             <a:prstDash val="solid"/>
           </a:ln>
         </p:spPr>
+        <p:txBody>
+          <a:bodyPr/>
+          <a:p/>
+        </p:txBody>
       </p:sp>
       <p:sp>
         <p:nvSpPr>
@@ -3600,7 +3640,7 @@
           <a:ln/>
         </p:spPr>
         <p:txBody>
-          <a:bodyPr wrap="square" lIns="0" tIns="0" rIns="0" bIns="0" rtlCol="0" anchor="t"/>
+          <a:bodyPr wrap="none" lIns="0" tIns="0" rIns="0" bIns="0" rtlCol="0" anchor="t"/>
           <a:lstStyle/>
           <a:p>
             <a:pPr algn="l" indent="0" marL="0">
@@ -3639,7 +3679,7 @@
           <a:ln/>
         </p:spPr>
         <p:txBody>
-          <a:bodyPr wrap="square" lIns="0" tIns="0" rIns="0" bIns="0" rtlCol="0" anchor="t"/>
+          <a:bodyPr wrap="none" lIns="0" tIns="0" rIns="0" bIns="0" rtlCol="0" anchor="t"/>
           <a:lstStyle/>
           <a:p>
             <a:pPr algn="l" indent="0" marL="0">
@@ -3710,7 +3750,7 @@
           <a:ln/>
         </p:spPr>
         <p:txBody>
-          <a:bodyPr wrap="square" lIns="0" tIns="0" rIns="0" bIns="0" rtlCol="0" anchor="t"/>
+          <a:bodyPr wrap="none" lIns="0" tIns="0" rIns="0" bIns="0" rtlCol="0" anchor="t"/>
           <a:lstStyle/>
           <a:p>
             <a:pPr algn="l" indent="0" marL="0">
@@ -3749,7 +3789,7 @@
           <a:ln/>
         </p:spPr>
         <p:txBody>
-          <a:bodyPr wrap="square" lIns="0" tIns="0" rIns="0" bIns="0" rtlCol="0" anchor="t"/>
+          <a:bodyPr wrap="none" lIns="0" tIns="0" rIns="0" bIns="0" rtlCol="0" anchor="t"/>
           <a:lstStyle/>
           <a:p>
             <a:pPr algn="l" indent="0" marL="0">
@@ -3818,7 +3858,7 @@
           <a:ln/>
         </p:spPr>
         <p:txBody>
-          <a:bodyPr wrap="square" lIns="0" tIns="0" rIns="0" bIns="0" rtlCol="0" anchor="t"/>
+          <a:bodyPr wrap="none" lIns="0" tIns="0" rIns="0" bIns="0" rtlCol="0" anchor="t"/>
           <a:lstStyle/>
           <a:p>
             <a:pPr algn="l" indent="0" marL="0">
@@ -3899,6 +3939,10 @@
             <a:prstDash val="solid"/>
           </a:ln>
         </p:spPr>
+        <p:txBody>
+          <a:bodyPr/>
+          <a:p/>
+        </p:txBody>
       </p:sp>
       <p:sp>
         <p:nvSpPr>
@@ -3918,7 +3962,7 @@
           <a:ln/>
         </p:spPr>
         <p:txBody>
-          <a:bodyPr wrap="square" lIns="0" tIns="0" rIns="0" bIns="0" rtlCol="0" anchor="t"/>
+          <a:bodyPr wrap="none" lIns="0" tIns="0" rIns="0" bIns="0" rtlCol="0" anchor="t"/>
           <a:lstStyle/>
           <a:p>
             <a:pPr algn="l" indent="0" marL="0">
@@ -3960,7 +4004,7 @@
           <a:ln/>
         </p:spPr>
         <p:txBody>
-          <a:bodyPr wrap="square" lIns="0" tIns="0" rIns="0" bIns="0" rtlCol="0" anchor="t"/>
+          <a:bodyPr wrap="none" lIns="0" tIns="0" rIns="0" bIns="0" rtlCol="0" anchor="t"/>
           <a:lstStyle/>
           <a:p>
             <a:pPr algn="l" indent="0" marL="0">
@@ -4038,6 +4082,10 @@
             <a:prstDash val="solid"/>
           </a:ln>
         </p:spPr>
+        <p:txBody>
+          <a:bodyPr/>
+          <a:p/>
+        </p:txBody>
       </p:sp>
       <p:sp>
         <p:nvSpPr>
@@ -4057,7 +4105,7 @@
           <a:ln/>
         </p:spPr>
         <p:txBody>
-          <a:bodyPr wrap="square" lIns="0" tIns="0" rIns="0" bIns="0" rtlCol="0" anchor="t"/>
+          <a:bodyPr wrap="none" lIns="0" tIns="0" rIns="0" bIns="0" rtlCol="0" anchor="t"/>
           <a:lstStyle/>
           <a:p>
             <a:pPr algn="l" indent="0" marL="0">
@@ -4099,7 +4147,7 @@
           <a:ln/>
         </p:spPr>
         <p:txBody>
-          <a:bodyPr wrap="square" lIns="0" tIns="0" rIns="0" bIns="0" rtlCol="0" anchor="t"/>
+          <a:bodyPr wrap="none" lIns="0" tIns="0" rIns="0" bIns="0" rtlCol="0" anchor="t"/>
           <a:lstStyle/>
           <a:p>
             <a:pPr algn="l" indent="0" marL="0">
@@ -4177,6 +4225,10 @@
             <a:prstDash val="solid"/>
           </a:ln>
         </p:spPr>
+        <p:txBody>
+          <a:bodyPr/>
+          <a:p/>
+        </p:txBody>
       </p:sp>
       <p:sp>
         <p:nvSpPr>
@@ -4196,7 +4248,7 @@
           <a:ln/>
         </p:spPr>
         <p:txBody>
-          <a:bodyPr wrap="square" lIns="0" tIns="0" rIns="0" bIns="0" rtlCol="0" anchor="t"/>
+          <a:bodyPr wrap="none" lIns="0" tIns="0" rIns="0" bIns="0" rtlCol="0" anchor="t"/>
           <a:lstStyle/>
           <a:p>
             <a:pPr algn="l" indent="0" marL="0">
@@ -4238,7 +4290,7 @@
           <a:ln/>
         </p:spPr>
         <p:txBody>
-          <a:bodyPr wrap="square" lIns="0" tIns="0" rIns="0" bIns="0" rtlCol="0" anchor="t"/>
+          <a:bodyPr wrap="none" lIns="0" tIns="0" rIns="0" bIns="0" rtlCol="0" anchor="t"/>
           <a:lstStyle/>
           <a:p>
             <a:pPr algn="l" indent="0" marL="0">
@@ -4316,6 +4368,10 @@
             <a:prstDash val="solid"/>
           </a:ln>
         </p:spPr>
+        <p:txBody>
+          <a:bodyPr/>
+          <a:p/>
+        </p:txBody>
       </p:sp>
       <p:sp>
         <p:nvSpPr>
@@ -4335,7 +4391,7 @@
           <a:ln/>
         </p:spPr>
         <p:txBody>
-          <a:bodyPr wrap="square" lIns="0" tIns="0" rIns="0" bIns="0" rtlCol="0" anchor="t"/>
+          <a:bodyPr wrap="none" lIns="0" tIns="0" rIns="0" bIns="0" rtlCol="0" anchor="t"/>
           <a:lstStyle/>
           <a:p>
             <a:pPr algn="l" indent="0" marL="0">
@@ -4377,7 +4433,7 @@
           <a:ln/>
         </p:spPr>
         <p:txBody>
-          <a:bodyPr wrap="square" lIns="0" tIns="0" rIns="0" bIns="0" rtlCol="0" anchor="t"/>
+          <a:bodyPr wrap="none" lIns="0" tIns="0" rIns="0" bIns="0" rtlCol="0" anchor="t"/>
           <a:lstStyle/>
           <a:p>
             <a:pPr algn="l" indent="0" marL="0">
@@ -4455,6 +4511,10 @@
             <a:prstDash val="solid"/>
           </a:ln>
         </p:spPr>
+        <p:txBody>
+          <a:bodyPr/>
+          <a:p/>
+        </p:txBody>
       </p:sp>
       <p:sp>
         <p:nvSpPr>
@@ -4474,7 +4534,7 @@
           <a:ln/>
         </p:spPr>
         <p:txBody>
-          <a:bodyPr wrap="square" lIns="0" tIns="0" rIns="0" bIns="0" rtlCol="0" anchor="t"/>
+          <a:bodyPr wrap="none" lIns="0" tIns="0" rIns="0" bIns="0" rtlCol="0" anchor="t"/>
           <a:lstStyle/>
           <a:p>
             <a:pPr algn="l" indent="0" marL="0">
@@ -4516,7 +4576,7 @@
           <a:ln/>
         </p:spPr>
         <p:txBody>
-          <a:bodyPr wrap="square" lIns="0" tIns="0" rIns="0" bIns="0" rtlCol="0" anchor="t"/>
+          <a:bodyPr wrap="none" lIns="0" tIns="0" rIns="0" bIns="0" rtlCol="0" anchor="t"/>
           <a:lstStyle/>
           <a:p>
             <a:pPr algn="l" indent="0" marL="0">
@@ -4594,6 +4654,10 @@
             <a:prstDash val="solid"/>
           </a:ln>
         </p:spPr>
+        <p:txBody>
+          <a:bodyPr/>
+          <a:p/>
+        </p:txBody>
       </p:sp>
       <p:sp>
         <p:nvSpPr>
@@ -4613,7 +4677,7 @@
           <a:ln/>
         </p:spPr>
         <p:txBody>
-          <a:bodyPr wrap="square" lIns="0" tIns="0" rIns="0" bIns="0" rtlCol="0" anchor="t"/>
+          <a:bodyPr wrap="none" lIns="0" tIns="0" rIns="0" bIns="0" rtlCol="0" anchor="t"/>
           <a:lstStyle/>
           <a:p>
             <a:pPr algn="l" indent="0" marL="0">
@@ -4655,7 +4719,7 @@
           <a:ln/>
         </p:spPr>
         <p:txBody>
-          <a:bodyPr wrap="square" lIns="0" tIns="0" rIns="0" bIns="0" rtlCol="0" anchor="t"/>
+          <a:bodyPr wrap="none" lIns="0" tIns="0" rIns="0" bIns="0" rtlCol="0" anchor="t"/>
           <a:lstStyle/>
           <a:p>
             <a:pPr algn="l" indent="0" marL="0">
@@ -4733,6 +4797,10 @@
             <a:prstDash val="solid"/>
           </a:ln>
         </p:spPr>
+        <p:txBody>
+          <a:bodyPr/>
+          <a:p/>
+        </p:txBody>
       </p:sp>
       <p:sp>
         <p:nvSpPr>
@@ -4752,7 +4820,7 @@
           <a:ln/>
         </p:spPr>
         <p:txBody>
-          <a:bodyPr wrap="square" lIns="0" tIns="0" rIns="0" bIns="0" rtlCol="0" anchor="t"/>
+          <a:bodyPr wrap="none" lIns="0" tIns="0" rIns="0" bIns="0" rtlCol="0" anchor="t"/>
           <a:lstStyle/>
           <a:p>
             <a:pPr algn="l" indent="0" marL="0">
@@ -4794,7 +4862,7 @@
           <a:ln/>
         </p:spPr>
         <p:txBody>
-          <a:bodyPr wrap="square" lIns="0" tIns="0" rIns="0" bIns="0" rtlCol="0" anchor="t"/>
+          <a:bodyPr wrap="none" lIns="0" tIns="0" rIns="0" bIns="0" rtlCol="0" anchor="t"/>
           <a:lstStyle/>
           <a:p>
             <a:pPr algn="l" indent="0" marL="0">
@@ -4840,6 +4908,10 @@
             <a:prstDash val="solid"/>
           </a:ln>
         </p:spPr>
+        <p:txBody>
+          <a:bodyPr/>
+          <a:p/>
+        </p:txBody>
       </p:sp>
       <p:sp>
         <p:nvSpPr>
@@ -4859,7 +4931,7 @@
           <a:ln/>
         </p:spPr>
         <p:txBody>
-          <a:bodyPr wrap="square" lIns="0" tIns="0" rIns="0" bIns="0" rtlCol="0" anchor="t"/>
+          <a:bodyPr wrap="none" lIns="0" tIns="0" rIns="0" bIns="0" rtlCol="0" anchor="t"/>
           <a:lstStyle/>
           <a:p>
             <a:pPr algn="l" indent="0" marL="0">
@@ -4898,7 +4970,7 @@
           <a:ln/>
         </p:spPr>
         <p:txBody>
-          <a:bodyPr wrap="square" lIns="0" tIns="0" rIns="0" bIns="0" rtlCol="0" anchor="t"/>
+          <a:bodyPr wrap="none" lIns="0" tIns="0" rIns="0" bIns="0" rtlCol="0" anchor="t"/>
           <a:lstStyle/>
           <a:p>
             <a:pPr algn="l" indent="0" marL="0">
@@ -4969,7 +5041,7 @@
           <a:ln/>
         </p:spPr>
         <p:txBody>
-          <a:bodyPr wrap="square" lIns="0" tIns="0" rIns="0" bIns="0" rtlCol="0" anchor="t"/>
+          <a:bodyPr wrap="none" lIns="0" tIns="0" rIns="0" bIns="0" rtlCol="0" anchor="t"/>
           <a:lstStyle/>
           <a:p>
             <a:pPr algn="l" indent="0" marL="0">
@@ -5008,7 +5080,7 @@
           <a:ln/>
         </p:spPr>
         <p:txBody>
-          <a:bodyPr wrap="square" lIns="0" tIns="0" rIns="0" bIns="0" rtlCol="0" anchor="t"/>
+          <a:bodyPr wrap="none" lIns="0" tIns="0" rIns="0" bIns="0" rtlCol="0" anchor="t"/>
           <a:lstStyle/>
           <a:p>
             <a:pPr algn="l" indent="0" marL="0">
@@ -5077,7 +5149,7 @@
           <a:ln/>
         </p:spPr>
         <p:txBody>
-          <a:bodyPr wrap="square" lIns="0" tIns="0" rIns="0" bIns="0" rtlCol="0" anchor="t"/>
+          <a:bodyPr wrap="none" lIns="0" tIns="0" rIns="0" bIns="0" rtlCol="0" anchor="t"/>
           <a:lstStyle/>
           <a:p>
             <a:pPr algn="l" indent="0" marL="0">
@@ -5126,6 +5198,10 @@
             <a:prstDash val="solid"/>
           </a:ln>
         </p:spPr>
+        <p:txBody>
+          <a:bodyPr/>
+          <a:p/>
+        </p:txBody>
       </p:sp>
       <p:sp>
         <p:nvSpPr>
@@ -5145,7 +5221,7 @@
           <a:ln/>
         </p:spPr>
         <p:txBody>
-          <a:bodyPr wrap="square" lIns="0" tIns="0" rIns="0" bIns="0" rtlCol="0" anchor="t"/>
+          <a:bodyPr wrap="none" lIns="0" tIns="0" rIns="0" bIns="0" rtlCol="0" anchor="t"/>
           <a:lstStyle/>
           <a:p>
             <a:pPr algn="l" indent="0" marL="0">
@@ -5187,7 +5263,7 @@
           <a:ln/>
         </p:spPr>
         <p:txBody>
-          <a:bodyPr wrap="square" lIns="0" tIns="0" rIns="0" bIns="0" rtlCol="0" anchor="t"/>
+          <a:bodyPr wrap="none" lIns="0" tIns="0" rIns="0" bIns="0" rtlCol="0" anchor="t"/>
           <a:lstStyle/>
           <a:p>
             <a:pPr algn="l" indent="0" marL="0">
@@ -5233,6 +5309,10 @@
             <a:prstDash val="solid"/>
           </a:ln>
         </p:spPr>
+        <p:txBody>
+          <a:bodyPr/>
+          <a:p/>
+        </p:txBody>
       </p:sp>
       <p:sp>
         <p:nvSpPr>
@@ -5252,7 +5332,7 @@
           <a:ln/>
         </p:spPr>
         <p:txBody>
-          <a:bodyPr wrap="square" lIns="0" tIns="0" rIns="0" bIns="0" rtlCol="0" anchor="t"/>
+          <a:bodyPr wrap="none" lIns="0" tIns="0" rIns="0" bIns="0" rtlCol="0" anchor="t"/>
           <a:lstStyle/>
           <a:p>
             <a:pPr algn="l" indent="0" marL="0">
@@ -5294,7 +5374,7 @@
           <a:ln/>
         </p:spPr>
         <p:txBody>
-          <a:bodyPr wrap="square" lIns="0" tIns="0" rIns="0" bIns="0" rtlCol="0" anchor="t"/>
+          <a:bodyPr wrap="none" lIns="0" tIns="0" rIns="0" bIns="0" rtlCol="0" anchor="t"/>
           <a:lstStyle/>
           <a:p>
             <a:pPr algn="l" indent="0" marL="0">
@@ -5340,6 +5420,10 @@
             <a:prstDash val="solid"/>
           </a:ln>
         </p:spPr>
+        <p:txBody>
+          <a:bodyPr/>
+          <a:p/>
+        </p:txBody>
       </p:sp>
       <p:sp>
         <p:nvSpPr>
@@ -5359,7 +5443,7 @@
           <a:ln/>
         </p:spPr>
         <p:txBody>
-          <a:bodyPr wrap="square" lIns="0" tIns="0" rIns="0" bIns="0" rtlCol="0" anchor="t"/>
+          <a:bodyPr wrap="none" lIns="0" tIns="0" rIns="0" bIns="0" rtlCol="0" anchor="t"/>
           <a:lstStyle/>
           <a:p>
             <a:pPr algn="l" indent="0" marL="0">
@@ -5401,7 +5485,7 @@
           <a:ln/>
         </p:spPr>
         <p:txBody>
-          <a:bodyPr wrap="square" lIns="0" tIns="0" rIns="0" bIns="0" rtlCol="0" anchor="t"/>
+          <a:bodyPr wrap="none" lIns="0" tIns="0" rIns="0" bIns="0" rtlCol="0" anchor="t"/>
           <a:lstStyle/>
           <a:p>
             <a:pPr algn="l" indent="0" marL="0">
@@ -5447,6 +5531,10 @@
             <a:prstDash val="solid"/>
           </a:ln>
         </p:spPr>
+        <p:txBody>
+          <a:bodyPr/>
+          <a:p/>
+        </p:txBody>
       </p:sp>
       <p:sp>
         <p:nvSpPr>
@@ -5466,7 +5554,7 @@
           <a:ln/>
         </p:spPr>
         <p:txBody>
-          <a:bodyPr wrap="square" lIns="0" tIns="0" rIns="0" bIns="0" rtlCol="0" anchor="t"/>
+          <a:bodyPr wrap="none" lIns="0" tIns="0" rIns="0" bIns="0" rtlCol="0" anchor="t"/>
           <a:lstStyle/>
           <a:p>
             <a:pPr algn="l" indent="0" marL="0">
@@ -5508,7 +5596,7 @@
           <a:ln/>
         </p:spPr>
         <p:txBody>
-          <a:bodyPr wrap="square" lIns="0" tIns="0" rIns="0" bIns="0" rtlCol="0" anchor="t"/>
+          <a:bodyPr wrap="none" lIns="0" tIns="0" rIns="0" bIns="0" rtlCol="0" anchor="t"/>
           <a:lstStyle/>
           <a:p>
             <a:pPr algn="l" indent="0" marL="0">
@@ -5582,7 +5670,7 @@
           <a:ln/>
         </p:spPr>
         <p:txBody>
-          <a:bodyPr wrap="square" lIns="0" tIns="0" rIns="0" bIns="0" rtlCol="0" anchor="t"/>
+          <a:bodyPr wrap="none" lIns="0" tIns="0" rIns="0" bIns="0" rtlCol="0" anchor="t"/>
           <a:lstStyle/>
           <a:p>
             <a:pPr algn="l" indent="0" marL="0">
@@ -5628,6 +5716,10 @@
             <a:prstDash val="solid"/>
           </a:ln>
         </p:spPr>
+        <p:txBody>
+          <a:bodyPr/>
+          <a:p/>
+        </p:txBody>
       </p:sp>
       <p:sp>
         <p:nvSpPr>
@@ -5647,7 +5739,7 @@
           <a:ln/>
         </p:spPr>
         <p:txBody>
-          <a:bodyPr wrap="square" lIns="0" tIns="0" rIns="0" bIns="0" rtlCol="0" anchor="t"/>
+          <a:bodyPr wrap="none" lIns="0" tIns="0" rIns="0" bIns="0" rtlCol="0" anchor="t"/>
           <a:lstStyle/>
           <a:p>
             <a:pPr algn="l" indent="0" marL="0">
@@ -5686,7 +5778,7 @@
           <a:ln/>
         </p:spPr>
         <p:txBody>
-          <a:bodyPr wrap="square" lIns="0" tIns="0" rIns="0" bIns="0" rtlCol="0" anchor="t"/>
+          <a:bodyPr wrap="none" lIns="0" tIns="0" rIns="0" bIns="0" rtlCol="0" anchor="t"/>
           <a:lstStyle/>
           <a:p>
             <a:pPr algn="l" indent="0" marL="0">
